--- a/session3/session3_full.pptx
+++ b/session3/session3_full.pptx
@@ -4,6 +4,9 @@
   <p:sldMasterIdLst>
     <p:sldMasterId id="2147483648" r:id="rId1"/>
   </p:sldMasterIdLst>
+  <p:notesMasterIdLst>
+    <p:notesMasterId r:id="rId14"/>
+  </p:notesMasterIdLst>
   <p:sldIdLst>
     <p:sldId id="256" r:id="rId2"/>
     <p:sldId id="257" r:id="rId3"/>
@@ -18,10 +21,7 @@
     <p:sldId id="266" r:id="rId12"/>
     <p:sldId id="267" r:id="rId13"/>
   </p:sldIdLst>
-  <p:notesMasterIdLst>
-    <p:notesMasterId r:id="rId14"/>
-  </p:notesMasterIdLst>
-  <p:sldSz cx="9144000" cy="5143500"/>
+  <p:sldSz cx="9144000" cy="5143500" type="screen16x9"/>
   <p:notesSz cx="5143500" cy="9144000"/>
   <p:defaultTextStyle>
     <a:lvl1pPr marL="0" algn="l" defTabSz="914400" rtl="0" eaLnBrk="1" latinLnBrk="0" hangingPunct="1">
@@ -115,6 +115,11 @@
       </a:defRPr>
     </a:lvl9pPr>
   </p:defaultTextStyle>
+  <p:extLst>
+    <p:ext uri="{EFAFB233-063F-42B5-8137-9DF3F51BA10A}">
+      <p15:sldGuideLst xmlns:p15="http://schemas.microsoft.com/office/powerpoint/2012/main"/>
+    </p:ext>
+  </p:extLst>
 </p:presentation>
 </file>
 
@@ -140,241 +145,17 @@
           <a:chExt cx="0" cy="0"/>
         </a:xfrm>
       </p:grpSpPr>
-      <p:sp>
-        <p:nvSpPr>
-          <p:cNvPr id="2" name="Header Placeholder 1"/>
-          <p:cNvSpPr>
-            <a:spLocks noGrp="1"/>
-          </p:cNvSpPr>
-          <p:nvPr>
-            <p:ph type="hdr" sz="quarter"/>
-          </p:nvPr>
-        </p:nvSpPr>
-        <p:spPr>
-          <a:xfrm>
-            <a:off x="0" y="0"/>
-            <a:ext cx="2971800" cy="458788"/>
-          </a:xfrm>
-          <a:prstGeom prst="rect">
-            <a:avLst/>
-          </a:prstGeom>
-        </p:spPr>
-        <p:txBody>
-          <a:bodyPr vert="horz" lIns="91440" tIns="45720" rIns="91440" bIns="45720" rtlCol="0"/>
-          <a:lstStyle>
-            <a:lvl1pPr algn="l">
-              <a:defRPr sz="1200"/>
-            </a:lvl1pPr>
-          </a:lstStyle>
-          <a:p>
-            <a:endParaRPr lang="en-US"/>
-          </a:p>
-        </p:txBody>
-      </p:sp>
-      <p:sp>
-        <p:nvSpPr>
-          <p:cNvPr id="3" name="Date Placeholder 2"/>
-          <p:cNvSpPr>
-            <a:spLocks noGrp="1"/>
-          </p:cNvSpPr>
-          <p:nvPr>
-            <p:ph type="dt" idx="1"/>
-          </p:nvPr>
-        </p:nvSpPr>
-        <p:spPr>
-          <a:xfrm>
-            <a:off x="3884613" y="0"/>
-            <a:ext cx="2971800" cy="458788"/>
-          </a:xfrm>
-          <a:prstGeom prst="rect">
-            <a:avLst/>
-          </a:prstGeom>
-        </p:spPr>
-        <p:txBody>
-          <a:bodyPr vert="horz" lIns="91440" tIns="45720" rIns="91440" bIns="45720" rtlCol="0"/>
-          <a:lstStyle>
-            <a:lvl1pPr algn="r">
-              <a:defRPr sz="1200"/>
-            </a:lvl1pPr>
-          </a:lstStyle>
-          <a:p>
-            <a:fld id="{5282F153-3F37-0F45-9E97-73ACFA13230C}" type="datetimeFigureOut">
-              <a:rPr lang="en-US"/>
-              <a:t>7/23/19</a:t>
-            </a:fld>
-            <a:endParaRPr lang="en-US"/>
-          </a:p>
-        </p:txBody>
-      </p:sp>
-      <p:sp>
-        <p:nvSpPr>
-          <p:cNvPr id="4" name="Slide Image Placeholder 3"/>
-          <p:cNvSpPr>
-            <a:spLocks noGrp="1" noRot="1" noChangeAspect="1"/>
-          </p:cNvSpPr>
-          <p:nvPr>
-            <p:ph type="sldImg" idx="2"/>
-          </p:nvPr>
-        </p:nvSpPr>
-        <p:spPr>
-          <a:xfrm>
-            <a:off x="685800" y="1143000"/>
-            <a:ext cx="5486400" cy="3086100"/>
-          </a:xfrm>
-          <a:prstGeom prst="rect">
-            <a:avLst/>
-          </a:prstGeom>
-          <a:noFill/>
-          <a:ln w="12700">
-            <a:solidFill>
-              <a:prstClr val="black"/>
-            </a:solidFill>
-          </a:ln>
-        </p:spPr>
-        <p:txBody>
-          <a:bodyPr vert="horz" lIns="91440" tIns="45720" rIns="91440" bIns="45720" rtlCol="0" anchor="ctr"/>
-          <a:lstStyle/>
-          <a:p>
-            <a:endParaRPr lang="en-US"/>
-          </a:p>
-        </p:txBody>
-      </p:sp>
-      <p:sp>
-        <p:nvSpPr>
-          <p:cNvPr id="5" name="Notes Placeholder 4"/>
-          <p:cNvSpPr>
-            <a:spLocks noGrp="1"/>
-          </p:cNvSpPr>
-          <p:nvPr>
-            <p:ph type="body" sz="quarter" idx="3"/>
-          </p:nvPr>
-        </p:nvSpPr>
-        <p:spPr>
-          <a:xfrm>
-            <a:off x="685800" y="4400550"/>
-            <a:ext cx="5486400" cy="3600450"/>
-          </a:xfrm>
-          <a:prstGeom prst="rect">
-            <a:avLst/>
-          </a:prstGeom>
-        </p:spPr>
-        <p:txBody>
-          <a:bodyPr vert="horz" lIns="91440" tIns="45720" rIns="91440" bIns="45720" rtlCol="0"/>
-          <a:lstStyle/>
-          <a:p>
-            <a:pPr lvl="0"/>
-            <a:r>
-              <a:rPr lang="en-US"/>
-              <a:t>Click to edit Master text styles</a:t>
-            </a:r>
-          </a:p>
-          <a:p>
-            <a:pPr lvl="1"/>
-            <a:r>
-              <a:rPr lang="en-US"/>
-              <a:t>Second level</a:t>
-            </a:r>
-          </a:p>
-          <a:p>
-            <a:pPr lvl="2"/>
-            <a:r>
-              <a:rPr lang="en-US"/>
-              <a:t>Third level</a:t>
-            </a:r>
-          </a:p>
-          <a:p>
-            <a:pPr lvl="3"/>
-            <a:r>
-              <a:rPr lang="en-US"/>
-              <a:t>Fourth level</a:t>
-            </a:r>
-          </a:p>
-          <a:p>
-            <a:pPr lvl="4"/>
-            <a:r>
-              <a:rPr lang="en-US"/>
-              <a:t>Fifth level</a:t>
-            </a:r>
-          </a:p>
-        </p:txBody>
-      </p:sp>
-      <p:sp>
-        <p:nvSpPr>
-          <p:cNvPr id="6" name="Footer Placeholder 5"/>
-          <p:cNvSpPr>
-            <a:spLocks noGrp="1"/>
-          </p:cNvSpPr>
-          <p:nvPr>
-            <p:ph type="ftr" sz="quarter" idx="4"/>
-          </p:nvPr>
-        </p:nvSpPr>
-        <p:spPr>
-          <a:xfrm>
-            <a:off x="0" y="8685213"/>
-            <a:ext cx="2971800" cy="458787"/>
-          </a:xfrm>
-          <a:prstGeom prst="rect">
-            <a:avLst/>
-          </a:prstGeom>
-        </p:spPr>
-        <p:txBody>
-          <a:bodyPr vert="horz" lIns="91440" tIns="45720" rIns="91440" bIns="45720" rtlCol="0" anchor="b"/>
-          <a:lstStyle>
-            <a:lvl1pPr algn="l">
-              <a:defRPr sz="1200"/>
-            </a:lvl1pPr>
-          </a:lstStyle>
-          <a:p>
-            <a:endParaRPr lang="en-US"/>
-          </a:p>
-        </p:txBody>
-      </p:sp>
-      <p:sp>
-        <p:nvSpPr>
-          <p:cNvPr id="7" name="Slide Number Placeholder 6"/>
-          <p:cNvSpPr>
-            <a:spLocks noGrp="1"/>
-          </p:cNvSpPr>
-          <p:nvPr>
-            <p:ph type="sldNum" sz="quarter" idx="5"/>
-          </p:nvPr>
-        </p:nvSpPr>
-        <p:spPr>
-          <a:xfrm>
-            <a:off x="3884613" y="8685213"/>
-            <a:ext cx="2971800" cy="458787"/>
-          </a:xfrm>
-          <a:prstGeom prst="rect">
-            <a:avLst/>
-          </a:prstGeom>
-        </p:spPr>
-        <p:txBody>
-          <a:bodyPr vert="horz" lIns="91440" tIns="45720" rIns="91440" bIns="45720" rtlCol="0" anchor="b"/>
-          <a:lstStyle>
-            <a:lvl1pPr algn="r">
-              <a:defRPr sz="1200"/>
-            </a:lvl1pPr>
-          </a:lstStyle>
-          <a:p>
-            <a:fld id="{CE5E9CC1-C706-0F49-92D6-E571CC5EEA8F}" type="slidenum">
-              <a:rPr lang="en-US"/>
-              <a:t>‹#›</a:t>
-            </a:fld>
-            <a:endParaRPr lang="en-US"/>
-          </a:p>
-        </p:txBody>
-      </p:sp>
     </p:spTree>
     <p:extLst>
       <p:ext uri="{BB962C8B-B14F-4D97-AF65-F5344CB8AC3E}">
-        <p14:creationId xmlns:p14="http://schemas.microsoft.com/office/powerpoint/2010/main" val="1024086991"/>
+        <p14:creationId xmlns:p14="http://schemas.microsoft.com/office/powerpoint/2010/main" val="3942015474"/>
       </p:ext>
     </p:extLst>
   </p:cSld>
   <p:clrMap bg1="lt1" tx1="dk1" bg2="lt2" tx2="dk2" accent1="accent1" accent2="accent2" accent3="accent3" accent4="accent4" accent5="accent5" accent6="accent6" hlink="hlink" folHlink="folHlink"/>
   <p:notesStyle>
     <a:lvl1pPr marL="0" algn="l" defTabSz="914400" rtl="0" eaLnBrk="1" latinLnBrk="0" hangingPunct="1">
-      <a:defRPr sz="1200" kern="1200">
+      <a:defRPr kumimoji="1" sz="1200" kern="1200">
         <a:solidFill>
           <a:schemeClr val="tx1"/>
         </a:solidFill>
@@ -384,7 +165,7 @@
       </a:defRPr>
     </a:lvl1pPr>
     <a:lvl2pPr marL="457200" algn="l" defTabSz="914400" rtl="0" eaLnBrk="1" latinLnBrk="0" hangingPunct="1">
-      <a:defRPr sz="1200" kern="1200">
+      <a:defRPr kumimoji="1" sz="1200" kern="1200">
         <a:solidFill>
           <a:schemeClr val="tx1"/>
         </a:solidFill>
@@ -394,7 +175,7 @@
       </a:defRPr>
     </a:lvl2pPr>
     <a:lvl3pPr marL="914400" algn="l" defTabSz="914400" rtl="0" eaLnBrk="1" latinLnBrk="0" hangingPunct="1">
-      <a:defRPr sz="1200" kern="1200">
+      <a:defRPr kumimoji="1" sz="1200" kern="1200">
         <a:solidFill>
           <a:schemeClr val="tx1"/>
         </a:solidFill>
@@ -404,7 +185,7 @@
       </a:defRPr>
     </a:lvl3pPr>
     <a:lvl4pPr marL="1371600" algn="l" defTabSz="914400" rtl="0" eaLnBrk="1" latinLnBrk="0" hangingPunct="1">
-      <a:defRPr sz="1200" kern="1200">
+      <a:defRPr kumimoji="1" sz="1200" kern="1200">
         <a:solidFill>
           <a:schemeClr val="tx1"/>
         </a:solidFill>
@@ -414,7 +195,7 @@
       </a:defRPr>
     </a:lvl4pPr>
     <a:lvl5pPr marL="1828800" algn="l" defTabSz="914400" rtl="0" eaLnBrk="1" latinLnBrk="0" hangingPunct="1">
-      <a:defRPr sz="1200" kern="1200">
+      <a:defRPr kumimoji="1" sz="1200" kern="1200">
         <a:solidFill>
           <a:schemeClr val="tx1"/>
         </a:solidFill>
@@ -424,7 +205,7 @@
       </a:defRPr>
     </a:lvl5pPr>
     <a:lvl6pPr marL="2286000" algn="l" defTabSz="914400" rtl="0" eaLnBrk="1" latinLnBrk="0" hangingPunct="1">
-      <a:defRPr sz="1200" kern="1200">
+      <a:defRPr kumimoji="1" sz="1200" kern="1200">
         <a:solidFill>
           <a:schemeClr val="tx1"/>
         </a:solidFill>
@@ -434,7 +215,7 @@
       </a:defRPr>
     </a:lvl6pPr>
     <a:lvl7pPr marL="2743200" algn="l" defTabSz="914400" rtl="0" eaLnBrk="1" latinLnBrk="0" hangingPunct="1">
-      <a:defRPr sz="1200" kern="1200">
+      <a:defRPr kumimoji="1" sz="1200" kern="1200">
         <a:solidFill>
           <a:schemeClr val="tx1"/>
         </a:solidFill>
@@ -444,7 +225,7 @@
       </a:defRPr>
     </a:lvl7pPr>
     <a:lvl8pPr marL="3200400" algn="l" defTabSz="914400" rtl="0" eaLnBrk="1" latinLnBrk="0" hangingPunct="1">
-      <a:defRPr sz="1200" kern="1200">
+      <a:defRPr kumimoji="1" sz="1200" kern="1200">
         <a:solidFill>
           <a:schemeClr val="tx1"/>
         </a:solidFill>
@@ -454,7 +235,7 @@
       </a:defRPr>
     </a:lvl8pPr>
     <a:lvl9pPr marL="3657600" algn="l" defTabSz="914400" rtl="0" eaLnBrk="1" latinLnBrk="0" hangingPunct="1">
-      <a:defRPr sz="1200" kern="1200">
+      <a:defRPr kumimoji="1" sz="1200" kern="1200">
         <a:solidFill>
           <a:schemeClr val="tx1"/>
         </a:solidFill>
@@ -511,10 +292,6 @@
           <a:bodyPr/>
           <a:lstStyle/>
           <a:p>
-            <a:r>
-              <a:rPr lang="en-US" dirty="0"/>
-              <a:t/>
-            </a:r>
             <a:endParaRPr lang="en-US" dirty="0"/>
           </a:p>
         </p:txBody>
@@ -599,10 +376,6 @@
           <a:bodyPr/>
           <a:lstStyle/>
           <a:p>
-            <a:r>
-              <a:rPr lang="en-US" dirty="0"/>
-              <a:t/>
-            </a:r>
             <a:endParaRPr lang="en-US" dirty="0"/>
           </a:p>
         </p:txBody>
@@ -687,10 +460,6 @@
           <a:bodyPr/>
           <a:lstStyle/>
           <a:p>
-            <a:r>
-              <a:rPr lang="en-US" dirty="0"/>
-              <a:t/>
-            </a:r>
             <a:endParaRPr lang="en-US" dirty="0"/>
           </a:p>
         </p:txBody>
@@ -775,10 +544,6 @@
           <a:bodyPr/>
           <a:lstStyle/>
           <a:p>
-            <a:r>
-              <a:rPr lang="en-US" dirty="0"/>
-              <a:t/>
-            </a:r>
             <a:endParaRPr lang="en-US" dirty="0"/>
           </a:p>
         </p:txBody>
@@ -863,10 +628,6 @@
           <a:bodyPr/>
           <a:lstStyle/>
           <a:p>
-            <a:r>
-              <a:rPr lang="en-US" dirty="0"/>
-              <a:t/>
-            </a:r>
             <a:endParaRPr lang="en-US" dirty="0"/>
           </a:p>
         </p:txBody>
@@ -951,10 +712,6 @@
           <a:bodyPr/>
           <a:lstStyle/>
           <a:p>
-            <a:r>
-              <a:rPr lang="en-US" dirty="0"/>
-              <a:t/>
-            </a:r>
             <a:endParaRPr lang="en-US" dirty="0"/>
           </a:p>
         </p:txBody>
@@ -1039,10 +796,6 @@
           <a:bodyPr/>
           <a:lstStyle/>
           <a:p>
-            <a:r>
-              <a:rPr lang="en-US" dirty="0"/>
-              <a:t/>
-            </a:r>
             <a:endParaRPr lang="en-US" dirty="0"/>
           </a:p>
         </p:txBody>
@@ -1127,10 +880,6 @@
           <a:bodyPr/>
           <a:lstStyle/>
           <a:p>
-            <a:r>
-              <a:rPr lang="en-US" dirty="0"/>
-              <a:t/>
-            </a:r>
             <a:endParaRPr lang="en-US" dirty="0"/>
           </a:p>
         </p:txBody>
@@ -1215,10 +964,6 @@
           <a:bodyPr/>
           <a:lstStyle/>
           <a:p>
-            <a:r>
-              <a:rPr lang="en-US" dirty="0"/>
-              <a:t/>
-            </a:r>
             <a:endParaRPr lang="en-US" dirty="0"/>
           </a:p>
         </p:txBody>
@@ -1303,10 +1048,6 @@
           <a:bodyPr/>
           <a:lstStyle/>
           <a:p>
-            <a:r>
-              <a:rPr lang="en-US" dirty="0"/>
-              <a:t/>
-            </a:r>
             <a:endParaRPr lang="en-US" dirty="0"/>
           </a:p>
         </p:txBody>
@@ -1391,10 +1132,6 @@
           <a:bodyPr/>
           <a:lstStyle/>
           <a:p>
-            <a:r>
-              <a:rPr lang="en-US" dirty="0"/>
-              <a:t/>
-            </a:r>
             <a:endParaRPr lang="en-US" dirty="0"/>
           </a:p>
         </p:txBody>
@@ -1479,10 +1216,6 @@
           <a:bodyPr/>
           <a:lstStyle/>
           <a:p>
-            <a:r>
-              <a:rPr lang="en-US" dirty="0"/>
-              <a:t/>
-            </a:r>
             <a:endParaRPr lang="en-US" dirty="0"/>
           </a:p>
         </p:txBody>
@@ -1556,6 +1289,11 @@
 <file path=ppt/slideMasters/slideMaster1.xml><?xml version="1.0" encoding="utf-8"?>
 <p:sldMaster xmlns:a="http://schemas.openxmlformats.org/drawingml/2006/main" xmlns:r="http://schemas.openxmlformats.org/officeDocument/2006/relationships" xmlns:p="http://schemas.openxmlformats.org/presentationml/2006/main">
   <p:cSld>
+    <p:bg>
+      <p:bgRef idx="1001">
+        <a:schemeClr val="bg1"/>
+      </p:bgRef>
+    </p:bg>
     <p:spTree>
       <p:nvGrpSpPr>
         <p:cNvPr id="1" name=""/>
@@ -1838,6 +1576,7 @@
         <a:solidFill>
           <a:srgbClr val="1E2761"/>
         </a:solidFill>
+        <a:effectLst/>
       </p:bgPr>
     </p:bg>
     <p:spTree>
@@ -1856,14 +1595,14 @@
       </p:grpSpPr>
       <p:pic>
         <p:nvPicPr>
-          <p:cNvPr id="2" name="Image 0" descr="preencoded.png">    </p:cNvPr>
+          <p:cNvPr id="2" name="Image 0" descr="preencoded.png"/>
           <p:cNvPicPr>
             <a:picLocks noChangeAspect="1"/>
           </p:cNvPicPr>
           <p:nvPr/>
         </p:nvPicPr>
         <p:blipFill>
-          <a:blip r:embed="rId1">
+          <a:blip r:embed="rId3">
             <a:alphaModFix amt="40000"/>
           </a:blip>
           <a:stretch>
@@ -1901,11 +1640,11 @@
           <a:bodyPr wrap="square" rtlCol="0" anchor="ctr"/>
           <a:lstStyle/>
           <a:p>
-            <a:pPr indent="0" marL="0">
-              <a:buNone/>
-            </a:pPr>
-            <a:r>
-              <a:rPr lang="en-US" sz="1100" b="1" spc="400" kern="0" dirty="0">
+            <a:pPr marL="0" indent="0">
+              <a:buNone/>
+            </a:pPr>
+            <a:r>
+              <a:rPr lang="en-US" sz="1100" b="1" kern="0" spc="400" dirty="0">
                 <a:solidFill>
                   <a:srgbClr val="CADCFC"/>
                 </a:solidFill>
@@ -1940,7 +1679,7 @@
           <a:bodyPr wrap="square" rtlCol="0" anchor="ctr"/>
           <a:lstStyle/>
           <a:p>
-            <a:pPr indent="0" marL="0">
+            <a:pPr marL="0" indent="0">
               <a:buNone/>
             </a:pPr>
             <a:r>
@@ -1979,7 +1718,7 @@
           <a:bodyPr wrap="square" rtlCol="0" anchor="ctr"/>
           <a:lstStyle/>
           <a:p>
-            <a:pPr indent="0" marL="0">
+            <a:pPr marL="0" indent="0">
               <a:buNone/>
             </a:pPr>
             <a:r>
@@ -2043,7 +1782,7 @@
           <a:bodyPr wrap="square" rtlCol="0" anchor="ctr"/>
           <a:lstStyle/>
           <a:p>
-            <a:pPr indent="0" marL="0">
+            <a:pPr marL="0" indent="0">
               <a:buNone/>
             </a:pPr>
             <a:r>
@@ -2082,7 +1821,7 @@
           <a:bodyPr wrap="square" rtlCol="0" anchor="ctr"/>
           <a:lstStyle/>
           <a:p>
-            <a:pPr indent="0" marL="0">
+            <a:pPr marL="0" indent="0">
               <a:buNone/>
             </a:pPr>
             <a:r>
@@ -2121,11 +1860,11 @@
           <a:bodyPr wrap="square" rtlCol="0" anchor="ctr"/>
           <a:lstStyle/>
           <a:p>
-            <a:pPr algn="r" indent="0" marL="0">
-              <a:buNone/>
-            </a:pPr>
-            <a:r>
-              <a:rPr lang="en-US" sz="1400" spc="200" kern="0" dirty="0">
+            <a:pPr marL="0" indent="0" algn="r">
+              <a:buNone/>
+            </a:pPr>
+            <a:r>
+              <a:rPr lang="en-US" sz="1400" kern="0" spc="200" dirty="0">
                 <a:solidFill>
                   <a:srgbClr val="CADCFC"/>
                 </a:solidFill>
@@ -2160,7 +1899,7 @@
           <a:bodyPr wrap="square" rtlCol="0" anchor="ctr"/>
           <a:lstStyle/>
           <a:p>
-            <a:pPr indent="0" marL="0">
+            <a:pPr marL="0" indent="0">
               <a:buNone/>
             </a:pPr>
             <a:r>
@@ -2169,10 +1908,19 @@
                   <a:srgbClr val="CADCFC"/>
                 </a:solidFill>
                 <a:latin typeface="Arial" pitchFamily="34" charset="0"/>
-                <a:ea typeface="Arial" pitchFamily="34" charset="-122"/>
                 <a:cs typeface="Arial" pitchFamily="34" charset="-120"/>
               </a:rPr>
-              <a:t>Koji</a:t>
+              <a:t>土田</a:t>
+            </a:r>
+            <a:r>
+              <a:rPr lang="ja-JP" altLang="en-US" sz="1100">
+                <a:solidFill>
+                  <a:srgbClr val="CADCFC"/>
+                </a:solidFill>
+                <a:latin typeface="Arial" pitchFamily="34" charset="0"/>
+                <a:cs typeface="Arial" pitchFamily="34" charset="-120"/>
+              </a:rPr>
+              <a:t>　晃司</a:t>
             </a:r>
             <a:endParaRPr lang="en-US" sz="1100" dirty="0"/>
           </a:p>
@@ -2194,6 +1942,7 @@
         <a:solidFill>
           <a:srgbClr val="1E2761"/>
         </a:solidFill>
+        <a:effectLst/>
       </p:bgPr>
     </p:bg>
     <p:spTree>
@@ -2231,11 +1980,11 @@
           <a:bodyPr wrap="square" rtlCol="0" anchor="ctr"/>
           <a:lstStyle/>
           <a:p>
-            <a:pPr indent="0" marL="0">
-              <a:buNone/>
-            </a:pPr>
-            <a:r>
-              <a:rPr lang="en-US" sz="1400" b="1" spc="800" kern="0" dirty="0">
+            <a:pPr marL="0" indent="0">
+              <a:buNone/>
+            </a:pPr>
+            <a:r>
+              <a:rPr lang="en-US" sz="1400" b="1" kern="0" spc="800" dirty="0">
                 <a:solidFill>
                   <a:srgbClr val="F96167"/>
                 </a:solidFill>
@@ -2270,7 +2019,7 @@
           <a:bodyPr wrap="square" rtlCol="0" anchor="ctr"/>
           <a:lstStyle/>
           <a:p>
-            <a:pPr indent="0" marL="0">
+            <a:pPr marL="0" indent="0">
               <a:buNone/>
             </a:pPr>
             <a:r>
@@ -2309,7 +2058,7 @@
           <a:bodyPr wrap="square" rtlCol="0" anchor="ctr"/>
           <a:lstStyle/>
           <a:p>
-            <a:pPr indent="0" marL="0">
+            <a:pPr marL="0" indent="0">
               <a:buNone/>
             </a:pPr>
             <a:r>
@@ -2398,7 +2147,7 @@
           <a:bodyPr wrap="square" lIns="0" tIns="0" rIns="0" bIns="0" rtlCol="0" anchor="ctr"/>
           <a:lstStyle/>
           <a:p>
-            <a:pPr indent="0" marL="0">
+            <a:pPr marL="0" indent="0">
               <a:buNone/>
             </a:pPr>
             <a:r>
@@ -2462,7 +2211,7 @@
           <a:bodyPr wrap="square" lIns="0" tIns="0" rIns="0" bIns="0" rtlCol="0" anchor="ctr"/>
           <a:lstStyle/>
           <a:p>
-            <a:pPr algn="ctr" indent="0" marL="0">
+            <a:pPr marL="0" indent="0" algn="ctr">
               <a:buNone/>
             </a:pPr>
             <a:r>
@@ -2501,7 +2250,7 @@
           <a:bodyPr wrap="square" lIns="0" tIns="0" rIns="0" bIns="0" rtlCol="0" anchor="t"/>
           <a:lstStyle/>
           <a:p>
-            <a:pPr indent="0" marL="0">
+            <a:pPr marL="0" indent="0">
               <a:buNone/>
             </a:pPr>
             <a:r>
@@ -2565,7 +2314,7 @@
           <a:bodyPr wrap="square" lIns="0" tIns="0" rIns="0" bIns="0" rtlCol="0" anchor="ctr"/>
           <a:lstStyle/>
           <a:p>
-            <a:pPr indent="0" marL="0">
+            <a:pPr marL="0" indent="0">
               <a:buNone/>
             </a:pPr>
             <a:r>
@@ -2629,7 +2378,7 @@
           <a:bodyPr wrap="square" lIns="0" tIns="0" rIns="0" bIns="0" rtlCol="0" anchor="ctr"/>
           <a:lstStyle/>
           <a:p>
-            <a:pPr algn="ctr" indent="0" marL="0">
+            <a:pPr marL="0" indent="0" algn="ctr">
               <a:buNone/>
             </a:pPr>
             <a:r>
@@ -2668,7 +2417,7 @@
           <a:bodyPr wrap="square" lIns="0" tIns="0" rIns="0" bIns="0" rtlCol="0" anchor="t"/>
           <a:lstStyle/>
           <a:p>
-            <a:pPr indent="0" marL="0">
+            <a:pPr marL="0" indent="0">
               <a:buNone/>
             </a:pPr>
             <a:r>
@@ -2732,7 +2481,7 @@
           <a:bodyPr wrap="square" lIns="0" tIns="0" rIns="0" bIns="0" rtlCol="0" anchor="ctr"/>
           <a:lstStyle/>
           <a:p>
-            <a:pPr indent="0" marL="0">
+            <a:pPr marL="0" indent="0">
               <a:buNone/>
             </a:pPr>
             <a:r>
@@ -2796,7 +2545,7 @@
           <a:bodyPr wrap="square" lIns="0" tIns="0" rIns="0" bIns="0" rtlCol="0" anchor="ctr"/>
           <a:lstStyle/>
           <a:p>
-            <a:pPr algn="ctr" indent="0" marL="0">
+            <a:pPr marL="0" indent="0" algn="ctr">
               <a:buNone/>
             </a:pPr>
             <a:r>
@@ -2835,7 +2584,7 @@
           <a:bodyPr wrap="square" lIns="0" tIns="0" rIns="0" bIns="0" rtlCol="0" anchor="t"/>
           <a:lstStyle/>
           <a:p>
-            <a:pPr indent="0" marL="0">
+            <a:pPr marL="0" indent="0">
               <a:buNone/>
             </a:pPr>
             <a:r>
@@ -2899,7 +2648,7 @@
           <a:bodyPr wrap="square" lIns="0" tIns="0" rIns="0" bIns="0" rtlCol="0" anchor="ctr"/>
           <a:lstStyle/>
           <a:p>
-            <a:pPr indent="0" marL="0">
+            <a:pPr marL="0" indent="0">
               <a:buNone/>
             </a:pPr>
             <a:r>
@@ -2963,7 +2712,7 @@
           <a:bodyPr wrap="square" lIns="0" tIns="0" rIns="0" bIns="0" rtlCol="0" anchor="ctr"/>
           <a:lstStyle/>
           <a:p>
-            <a:pPr algn="ctr" indent="0" marL="0">
+            <a:pPr marL="0" indent="0" algn="ctr">
               <a:buNone/>
             </a:pPr>
             <a:r>
@@ -3002,7 +2751,7 @@
           <a:bodyPr wrap="square" lIns="0" tIns="0" rIns="0" bIns="0" rtlCol="0" anchor="t"/>
           <a:lstStyle/>
           <a:p>
-            <a:pPr indent="0" marL="0">
+            <a:pPr marL="0" indent="0">
               <a:buNone/>
             </a:pPr>
             <a:r>
@@ -3041,7 +2790,7 @@
           <a:bodyPr wrap="square" lIns="0" tIns="0" rIns="0" bIns="0" rtlCol="0" anchor="ctr"/>
           <a:lstStyle/>
           <a:p>
-            <a:pPr indent="0" marL="0">
+            <a:pPr marL="0" indent="0">
               <a:buNone/>
             </a:pPr>
             <a:r>
@@ -3075,6 +2824,7 @@
         <a:solidFill>
           <a:srgbClr val="1E2761"/>
         </a:solidFill>
+        <a:effectLst/>
       </p:bgPr>
     </p:bg>
     <p:spTree>
@@ -3112,11 +2862,11 @@
           <a:bodyPr wrap="square" rtlCol="0" anchor="ctr"/>
           <a:lstStyle/>
           <a:p>
-            <a:pPr indent="0" marL="0">
-              <a:buNone/>
-            </a:pPr>
-            <a:r>
-              <a:rPr lang="en-US" sz="1300" b="1" spc="600" kern="0" dirty="0">
+            <a:pPr marL="0" indent="0">
+              <a:buNone/>
+            </a:pPr>
+            <a:r>
+              <a:rPr lang="en-US" sz="1300" b="1" kern="0" spc="600" dirty="0">
                 <a:solidFill>
                   <a:srgbClr val="F96167"/>
                 </a:solidFill>
@@ -3151,7 +2901,7 @@
           <a:bodyPr wrap="square" rtlCol="0" anchor="ctr"/>
           <a:lstStyle/>
           <a:p>
-            <a:pPr indent="0" marL="0">
+            <a:pPr marL="0" indent="0">
               <a:buNone/>
             </a:pPr>
             <a:r>
@@ -3215,7 +2965,7 @@
           <a:bodyPr wrap="square" lIns="0" tIns="0" rIns="0" bIns="0" rtlCol="0" anchor="t"/>
           <a:lstStyle/>
           <a:p>
-            <a:pPr indent="0" marL="0">
+            <a:pPr marL="0" indent="0">
               <a:spcAft>
                 <a:spcPts val="800"/>
               </a:spcAft>
@@ -3232,13 +2982,82 @@
               </a:rPr>
               <a:t>Permission</a:t>
             </a:r>
-            <a:pPr indent="0" marL="0">
+            <a:r>
+              <a:rPr lang="en-US" sz="2000" dirty="0">
+                <a:solidFill>
+                  <a:srgbClr val="CADCFC"/>
+                </a:solidFill>
+                <a:latin typeface="Meiryo" pitchFamily="34" charset="0"/>
+                <a:ea typeface="Meiryo" pitchFamily="34" charset="-122"/>
+                <a:cs typeface="Meiryo" pitchFamily="34" charset="-120"/>
+              </a:rPr>
+              <a:t> で境界、</a:t>
+            </a:r>
+            <a:r>
+              <a:rPr lang="en-US" sz="2000" b="1" dirty="0">
+                <a:solidFill>
+                  <a:srgbClr val="FFFFFF"/>
+                </a:solidFill>
+                <a:latin typeface="Meiryo" pitchFamily="34" charset="0"/>
+                <a:ea typeface="Meiryo" pitchFamily="34" charset="-122"/>
+                <a:cs typeface="Meiryo" pitchFamily="34" charset="-120"/>
+              </a:rPr>
+              <a:t>Sandbox</a:t>
+            </a:r>
+            <a:r>
+              <a:rPr lang="en-US" sz="2000" dirty="0">
+                <a:solidFill>
+                  <a:srgbClr val="CADCFC"/>
+                </a:solidFill>
+                <a:latin typeface="Meiryo" pitchFamily="34" charset="0"/>
+                <a:ea typeface="Meiryo" pitchFamily="34" charset="-122"/>
+                <a:cs typeface="Meiryo" pitchFamily="34" charset="-120"/>
+              </a:rPr>
+              <a:t> で OS 壁、</a:t>
+            </a:r>
+            <a:r>
+              <a:rPr lang="en-US" sz="2000" b="1" dirty="0">
+                <a:solidFill>
+                  <a:srgbClr val="FFFFFF"/>
+                </a:solidFill>
+                <a:latin typeface="Meiryo" pitchFamily="34" charset="0"/>
+                <a:ea typeface="Meiryo" pitchFamily="34" charset="-122"/>
+                <a:cs typeface="Meiryo" pitchFamily="34" charset="-120"/>
+              </a:rPr>
+              <a:t>Hooks</a:t>
+            </a:r>
+            <a:r>
+              <a:rPr lang="en-US" sz="2000" dirty="0">
+                <a:solidFill>
+                  <a:srgbClr val="CADCFC"/>
+                </a:solidFill>
+                <a:latin typeface="Meiryo" pitchFamily="34" charset="0"/>
+                <a:ea typeface="Meiryo" pitchFamily="34" charset="-122"/>
+                <a:cs typeface="Meiryo" pitchFamily="34" charset="-120"/>
+              </a:rPr>
+              <a:t> で強制、</a:t>
+            </a:r>
+            <a:endParaRPr lang="en-US" sz="2000" dirty="0"/>
+          </a:p>
+          <a:p>
+            <a:pPr marL="0" indent="0">
               <a:spcAft>
                 <a:spcPts val="800"/>
               </a:spcAft>
               <a:buNone/>
             </a:pPr>
             <a:r>
+              <a:rPr lang="en-US" sz="2000" b="1" dirty="0">
+                <a:solidFill>
+                  <a:srgbClr val="FFFFFF"/>
+                </a:solidFill>
+                <a:latin typeface="Meiryo" pitchFamily="34" charset="0"/>
+                <a:ea typeface="Meiryo" pitchFamily="34" charset="-122"/>
+                <a:cs typeface="Meiryo" pitchFamily="34" charset="-120"/>
+              </a:rPr>
+              <a:t>ネットワーク allowlist</a:t>
+            </a:r>
+            <a:r>
               <a:rPr lang="en-US" sz="2000" dirty="0">
                 <a:solidFill>
                   <a:srgbClr val="CADCFC"/>
@@ -3247,9 +3066,12 @@
                 <a:ea typeface="Meiryo" pitchFamily="34" charset="-122"/>
                 <a:cs typeface="Meiryo" pitchFamily="34" charset="-120"/>
               </a:rPr>
-              <a:t> で境界、</a:t>
-            </a:r>
-            <a:pPr indent="0" marL="0">
+              <a:t> で接続先限定。</a:t>
+            </a:r>
+            <a:endParaRPr lang="en-US" sz="2000" dirty="0"/>
+          </a:p>
+          <a:p>
+            <a:pPr marL="0" indent="0">
               <a:spcAft>
                 <a:spcPts val="800"/>
               </a:spcAft>
@@ -3258,114 +3080,6 @@
             <a:r>
               <a:rPr lang="en-US" sz="2000" b="1" dirty="0">
                 <a:solidFill>
-                  <a:srgbClr val="FFFFFF"/>
-                </a:solidFill>
-                <a:latin typeface="Meiryo" pitchFamily="34" charset="0"/>
-                <a:ea typeface="Meiryo" pitchFamily="34" charset="-122"/>
-                <a:cs typeface="Meiryo" pitchFamily="34" charset="-120"/>
-              </a:rPr>
-              <a:t>Sandbox</a:t>
-            </a:r>
-            <a:pPr indent="0" marL="0">
-              <a:spcAft>
-                <a:spcPts val="800"/>
-              </a:spcAft>
-              <a:buNone/>
-            </a:pPr>
-            <a:r>
-              <a:rPr lang="en-US" sz="2000" dirty="0">
-                <a:solidFill>
-                  <a:srgbClr val="CADCFC"/>
-                </a:solidFill>
-                <a:latin typeface="Meiryo" pitchFamily="34" charset="0"/>
-                <a:ea typeface="Meiryo" pitchFamily="34" charset="-122"/>
-                <a:cs typeface="Meiryo" pitchFamily="34" charset="-120"/>
-              </a:rPr>
-              <a:t> で OS 壁、</a:t>
-            </a:r>
-            <a:pPr indent="0" marL="0">
-              <a:spcAft>
-                <a:spcPts val="800"/>
-              </a:spcAft>
-              <a:buNone/>
-            </a:pPr>
-            <a:r>
-              <a:rPr lang="en-US" sz="2000" b="1" dirty="0">
-                <a:solidFill>
-                  <a:srgbClr val="FFFFFF"/>
-                </a:solidFill>
-                <a:latin typeface="Meiryo" pitchFamily="34" charset="0"/>
-                <a:ea typeface="Meiryo" pitchFamily="34" charset="-122"/>
-                <a:cs typeface="Meiryo" pitchFamily="34" charset="-120"/>
-              </a:rPr>
-              <a:t>Hooks</a:t>
-            </a:r>
-            <a:pPr indent="0" marL="0">
-              <a:spcAft>
-                <a:spcPts val="800"/>
-              </a:spcAft>
-              <a:buNone/>
-            </a:pPr>
-            <a:r>
-              <a:rPr lang="en-US" sz="2000" dirty="0">
-                <a:solidFill>
-                  <a:srgbClr val="CADCFC"/>
-                </a:solidFill>
-                <a:latin typeface="Meiryo" pitchFamily="34" charset="0"/>
-                <a:ea typeface="Meiryo" pitchFamily="34" charset="-122"/>
-                <a:cs typeface="Meiryo" pitchFamily="34" charset="-120"/>
-              </a:rPr>
-              <a:t> で強制、</a:t>
-            </a:r>
-            <a:endParaRPr lang="en-US" sz="2000" dirty="0"/>
-          </a:p>
-          <a:p>
-            <a:pPr indent="0" marL="0">
-              <a:spcAft>
-                <a:spcPts val="800"/>
-              </a:spcAft>
-              <a:buNone/>
-            </a:pPr>
-            <a:r>
-              <a:rPr lang="en-US" sz="2000" b="1" dirty="0">
-                <a:solidFill>
-                  <a:srgbClr val="FFFFFF"/>
-                </a:solidFill>
-                <a:latin typeface="Meiryo" pitchFamily="34" charset="0"/>
-                <a:ea typeface="Meiryo" pitchFamily="34" charset="-122"/>
-                <a:cs typeface="Meiryo" pitchFamily="34" charset="-120"/>
-              </a:rPr>
-              <a:t>ネットワーク allowlist</a:t>
-            </a:r>
-            <a:pPr indent="0" marL="0">
-              <a:spcAft>
-                <a:spcPts val="800"/>
-              </a:spcAft>
-              <a:buNone/>
-            </a:pPr>
-            <a:r>
-              <a:rPr lang="en-US" sz="2000" dirty="0">
-                <a:solidFill>
-                  <a:srgbClr val="CADCFC"/>
-                </a:solidFill>
-                <a:latin typeface="Meiryo" pitchFamily="34" charset="0"/>
-                <a:ea typeface="Meiryo" pitchFamily="34" charset="-122"/>
-                <a:cs typeface="Meiryo" pitchFamily="34" charset="-120"/>
-              </a:rPr>
-              <a:t> で接続先限定。</a:t>
-            </a:r>
-            <a:endParaRPr lang="en-US" sz="2000" dirty="0"/>
-          </a:p>
-          <a:p>
-            <a:pPr indent="0" marL="0">
-              <a:spcAft>
-                <a:spcPts val="800"/>
-              </a:spcAft>
-              <a:buNone/>
-            </a:pPr>
-            <a:r>
-              <a:rPr lang="en-US" sz="2000" b="1" dirty="0">
-                <a:solidFill>
                   <a:srgbClr val="F96167"/>
                 </a:solidFill>
                 <a:latin typeface="Meiryo" pitchFamily="34" charset="0"/>
@@ -3374,12 +3088,6 @@
               </a:rPr>
               <a:t>settings.json 1ファイル</a:t>
             </a:r>
-            <a:pPr indent="0" marL="0">
-              <a:spcAft>
-                <a:spcPts val="800"/>
-              </a:spcAft>
-              <a:buNone/>
-            </a:pPr>
             <a:r>
               <a:rPr lang="en-US" sz="2000" dirty="0">
                 <a:solidFill>
@@ -3441,7 +3149,7 @@
           <a:bodyPr wrap="square" lIns="0" tIns="0" rIns="0" bIns="0" rtlCol="0" anchor="ctr"/>
           <a:lstStyle/>
           <a:p>
-            <a:pPr indent="0" marL="0">
+            <a:pPr marL="0" indent="0">
               <a:buNone/>
             </a:pPr>
             <a:r>
@@ -3505,7 +3213,7 @@
           <a:bodyPr wrap="square" lIns="0" tIns="0" rIns="0" bIns="0" rtlCol="0" anchor="ctr"/>
           <a:lstStyle/>
           <a:p>
-            <a:pPr indent="0" marL="0">
+            <a:pPr marL="0" indent="0">
               <a:buNone/>
             </a:pPr>
             <a:r>
@@ -3569,7 +3277,7 @@
           <a:bodyPr wrap="square" lIns="0" tIns="0" rIns="0" bIns="0" rtlCol="0" anchor="ctr"/>
           <a:lstStyle/>
           <a:p>
-            <a:pPr indent="0" marL="0">
+            <a:pPr marL="0" indent="0">
               <a:buNone/>
             </a:pPr>
             <a:r>
@@ -3633,7 +3341,7 @@
           <a:bodyPr wrap="square" lIns="0" tIns="0" rIns="0" bIns="0" rtlCol="0" anchor="ctr"/>
           <a:lstStyle/>
           <a:p>
-            <a:pPr indent="0" marL="0">
+            <a:pPr marL="0" indent="0">
               <a:buNone/>
             </a:pPr>
             <a:r>
@@ -3697,7 +3405,7 @@
           <a:bodyPr wrap="square" lIns="0" tIns="0" rIns="0" bIns="0" rtlCol="0" anchor="ctr"/>
           <a:lstStyle/>
           <a:p>
-            <a:pPr indent="0" marL="0">
+            <a:pPr marL="0" indent="0">
               <a:buNone/>
             </a:pPr>
             <a:r>
@@ -3731,6 +3439,7 @@
         <a:solidFill>
           <a:srgbClr val="FFFFFF"/>
         </a:solidFill>
+        <a:effectLst/>
       </p:bgPr>
     </p:bg>
     <p:spTree>
@@ -3768,11 +3477,11 @@
           <a:bodyPr wrap="square" rtlCol="0" anchor="ctr"/>
           <a:lstStyle/>
           <a:p>
-            <a:pPr indent="0" marL="0">
-              <a:buNone/>
-            </a:pPr>
-            <a:r>
-              <a:rPr lang="en-US" sz="1200" b="1" spc="600" kern="0" dirty="0">
+            <a:pPr marL="0" indent="0">
+              <a:buNone/>
+            </a:pPr>
+            <a:r>
+              <a:rPr lang="en-US" sz="1200" b="1" kern="0" spc="600" dirty="0">
                 <a:solidFill>
                   <a:srgbClr val="F96167"/>
                 </a:solidFill>
@@ -3807,7 +3516,7 @@
           <a:bodyPr wrap="square" rtlCol="0" anchor="ctr"/>
           <a:lstStyle/>
           <a:p>
-            <a:pPr indent="0" marL="0">
+            <a:pPr marL="0" indent="0">
               <a:buNone/>
             </a:pPr>
             <a:r>
@@ -3896,7 +3605,7 @@
           <a:bodyPr wrap="square" lIns="0" tIns="0" rIns="0" bIns="0" rtlCol="0" anchor="ctr"/>
           <a:lstStyle/>
           <a:p>
-            <a:pPr indent="0" marL="0">
+            <a:pPr marL="0" indent="0">
               <a:buNone/>
             </a:pPr>
             <a:r>
@@ -3910,9 +3619,6 @@
               </a:rPr>
               <a:t>テーマ ▸ </a:t>
             </a:r>
-            <a:pPr indent="0" marL="0">
-              <a:buNone/>
-            </a:pPr>
             <a:r>
               <a:rPr lang="en-US" sz="1200" b="1" dirty="0">
                 <a:solidFill>
@@ -3949,7 +3655,7 @@
           <a:bodyPr wrap="square" lIns="0" tIns="0" rIns="0" bIns="0" rtlCol="0" anchor="ctr"/>
           <a:lstStyle/>
           <a:p>
-            <a:pPr indent="0" marL="0">
+            <a:pPr marL="0" indent="0">
               <a:buNone/>
             </a:pPr>
             <a:r>
@@ -4013,7 +3719,7 @@
           <a:bodyPr wrap="square" lIns="0" tIns="0" rIns="0" bIns="0" rtlCol="0" anchor="ctr"/>
           <a:lstStyle/>
           <a:p>
-            <a:pPr indent="0" marL="0">
+            <a:pPr marL="0" indent="0">
               <a:buNone/>
             </a:pPr>
             <a:r>
@@ -4077,7 +3783,7 @@
           <a:bodyPr wrap="square" lIns="0" tIns="0" rIns="0" bIns="0" rtlCol="0" anchor="ctr"/>
           <a:lstStyle/>
           <a:p>
-            <a:pPr indent="0" marL="0">
+            <a:pPr marL="0" indent="0">
               <a:buNone/>
             </a:pPr>
             <a:r>
@@ -4141,7 +3847,7 @@
           <a:bodyPr wrap="square" lIns="0" tIns="0" rIns="0" bIns="0" rtlCol="0" anchor="ctr"/>
           <a:lstStyle/>
           <a:p>
-            <a:pPr indent="0" marL="0">
+            <a:pPr marL="0" indent="0">
               <a:buNone/>
             </a:pPr>
             <a:r>
@@ -4205,7 +3911,7 @@
           <a:bodyPr wrap="square" lIns="0" tIns="0" rIns="0" bIns="0" rtlCol="0" anchor="ctr"/>
           <a:lstStyle/>
           <a:p>
-            <a:pPr indent="0" marL="0">
+            <a:pPr marL="0" indent="0">
               <a:buNone/>
             </a:pPr>
             <a:r>
@@ -4294,7 +4000,7 @@
           <a:bodyPr wrap="square" lIns="0" tIns="0" rIns="0" bIns="0" rtlCol="0" anchor="ctr"/>
           <a:lstStyle/>
           <a:p>
-            <a:pPr indent="0" marL="0">
+            <a:pPr marL="0" indent="0">
               <a:buNone/>
             </a:pPr>
             <a:r>
@@ -4308,9 +4014,6 @@
               </a:rPr>
               <a:t>実演  </a:t>
             </a:r>
-            <a:pPr indent="0" marL="0">
-              <a:buNone/>
-            </a:pPr>
             <a:r>
               <a:rPr lang="en-US" sz="1300" dirty="0">
                 <a:solidFill>
@@ -4347,11 +4050,11 @@
           <a:bodyPr wrap="square" rtlCol="0" anchor="ctr"/>
           <a:lstStyle/>
           <a:p>
-            <a:pPr algn="r" indent="0" marL="0">
-              <a:buNone/>
-            </a:pPr>
-            <a:r>
-              <a:rPr lang="en-US" sz="1000" spc="100" kern="0" dirty="0">
+            <a:pPr marL="0" indent="0" algn="r">
+              <a:buNone/>
+            </a:pPr>
+            <a:r>
+              <a:rPr lang="en-US" sz="1000" kern="0" spc="100" dirty="0">
                 <a:solidFill>
                   <a:srgbClr val="64748B"/>
                 </a:solidFill>
@@ -4381,6 +4084,7 @@
         <a:solidFill>
           <a:srgbClr val="FFFFFF"/>
         </a:solidFill>
+        <a:effectLst/>
       </p:bgPr>
     </p:bg>
     <p:spTree>
@@ -4418,7 +4122,7 @@
           <a:bodyPr wrap="square" lIns="0" tIns="0" rIns="0" bIns="0" rtlCol="0" anchor="ctr"/>
           <a:lstStyle/>
           <a:p>
-            <a:pPr indent="0" marL="0">
+            <a:pPr marL="0" indent="0">
               <a:buNone/>
             </a:pPr>
             <a:r>
@@ -4482,7 +4186,7 @@
           <a:bodyPr wrap="square" lIns="0" tIns="0" rIns="0" bIns="0" rtlCol="0" anchor="ctr"/>
           <a:lstStyle/>
           <a:p>
-            <a:pPr indent="0" marL="0">
+            <a:pPr marL="0" indent="0">
               <a:buNone/>
             </a:pPr>
             <a:r>
@@ -4527,14 +4231,14 @@
       </p:sp>
       <p:pic>
         <p:nvPicPr>
-          <p:cNvPr id="6" name="Image 0" descr="preencoded.png">    </p:cNvPr>
+          <p:cNvPr id="6" name="Image 0" descr="preencoded.png"/>
           <p:cNvPicPr>
             <a:picLocks noChangeAspect="1"/>
           </p:cNvPicPr>
           <p:nvPr/>
         </p:nvPicPr>
         <p:blipFill>
-          <a:blip r:embed="rId1"/>
+          <a:blip r:embed="rId3"/>
           <a:stretch>
             <a:fillRect/>
           </a:stretch>
@@ -4570,7 +4274,7 @@
           <a:bodyPr wrap="square" lIns="0" tIns="0" rIns="0" bIns="0" rtlCol="0" anchor="ctr"/>
           <a:lstStyle/>
           <a:p>
-            <a:pPr algn="r" indent="0" marL="0">
+            <a:pPr marL="0" indent="0" algn="r">
               <a:buNone/>
             </a:pPr>
             <a:r>
@@ -4609,7 +4313,7 @@
           <a:bodyPr wrap="square" lIns="0" tIns="0" rIns="0" bIns="0" rtlCol="0" anchor="ctr"/>
           <a:lstStyle/>
           <a:p>
-            <a:pPr indent="0" marL="0">
+            <a:pPr marL="0" indent="0">
               <a:buNone/>
             </a:pPr>
             <a:r>
@@ -4679,14 +4383,14 @@
       </p:sp>
       <p:pic>
         <p:nvPicPr>
-          <p:cNvPr id="11" name="Image 1" descr="preencoded.png">    </p:cNvPr>
+          <p:cNvPr id="11" name="Image 1" descr="preencoded.png"/>
           <p:cNvPicPr>
             <a:picLocks noChangeAspect="1"/>
           </p:cNvPicPr>
           <p:nvPr/>
         </p:nvPicPr>
         <p:blipFill>
-          <a:blip r:embed="rId2"/>
+          <a:blip r:embed="rId4"/>
           <a:stretch>
             <a:fillRect/>
           </a:stretch>
@@ -4722,7 +4426,7 @@
           <a:bodyPr wrap="square" lIns="0" tIns="0" rIns="0" bIns="0" rtlCol="0" anchor="ctr"/>
           <a:lstStyle/>
           <a:p>
-            <a:pPr algn="r" indent="0" marL="0">
+            <a:pPr marL="0" indent="0" algn="r">
               <a:buNone/>
             </a:pPr>
             <a:r>
@@ -4761,7 +4465,7 @@
           <a:bodyPr wrap="square" lIns="0" tIns="0" rIns="0" bIns="0" rtlCol="0" anchor="ctr"/>
           <a:lstStyle/>
           <a:p>
-            <a:pPr indent="0" marL="0">
+            <a:pPr marL="0" indent="0">
               <a:buNone/>
             </a:pPr>
             <a:r>
@@ -4825,7 +4529,7 @@
           <a:bodyPr wrap="square" lIns="0" tIns="0" rIns="0" bIns="0" rtlCol="0" anchor="ctr"/>
           <a:lstStyle/>
           <a:p>
-            <a:pPr algn="ctr" indent="0" marL="0">
+            <a:pPr marL="0" indent="0" algn="ctr">
               <a:buNone/>
             </a:pPr>
             <a:r>
@@ -4870,14 +4574,14 @@
       </p:sp>
       <p:pic>
         <p:nvPicPr>
-          <p:cNvPr id="17" name="Image 2" descr="preencoded.png">    </p:cNvPr>
+          <p:cNvPr id="17" name="Image 2" descr="preencoded.png"/>
           <p:cNvPicPr>
             <a:picLocks noChangeAspect="1"/>
           </p:cNvPicPr>
           <p:nvPr/>
         </p:nvPicPr>
         <p:blipFill>
-          <a:blip r:embed="rId3"/>
+          <a:blip r:embed="rId5"/>
           <a:stretch>
             <a:fillRect/>
           </a:stretch>
@@ -4913,7 +4617,7 @@
           <a:bodyPr wrap="square" lIns="0" tIns="0" rIns="0" bIns="0" rtlCol="0" anchor="ctr"/>
           <a:lstStyle/>
           <a:p>
-            <a:pPr algn="r" indent="0" marL="0">
+            <a:pPr marL="0" indent="0" algn="r">
               <a:buNone/>
             </a:pPr>
             <a:r>
@@ -4952,7 +4656,7 @@
           <a:bodyPr wrap="square" lIns="0" tIns="0" rIns="0" bIns="0" rtlCol="0" anchor="ctr"/>
           <a:lstStyle/>
           <a:p>
-            <a:pPr indent="0" marL="0">
+            <a:pPr marL="0" indent="0">
               <a:buNone/>
             </a:pPr>
             <a:r>
@@ -5016,7 +4720,7 @@
           <a:bodyPr wrap="square" lIns="0" tIns="0" rIns="0" bIns="0" rtlCol="0" anchor="ctr"/>
           <a:lstStyle/>
           <a:p>
-            <a:pPr indent="0" marL="0">
+            <a:pPr marL="0" indent="0">
               <a:spcAft>
                 <a:spcPts val="300"/>
               </a:spcAft>
@@ -5036,7 +4740,7 @@
             <a:endParaRPr lang="en-US" sz="1100" dirty="0"/>
           </a:p>
           <a:p>
-            <a:pPr indent="0" marL="0">
+            <a:pPr marL="0" indent="0">
               <a:spcAft>
                 <a:spcPts val="300"/>
               </a:spcAft>
@@ -5078,11 +4782,11 @@
           <a:bodyPr wrap="square" rtlCol="0" anchor="ctr"/>
           <a:lstStyle/>
           <a:p>
-            <a:pPr algn="r" indent="0" marL="0">
-              <a:buNone/>
-            </a:pPr>
-            <a:r>
-              <a:rPr lang="en-US" sz="1000" spc="100" kern="0" dirty="0">
+            <a:pPr marL="0" indent="0" algn="r">
+              <a:buNone/>
+            </a:pPr>
+            <a:r>
+              <a:rPr lang="en-US" sz="1000" kern="0" spc="100" dirty="0">
                 <a:solidFill>
                   <a:srgbClr val="64748B"/>
                 </a:solidFill>
@@ -5112,6 +4816,7 @@
         <a:solidFill>
           <a:srgbClr val="FFFFFF"/>
         </a:solidFill>
+        <a:effectLst/>
       </p:bgPr>
     </p:bg>
     <p:spTree>
@@ -5149,7 +4854,7 @@
           <a:bodyPr wrap="square" lIns="0" tIns="0" rIns="0" bIns="0" rtlCol="0" anchor="ctr"/>
           <a:lstStyle/>
           <a:p>
-            <a:pPr indent="0" marL="0">
+            <a:pPr marL="0" indent="0">
               <a:buNone/>
             </a:pPr>
             <a:r>
@@ -5213,7 +4918,7 @@
           <a:bodyPr wrap="square" lIns="0" tIns="0" rIns="0" bIns="0" rtlCol="0" anchor="ctr"/>
           <a:lstStyle/>
           <a:p>
-            <a:pPr indent="0" marL="0">
+            <a:pPr marL="0" indent="0">
               <a:buNone/>
             </a:pPr>
             <a:r>
@@ -5277,7 +4982,7 @@
           <a:bodyPr wrap="square" lIns="0" tIns="0" rIns="0" bIns="0" rtlCol="0" anchor="ctr"/>
           <a:lstStyle/>
           <a:p>
-            <a:pPr algn="ctr" indent="0" marL="0">
+            <a:pPr marL="0" indent="0" algn="ctr">
               <a:buNone/>
             </a:pPr>
             <a:r>
@@ -5316,7 +5021,7 @@
           <a:bodyPr wrap="square" lIns="0" tIns="0" rIns="0" bIns="0" rtlCol="0" anchor="t"/>
           <a:lstStyle/>
           <a:p>
-            <a:pPr algn="ctr" indent="0" marL="0">
+            <a:pPr marL="0" indent="0" algn="ctr">
               <a:buNone/>
             </a:pPr>
             <a:r>
@@ -5333,7 +5038,7 @@
             <a:endParaRPr lang="en-US" sz="1000" dirty="0"/>
           </a:p>
           <a:p>
-            <a:pPr algn="ctr" indent="0" marL="0">
+            <a:pPr marL="0" indent="0" algn="ctr">
               <a:buNone/>
             </a:pPr>
             <a:r>
@@ -5397,7 +5102,7 @@
           <a:bodyPr wrap="square" lIns="0" tIns="0" rIns="0" bIns="0" rtlCol="0" anchor="ctr"/>
           <a:lstStyle/>
           <a:p>
-            <a:pPr algn="ctr" indent="0" marL="0">
+            <a:pPr marL="0" indent="0" algn="ctr">
               <a:buNone/>
             </a:pPr>
             <a:r>
@@ -5414,7 +5119,7 @@
             <a:endParaRPr lang="en-US" sz="1000" dirty="0"/>
           </a:p>
           <a:p>
-            <a:pPr algn="ctr" indent="0" marL="0">
+            <a:pPr marL="0" indent="0" algn="ctr">
               <a:buNone/>
             </a:pPr>
             <a:r>
@@ -5478,7 +5183,7 @@
           <a:bodyPr wrap="square" lIns="0" tIns="0" rIns="0" bIns="0" rtlCol="0" anchor="ctr"/>
           <a:lstStyle/>
           <a:p>
-            <a:pPr algn="ctr" indent="0" marL="0">
+            <a:pPr marL="0" indent="0" algn="ctr">
               <a:buNone/>
             </a:pPr>
             <a:r>
@@ -5517,7 +5222,7 @@
           <a:bodyPr wrap="square" lIns="0" tIns="0" rIns="0" bIns="0" rtlCol="0" anchor="t"/>
           <a:lstStyle/>
           <a:p>
-            <a:pPr algn="ctr" indent="0" marL="0">
+            <a:pPr marL="0" indent="0" algn="ctr">
               <a:buNone/>
             </a:pPr>
             <a:r>
@@ -5534,7 +5239,7 @@
             <a:endParaRPr lang="en-US" sz="1000" dirty="0"/>
           </a:p>
           <a:p>
-            <a:pPr algn="ctr" indent="0" marL="0">
+            <a:pPr marL="0" indent="0" algn="ctr">
               <a:buNone/>
             </a:pPr>
             <a:r>
@@ -5598,7 +5303,7 @@
           <a:bodyPr wrap="square" lIns="0" tIns="0" rIns="0" bIns="0" rtlCol="0" anchor="ctr"/>
           <a:lstStyle/>
           <a:p>
-            <a:pPr algn="ctr" indent="0" marL="0">
+            <a:pPr marL="0" indent="0" algn="ctr">
               <a:buNone/>
             </a:pPr>
             <a:r>
@@ -5615,7 +5320,7 @@
             <a:endParaRPr lang="en-US" sz="1000" dirty="0"/>
           </a:p>
           <a:p>
-            <a:pPr algn="ctr" indent="0" marL="0">
+            <a:pPr marL="0" indent="0" algn="ctr">
               <a:buNone/>
             </a:pPr>
             <a:r>
@@ -5679,7 +5384,7 @@
           <a:bodyPr wrap="square" lIns="0" tIns="0" rIns="0" bIns="0" rtlCol="0" anchor="ctr"/>
           <a:lstStyle/>
           <a:p>
-            <a:pPr algn="ctr" indent="0" marL="0">
+            <a:pPr marL="0" indent="0" algn="ctr">
               <a:buNone/>
             </a:pPr>
             <a:r>
@@ -5718,7 +5423,7 @@
           <a:bodyPr wrap="square" lIns="0" tIns="0" rIns="0" bIns="0" rtlCol="0" anchor="t"/>
           <a:lstStyle/>
           <a:p>
-            <a:pPr algn="ctr" indent="0" marL="0">
+            <a:pPr marL="0" indent="0" algn="ctr">
               <a:buNone/>
             </a:pPr>
             <a:r>
@@ -5735,7 +5440,7 @@
             <a:endParaRPr lang="en-US" sz="1000" dirty="0"/>
           </a:p>
           <a:p>
-            <a:pPr algn="ctr" indent="0" marL="0">
+            <a:pPr marL="0" indent="0" algn="ctr">
               <a:buNone/>
             </a:pPr>
             <a:r>
@@ -5799,7 +5504,7 @@
           <a:bodyPr wrap="square" lIns="0" tIns="0" rIns="0" bIns="0" rtlCol="0" anchor="ctr"/>
           <a:lstStyle/>
           <a:p>
-            <a:pPr algn="ctr" indent="0" marL="0">
+            <a:pPr marL="0" indent="0" algn="ctr">
               <a:buNone/>
             </a:pPr>
             <a:r>
@@ -5816,7 +5521,7 @@
             <a:endParaRPr lang="en-US" sz="1000" dirty="0"/>
           </a:p>
           <a:p>
-            <a:pPr algn="ctr" indent="0" marL="0">
+            <a:pPr marL="0" indent="0" algn="ctr">
               <a:buNone/>
             </a:pPr>
             <a:r>
@@ -5880,7 +5585,7 @@
           <a:bodyPr wrap="square" lIns="0" tIns="0" rIns="0" bIns="0" rtlCol="0" anchor="ctr"/>
           <a:lstStyle/>
           <a:p>
-            <a:pPr algn="ctr" indent="0" marL="0">
+            <a:pPr marL="0" indent="0" algn="ctr">
               <a:buNone/>
             </a:pPr>
             <a:r>
@@ -5919,7 +5624,7 @@
           <a:bodyPr wrap="square" lIns="0" tIns="0" rIns="0" bIns="0" rtlCol="0" anchor="t"/>
           <a:lstStyle/>
           <a:p>
-            <a:pPr algn="ctr" indent="0" marL="0">
+            <a:pPr marL="0" indent="0" algn="ctr">
               <a:buNone/>
             </a:pPr>
             <a:r>
@@ -5936,7 +5641,7 @@
             <a:endParaRPr lang="en-US" sz="1000" dirty="0"/>
           </a:p>
           <a:p>
-            <a:pPr algn="ctr" indent="0" marL="0">
+            <a:pPr marL="0" indent="0" algn="ctr">
               <a:buNone/>
             </a:pPr>
             <a:r>
@@ -6000,7 +5705,7 @@
           <a:bodyPr wrap="square" lIns="0" tIns="0" rIns="0" bIns="0" rtlCol="0" anchor="ctr"/>
           <a:lstStyle/>
           <a:p>
-            <a:pPr algn="ctr" indent="0" marL="0">
+            <a:pPr marL="0" indent="0" algn="ctr">
               <a:buNone/>
             </a:pPr>
             <a:r>
@@ -6017,7 +5722,7 @@
             <a:endParaRPr lang="en-US" sz="1000" dirty="0"/>
           </a:p>
           <a:p>
-            <a:pPr algn="ctr" indent="0" marL="0">
+            <a:pPr marL="0" indent="0" algn="ctr">
               <a:buNone/>
             </a:pPr>
             <a:r>
@@ -6081,7 +5786,7 @@
           <a:bodyPr wrap="square" lIns="0" tIns="0" rIns="0" bIns="0" rtlCol="0" anchor="ctr"/>
           <a:lstStyle/>
           <a:p>
-            <a:pPr algn="ctr" indent="0" marL="0">
+            <a:pPr marL="0" indent="0" algn="ctr">
               <a:buNone/>
             </a:pPr>
             <a:r>
@@ -6145,7 +5850,7 @@
           <a:bodyPr wrap="square" lIns="0" tIns="0" rIns="0" bIns="0" rtlCol="0" anchor="ctr"/>
           <a:lstStyle/>
           <a:p>
-            <a:pPr algn="ctr" indent="0" marL="0">
+            <a:pPr marL="0" indent="0" algn="ctr">
               <a:buNone/>
             </a:pPr>
             <a:r>
@@ -6209,7 +5914,7 @@
           <a:bodyPr wrap="square" lIns="0" tIns="0" rIns="0" bIns="0" rtlCol="0" anchor="ctr"/>
           <a:lstStyle/>
           <a:p>
-            <a:pPr indent="0" marL="0">
+            <a:pPr marL="0" indent="0">
               <a:buNone/>
             </a:pPr>
             <a:r>
@@ -6273,7 +5978,7 @@
           <a:bodyPr wrap="square" lIns="0" tIns="0" rIns="0" bIns="0" rtlCol="0" anchor="ctr"/>
           <a:lstStyle/>
           <a:p>
-            <a:pPr indent="0" marL="0">
+            <a:pPr marL="0" indent="0">
               <a:buNone/>
             </a:pPr>
             <a:r>
@@ -6337,7 +6042,7 @@
           <a:bodyPr wrap="square" lIns="0" tIns="0" rIns="0" bIns="0" rtlCol="0" anchor="ctr"/>
           <a:lstStyle/>
           <a:p>
-            <a:pPr indent="0" marL="0">
+            <a:pPr marL="0" indent="0">
               <a:buNone/>
             </a:pPr>
             <a:r>
@@ -6401,7 +6106,7 @@
           <a:bodyPr wrap="square" lIns="0" tIns="0" rIns="0" bIns="0" rtlCol="0" anchor="ctr"/>
           <a:lstStyle/>
           <a:p>
-            <a:pPr indent="0" marL="0">
+            <a:pPr marL="0" indent="0">
               <a:buNone/>
             </a:pPr>
             <a:r>
@@ -6465,7 +6170,7 @@
           <a:bodyPr wrap="square" lIns="0" tIns="0" rIns="0" bIns="0" rtlCol="0" anchor="ctr"/>
           <a:lstStyle/>
           <a:p>
-            <a:pPr indent="0" marL="0">
+            <a:pPr marL="0" indent="0">
               <a:buNone/>
             </a:pPr>
             <a:r>
@@ -6529,7 +6234,7 @@
           <a:bodyPr wrap="square" lIns="0" tIns="0" rIns="0" bIns="0" rtlCol="0" anchor="ctr"/>
           <a:lstStyle/>
           <a:p>
-            <a:pPr indent="0" marL="0">
+            <a:pPr marL="0" indent="0">
               <a:buNone/>
             </a:pPr>
             <a:r>
@@ -6593,7 +6298,7 @@
           <a:bodyPr wrap="square" lIns="0" tIns="0" rIns="0" bIns="0" rtlCol="0" anchor="ctr"/>
           <a:lstStyle/>
           <a:p>
-            <a:pPr indent="0" marL="0">
+            <a:pPr marL="0" indent="0">
               <a:buNone/>
             </a:pPr>
             <a:r>
@@ -6607,9 +6312,6 @@
               </a:rPr>
               <a:t>💡 </a:t>
             </a:r>
-            <a:pPr indent="0" marL="0">
-              <a:buNone/>
-            </a:pPr>
             <a:r>
               <a:rPr lang="en-US" sz="1100" dirty="0">
                 <a:solidFill>
@@ -6621,9 +6323,6 @@
               </a:rPr>
               <a:t>CLAUDE.md はこれらの「読み込み指針」。</a:t>
             </a:r>
-            <a:pPr indent="0" marL="0">
-              <a:buNone/>
-            </a:pPr>
             <a:r>
               <a:rPr lang="en-US" sz="1100" b="1" dirty="0">
                 <a:solidFill>
@@ -6660,11 +6359,11 @@
           <a:bodyPr wrap="square" rtlCol="0" anchor="ctr"/>
           <a:lstStyle/>
           <a:p>
-            <a:pPr algn="r" indent="0" marL="0">
-              <a:buNone/>
-            </a:pPr>
-            <a:r>
-              <a:rPr lang="en-US" sz="1000" spc="100" kern="0" dirty="0">
+            <a:pPr marL="0" indent="0" algn="r">
+              <a:buNone/>
+            </a:pPr>
+            <a:r>
+              <a:rPr lang="en-US" sz="1000" kern="0" spc="100" dirty="0">
                 <a:solidFill>
                   <a:srgbClr val="64748B"/>
                 </a:solidFill>
@@ -6694,6 +6393,7 @@
         <a:solidFill>
           <a:srgbClr val="FFFFFF"/>
         </a:solidFill>
+        <a:effectLst/>
       </p:bgPr>
     </p:bg>
     <p:spTree>
@@ -6731,7 +6431,7 @@
           <a:bodyPr wrap="square" lIns="0" tIns="0" rIns="0" bIns="0" rtlCol="0" anchor="ctr"/>
           <a:lstStyle/>
           <a:p>
-            <a:pPr indent="0" marL="0">
+            <a:pPr marL="0" indent="0">
               <a:buNone/>
             </a:pPr>
             <a:r>
@@ -6795,7 +6495,7 @@
           <a:bodyPr wrap="square" lIns="0" tIns="0" rIns="0" bIns="0" rtlCol="0" anchor="ctr"/>
           <a:lstStyle/>
           <a:p>
-            <a:pPr indent="0" marL="0">
+            <a:pPr marL="0" indent="0">
               <a:buNone/>
             </a:pPr>
             <a:r>
@@ -6859,7 +6559,7 @@
           <a:bodyPr wrap="square" lIns="0" tIns="0" rIns="0" bIns="0" rtlCol="0" anchor="t"/>
           <a:lstStyle/>
           <a:p>
-            <a:pPr indent="0" marL="0">
+            <a:pPr marL="0" indent="0">
               <a:buNone/>
             </a:pPr>
             <a:r>
@@ -6876,13 +6576,13 @@
             <a:endParaRPr lang="en-US" sz="1000" dirty="0"/>
           </a:p>
           <a:p>
-            <a:pPr indent="0" marL="0">
+            <a:pPr marL="0" indent="0">
               <a:buNone/>
             </a:pPr>
             <a:endParaRPr lang="en-US" sz="1000" dirty="0"/>
           </a:p>
           <a:p>
-            <a:pPr indent="0" marL="0">
+            <a:pPr marL="0" indent="0">
               <a:buNone/>
             </a:pPr>
             <a:r>
@@ -6899,7 +6599,7 @@
             <a:endParaRPr lang="en-US" sz="1000" dirty="0"/>
           </a:p>
           <a:p>
-            <a:pPr indent="0" marL="0">
+            <a:pPr marL="0" indent="0">
               <a:buNone/>
             </a:pPr>
             <a:r>
@@ -6916,13 +6616,13 @@
             <a:endParaRPr lang="en-US" sz="1000" dirty="0"/>
           </a:p>
           <a:p>
-            <a:pPr indent="0" marL="0">
+            <a:pPr marL="0" indent="0">
               <a:buNone/>
             </a:pPr>
             <a:endParaRPr lang="en-US" sz="1000" dirty="0"/>
           </a:p>
           <a:p>
-            <a:pPr indent="0" marL="0">
+            <a:pPr marL="0" indent="0">
               <a:buNone/>
             </a:pPr>
             <a:r>
@@ -6939,7 +6639,7 @@
             <a:endParaRPr lang="en-US" sz="1000" dirty="0"/>
           </a:p>
           <a:p>
-            <a:pPr indent="0" marL="0">
+            <a:pPr marL="0" indent="0">
               <a:buNone/>
             </a:pPr>
             <a:r>
@@ -6956,13 +6656,13 @@
             <a:endParaRPr lang="en-US" sz="1000" dirty="0"/>
           </a:p>
           <a:p>
-            <a:pPr indent="0" marL="0">
+            <a:pPr marL="0" indent="0">
               <a:buNone/>
             </a:pPr>
             <a:endParaRPr lang="en-US" sz="1000" dirty="0"/>
           </a:p>
           <a:p>
-            <a:pPr indent="0" marL="0">
+            <a:pPr marL="0" indent="0">
               <a:buNone/>
             </a:pPr>
             <a:r>
@@ -6979,7 +6679,7 @@
             <a:endParaRPr lang="en-US" sz="1000" dirty="0"/>
           </a:p>
           <a:p>
-            <a:pPr indent="0" marL="0">
+            <a:pPr marL="0" indent="0">
               <a:buNone/>
             </a:pPr>
             <a:r>
@@ -6996,13 +6696,13 @@
             <a:endParaRPr lang="en-US" sz="1000" dirty="0"/>
           </a:p>
           <a:p>
-            <a:pPr indent="0" marL="0">
+            <a:pPr marL="0" indent="0">
               <a:buNone/>
             </a:pPr>
             <a:endParaRPr lang="en-US" sz="1000" dirty="0"/>
           </a:p>
           <a:p>
-            <a:pPr indent="0" marL="0">
+            <a:pPr marL="0" indent="0">
               <a:buNone/>
             </a:pPr>
             <a:r>
@@ -7019,7 +6719,7 @@
             <a:endParaRPr lang="en-US" sz="1000" dirty="0"/>
           </a:p>
           <a:p>
-            <a:pPr indent="0" marL="0">
+            <a:pPr marL="0" indent="0">
               <a:buNone/>
             </a:pPr>
             <a:r>
@@ -7058,7 +6758,7 @@
           <a:bodyPr wrap="square" lIns="0" tIns="0" rIns="0" bIns="0" rtlCol="0" anchor="ctr"/>
           <a:lstStyle/>
           <a:p>
-            <a:pPr indent="0" marL="0">
+            <a:pPr marL="0" indent="0">
               <a:buNone/>
             </a:pPr>
             <a:r>
@@ -7097,7 +6797,7 @@
           <a:bodyPr wrap="square" lIns="0" tIns="0" rIns="0" bIns="0" rtlCol="0" anchor="ctr"/>
           <a:lstStyle/>
           <a:p>
-            <a:pPr indent="0" marL="0">
+            <a:pPr marL="0" indent="0">
               <a:buNone/>
             </a:pPr>
             <a:r>
@@ -7186,7 +6886,7 @@
           <a:bodyPr wrap="square" lIns="0" tIns="0" rIns="0" bIns="0" rtlCol="0" anchor="ctr"/>
           <a:lstStyle/>
           <a:p>
-            <a:pPr indent="0" marL="0">
+            <a:pPr marL="0" indent="0">
               <a:buNone/>
             </a:pPr>
             <a:r>
@@ -7225,7 +6925,7 @@
           <a:bodyPr wrap="square" lIns="0" tIns="0" rIns="0" bIns="0" rtlCol="0" anchor="ctr"/>
           <a:lstStyle/>
           <a:p>
-            <a:pPr indent="0" marL="0">
+            <a:pPr marL="0" indent="0">
               <a:buNone/>
             </a:pPr>
             <a:r>
@@ -7314,7 +7014,7 @@
           <a:bodyPr wrap="square" lIns="0" tIns="0" rIns="0" bIns="0" rtlCol="0" anchor="ctr"/>
           <a:lstStyle/>
           <a:p>
-            <a:pPr indent="0" marL="0">
+            <a:pPr marL="0" indent="0">
               <a:buNone/>
             </a:pPr>
             <a:r>
@@ -7353,7 +7053,7 @@
           <a:bodyPr wrap="square" lIns="0" tIns="0" rIns="0" bIns="0" rtlCol="0" anchor="ctr"/>
           <a:lstStyle/>
           <a:p>
-            <a:pPr indent="0" marL="0">
+            <a:pPr marL="0" indent="0">
               <a:buNone/>
             </a:pPr>
             <a:r>
@@ -7442,7 +7142,7 @@
           <a:bodyPr wrap="square" lIns="0" tIns="0" rIns="0" bIns="0" rtlCol="0" anchor="ctr"/>
           <a:lstStyle/>
           <a:p>
-            <a:pPr indent="0" marL="0">
+            <a:pPr marL="0" indent="0">
               <a:buNone/>
             </a:pPr>
             <a:r>
@@ -7481,7 +7181,7 @@
           <a:bodyPr wrap="square" lIns="0" tIns="0" rIns="0" bIns="0" rtlCol="0" anchor="ctr"/>
           <a:lstStyle/>
           <a:p>
-            <a:pPr indent="0" marL="0">
+            <a:pPr marL="0" indent="0">
               <a:buNone/>
             </a:pPr>
             <a:r>
@@ -7570,7 +7270,7 @@
           <a:bodyPr wrap="square" lIns="0" tIns="0" rIns="0" bIns="0" rtlCol="0" anchor="ctr"/>
           <a:lstStyle/>
           <a:p>
-            <a:pPr indent="0" marL="0">
+            <a:pPr marL="0" indent="0">
               <a:buNone/>
             </a:pPr>
             <a:r>
@@ -7609,7 +7309,7 @@
           <a:bodyPr wrap="square" lIns="0" tIns="0" rIns="0" bIns="0" rtlCol="0" anchor="ctr"/>
           <a:lstStyle/>
           <a:p>
-            <a:pPr indent="0" marL="0">
+            <a:pPr marL="0" indent="0">
               <a:buNone/>
             </a:pPr>
             <a:r>
@@ -7673,7 +7373,7 @@
           <a:bodyPr wrap="square" lIns="0" tIns="0" rIns="0" bIns="0" rtlCol="0" anchor="ctr"/>
           <a:lstStyle/>
           <a:p>
-            <a:pPr indent="0" marL="0">
+            <a:pPr marL="0" indent="0">
               <a:buNone/>
             </a:pPr>
             <a:r>
@@ -7687,9 +7387,6 @@
               </a:rPr>
               <a:t>💡 </a:t>
             </a:r>
-            <a:pPr indent="0" marL="0">
-              <a:buNone/>
-            </a:pPr>
             <a:r>
               <a:rPr lang="en-US" sz="1100" dirty="0">
                 <a:solidFill>
@@ -7701,9 +7398,6 @@
               </a:rPr>
               <a:t>100〜200行を超えると遵守率が低下。</a:t>
             </a:r>
-            <a:pPr indent="0" marL="0">
-              <a:buNone/>
-            </a:pPr>
             <a:r>
               <a:rPr lang="en-US" sz="1100" b="1" dirty="0">
                 <a:solidFill>
@@ -7740,11 +7434,11 @@
           <a:bodyPr wrap="square" rtlCol="0" anchor="ctr"/>
           <a:lstStyle/>
           <a:p>
-            <a:pPr algn="r" indent="0" marL="0">
-              <a:buNone/>
-            </a:pPr>
-            <a:r>
-              <a:rPr lang="en-US" sz="1000" spc="100" kern="0" dirty="0">
+            <a:pPr marL="0" indent="0" algn="r">
+              <a:buNone/>
+            </a:pPr>
+            <a:r>
+              <a:rPr lang="en-US" sz="1000" kern="0" spc="100" dirty="0">
                 <a:solidFill>
                   <a:srgbClr val="64748B"/>
                 </a:solidFill>
@@ -7774,6 +7468,7 @@
         <a:solidFill>
           <a:srgbClr val="FFFFFF"/>
         </a:solidFill>
+        <a:effectLst/>
       </p:bgPr>
     </p:bg>
     <p:spTree>
@@ -7811,7 +7506,7 @@
           <a:bodyPr wrap="square" lIns="0" tIns="0" rIns="0" bIns="0" rtlCol="0" anchor="ctr"/>
           <a:lstStyle/>
           <a:p>
-            <a:pPr indent="0" marL="0">
+            <a:pPr marL="0" indent="0">
               <a:buNone/>
             </a:pPr>
             <a:r>
@@ -7875,7 +7570,7 @@
           <a:bodyPr wrap="square" lIns="0" tIns="0" rIns="0" bIns="0" rtlCol="0" anchor="ctr"/>
           <a:lstStyle/>
           <a:p>
-            <a:pPr indent="0" marL="0">
+            <a:pPr marL="0" indent="0">
               <a:buNone/>
             </a:pPr>
             <a:r>
@@ -7939,7 +7634,7 @@
           <a:bodyPr wrap="square" lIns="0" tIns="0" rIns="0" bIns="0" rtlCol="0" anchor="t"/>
           <a:lstStyle/>
           <a:p>
-            <a:pPr indent="0" marL="0">
+            <a:pPr marL="0" indent="0">
               <a:buNone/>
             </a:pPr>
             <a:r>
@@ -7956,7 +7651,7 @@
             <a:endParaRPr lang="en-US" sz="1100" dirty="0"/>
           </a:p>
           <a:p>
-            <a:pPr indent="0" marL="0">
+            <a:pPr marL="0" indent="0">
               <a:buNone/>
             </a:pPr>
             <a:r>
@@ -7973,7 +7668,7 @@
             <a:endParaRPr lang="en-US" sz="1100" dirty="0"/>
           </a:p>
           <a:p>
-            <a:pPr indent="0" marL="0">
+            <a:pPr marL="0" indent="0">
               <a:buNone/>
             </a:pPr>
             <a:r>
@@ -7990,7 +7685,7 @@
             <a:endParaRPr lang="en-US" sz="1100" dirty="0"/>
           </a:p>
           <a:p>
-            <a:pPr indent="0" marL="0">
+            <a:pPr marL="0" indent="0">
               <a:buNone/>
             </a:pPr>
             <a:r>
@@ -8007,7 +7702,7 @@
             <a:endParaRPr lang="en-US" sz="1100" dirty="0"/>
           </a:p>
           <a:p>
-            <a:pPr indent="0" marL="0">
+            <a:pPr marL="0" indent="0">
               <a:buNone/>
             </a:pPr>
             <a:r>
@@ -8024,7 +7719,7 @@
             <a:endParaRPr lang="en-US" sz="1100" dirty="0"/>
           </a:p>
           <a:p>
-            <a:pPr indent="0" marL="0">
+            <a:pPr marL="0" indent="0">
               <a:buNone/>
             </a:pPr>
             <a:r>
@@ -8041,7 +7736,7 @@
             <a:endParaRPr lang="en-US" sz="1100" dirty="0"/>
           </a:p>
           <a:p>
-            <a:pPr indent="0" marL="0">
+            <a:pPr marL="0" indent="0">
               <a:buNone/>
             </a:pPr>
             <a:r>
@@ -8058,7 +7753,7 @@
             <a:endParaRPr lang="en-US" sz="1100" dirty="0"/>
           </a:p>
           <a:p>
-            <a:pPr indent="0" marL="0">
+            <a:pPr marL="0" indent="0">
               <a:buNone/>
             </a:pPr>
             <a:r>
@@ -8085,7 +7780,7 @@
         <p:spPr>
           <a:xfrm>
             <a:off x="457200" y="2880360"/>
-            <a:ext cx="8229600" cy="1463040"/>
+            <a:ext cx="8229600" cy="1280160"/>
           </a:xfrm>
           <a:prstGeom prst="rect">
             <a:avLst/>
@@ -8110,7 +7805,7 @@
         <p:spPr>
           <a:xfrm>
             <a:off x="457200" y="2880360"/>
-            <a:ext cx="91440" cy="1463040"/>
+            <a:ext cx="91440" cy="1280160"/>
           </a:xfrm>
           <a:prstGeom prst="rect">
             <a:avLst/>
@@ -8147,7 +7842,7 @@
           <a:bodyPr wrap="square" lIns="0" tIns="0" rIns="0" bIns="0" rtlCol="0" anchor="t"/>
           <a:lstStyle/>
           <a:p>
-            <a:pPr indent="0" marL="0">
+            <a:pPr marL="0" indent="0">
               <a:spcAft>
                 <a:spcPts val="100"/>
               </a:spcAft>
@@ -8162,28 +7857,50 @@
                 <a:ea typeface="Meiryo" pitchFamily="34" charset="-122"/>
                 <a:cs typeface="Meiryo" pitchFamily="34" charset="-120"/>
               </a:rPr>
-              <a:t>⚠️ Permission の Deny だけでは不十分な理由</a:t>
+              <a:t>⚠️ Permission の Deny </a:t>
+            </a:r>
+            <a:r>
+              <a:rPr lang="en-US" sz="1300" b="1" dirty="0" err="1">
+                <a:solidFill>
+                  <a:srgbClr val="F96167"/>
+                </a:solidFill>
+                <a:latin typeface="Meiryo" pitchFamily="34" charset="0"/>
+                <a:ea typeface="Meiryo" pitchFamily="34" charset="-122"/>
+                <a:cs typeface="Meiryo" pitchFamily="34" charset="-120"/>
+              </a:rPr>
+              <a:t>だけでは不十分な理由</a:t>
             </a:r>
             <a:endParaRPr lang="en-US" sz="1300" dirty="0"/>
           </a:p>
           <a:p>
-            <a:pPr indent="0" marL="0">
+            <a:pPr marL="0" indent="0">
               <a:spcAft>
                 <a:spcPts val="100"/>
               </a:spcAft>
               <a:buNone/>
             </a:pPr>
+            <a:r>
+              <a:rPr lang="en-US" sz="1100" b="1" dirty="0">
+                <a:solidFill>
+                  <a:srgbClr val="2D3748"/>
+                </a:solidFill>
+                <a:latin typeface="Meiryo" pitchFamily="34" charset="0"/>
+                <a:ea typeface="Meiryo" pitchFamily="34" charset="-122"/>
+                <a:cs typeface="Meiryo" pitchFamily="34" charset="-120"/>
+              </a:rPr>
+              <a:t>/sandbox なしの場合：</a:t>
+            </a:r>
             <a:endParaRPr lang="en-US" sz="1300" dirty="0"/>
           </a:p>
           <a:p>
-            <a:pPr indent="0" marL="0">
+            <a:pPr marL="0" indent="0">
               <a:spcAft>
                 <a:spcPts val="100"/>
               </a:spcAft>
               <a:buNone/>
             </a:pPr>
             <a:r>
-              <a:rPr lang="en-US" sz="1100" b="1" dirty="0">
+              <a:rPr lang="en-US" sz="1100" dirty="0">
                 <a:solidFill>
                   <a:srgbClr val="2D3748"/>
                 </a:solidFill>
@@ -8191,119 +7908,106 @@
                 <a:ea typeface="Meiryo" pitchFamily="34" charset="-122"/>
                 <a:cs typeface="Meiryo" pitchFamily="34" charset="-120"/>
               </a:rPr>
-              <a:t>/sandbox なしの場合：</a:t>
+              <a:t>・Deny は Claude の組み込みツール（Read/Edit）のみをブロック</a:t>
             </a:r>
             <a:endParaRPr lang="en-US" sz="1300" dirty="0"/>
           </a:p>
           <a:p>
-            <a:pPr indent="0" marL="0">
+            <a:pPr marL="0" indent="0">
               <a:spcAft>
                 <a:spcPts val="100"/>
               </a:spcAft>
               <a:buNone/>
             </a:pPr>
             <a:r>
-              <a:rPr lang="en-US" sz="1100" dirty="0">
-                <a:solidFill>
-                  <a:srgbClr val="2D3748"/>
-                </a:solidFill>
-                <a:latin typeface="Meiryo" pitchFamily="34" charset="0"/>
-                <a:ea typeface="Meiryo" pitchFamily="34" charset="-122"/>
-                <a:cs typeface="Meiryo" pitchFamily="34" charset="-120"/>
-              </a:rPr>
-              <a:t>・Deny は Claude の組み込みツール（Read/Edit）のみをブロック</a:t>
+              <a:rPr lang="en-US" sz="1100" b="1" dirty="0">
+                <a:solidFill>
+                  <a:srgbClr val="F96167"/>
+                </a:solidFill>
+                <a:latin typeface="Meiryo" pitchFamily="34" charset="0"/>
+                <a:ea typeface="Meiryo" pitchFamily="34" charset="-122"/>
+                <a:cs typeface="Meiryo" pitchFamily="34" charset="-120"/>
+              </a:rPr>
+              <a:t>・Bash コマンドは Deny を回避できる</a:t>
             </a:r>
             <a:endParaRPr lang="en-US" sz="1300" dirty="0"/>
           </a:p>
           <a:p>
-            <a:pPr indent="0" marL="0">
+            <a:pPr marL="0" indent="0">
               <a:spcAft>
                 <a:spcPts val="100"/>
               </a:spcAft>
               <a:buNone/>
             </a:pPr>
             <a:r>
-              <a:rPr lang="en-US" sz="1100" b="1" dirty="0">
-                <a:solidFill>
-                  <a:srgbClr val="F96167"/>
-                </a:solidFill>
-                <a:latin typeface="Meiryo" pitchFamily="34" charset="0"/>
-                <a:ea typeface="Meiryo" pitchFamily="34" charset="-122"/>
-                <a:cs typeface="Meiryo" pitchFamily="34" charset="-120"/>
-              </a:rPr>
-              <a:t>・Bash コマンドは Deny を回避できる</a:t>
+              <a:rPr lang="en-US" sz="1000" dirty="0">
+                <a:solidFill>
+                  <a:srgbClr val="2D3748"/>
+                </a:solidFill>
+                <a:latin typeface="Meiryo" pitchFamily="34" charset="0"/>
+                <a:ea typeface="Meiryo" pitchFamily="34" charset="-122"/>
+                <a:cs typeface="Meiryo" pitchFamily="34" charset="-120"/>
+              </a:rPr>
+              <a:t>  （cat .env 等で読めてしまう）</a:t>
             </a:r>
             <a:endParaRPr lang="en-US" sz="1300" dirty="0"/>
           </a:p>
           <a:p>
-            <a:pPr indent="0" marL="0">
+            <a:pPr marL="0" indent="0">
               <a:spcAft>
                 <a:spcPts val="100"/>
               </a:spcAft>
               <a:buNone/>
             </a:pPr>
             <a:r>
-              <a:rPr lang="en-US" sz="1000" dirty="0">
-                <a:solidFill>
-                  <a:srgbClr val="2D3748"/>
-                </a:solidFill>
-                <a:latin typeface="Meiryo" pitchFamily="34" charset="0"/>
-                <a:ea typeface="Meiryo" pitchFamily="34" charset="-122"/>
-                <a:cs typeface="Meiryo" pitchFamily="34" charset="-120"/>
-              </a:rPr>
-              <a:t>  （cat .env 等で読めてしまう）</a:t>
+              <a:rPr lang="en-US" sz="1100" b="1" dirty="0">
+                <a:solidFill>
+                  <a:srgbClr val="F96167"/>
+                </a:solidFill>
+                <a:latin typeface="Meiryo" pitchFamily="34" charset="0"/>
+                <a:ea typeface="Meiryo" pitchFamily="34" charset="-122"/>
+                <a:cs typeface="Meiryo" pitchFamily="34" charset="-120"/>
+              </a:rPr>
+              <a:t>・ファイルシステム制御（denyRead等）は Sandbox 有効時のみ動作</a:t>
             </a:r>
             <a:endParaRPr lang="en-US" sz="1300" dirty="0"/>
           </a:p>
           <a:p>
-            <a:pPr indent="0" marL="0">
+            <a:pPr marL="0" indent="0">
               <a:spcAft>
                 <a:spcPts val="100"/>
               </a:spcAft>
               <a:buNone/>
             </a:pPr>
-            <a:r>
-              <a:rPr lang="en-US" sz="1100" b="1" dirty="0">
-                <a:solidFill>
-                  <a:srgbClr val="F96167"/>
-                </a:solidFill>
-                <a:latin typeface="Meiryo" pitchFamily="34" charset="0"/>
-                <a:ea typeface="Meiryo" pitchFamily="34" charset="-122"/>
-                <a:cs typeface="Meiryo" pitchFamily="34" charset="-120"/>
-              </a:rPr>
-              <a:t>・ファイルシステム制御（denyRead等）は Sandbox 有効時のみ動作</a:t>
-            </a:r>
-            <a:endParaRPr lang="en-US" sz="1300" dirty="0"/>
-          </a:p>
-          <a:p>
-            <a:pPr indent="0" marL="0">
+            <a:endParaRPr lang="en-US" sz="1200" b="1" dirty="0">
+              <a:solidFill>
+                <a:srgbClr val="1E2761"/>
+              </a:solidFill>
+              <a:latin typeface="Meiryo" pitchFamily="34" charset="0"/>
+              <a:ea typeface="Meiryo" pitchFamily="34" charset="-122"/>
+              <a:cs typeface="Meiryo" pitchFamily="34" charset="-120"/>
+            </a:endParaRPr>
+          </a:p>
+          <a:p>
+            <a:pPr marL="0" indent="0">
               <a:spcAft>
                 <a:spcPts val="100"/>
               </a:spcAft>
               <a:buNone/>
             </a:pPr>
+            <a:r>
+              <a:rPr lang="en-US" sz="1200" b="1" dirty="0">
+                <a:solidFill>
+                  <a:srgbClr val="1E2761"/>
+                </a:solidFill>
+                <a:latin typeface="Meiryo" pitchFamily="34" charset="0"/>
+                <a:ea typeface="Meiryo" pitchFamily="34" charset="-122"/>
+                <a:cs typeface="Meiryo" pitchFamily="34" charset="-120"/>
+              </a:rPr>
+              <a:t>→ Permission と Sandbox は必ずセットで使う。片方だけでは穴がある。</a:t>
+            </a:r>
             <a:endParaRPr lang="en-US" sz="1300" dirty="0"/>
           </a:p>
-          <a:p>
-            <a:pPr indent="0" marL="0">
-              <a:spcAft>
-                <a:spcPts val="100"/>
-              </a:spcAft>
-              <a:buNone/>
-            </a:pPr>
-            <a:r>
-              <a:rPr lang="en-US" sz="1200" b="1" dirty="0">
-                <a:solidFill>
-                  <a:srgbClr val="1E2761"/>
-                </a:solidFill>
-                <a:latin typeface="Meiryo" pitchFamily="34" charset="0"/>
-                <a:ea typeface="Meiryo" pitchFamily="34" charset="-122"/>
-                <a:cs typeface="Meiryo" pitchFamily="34" charset="-120"/>
-              </a:rPr>
-              <a:t>→ Permission と Sandbox は必ずセットで使う。片方だけでは穴がある。</a:t>
-            </a:r>
-            <a:endParaRPr lang="en-US" sz="1300" dirty="0"/>
-          </a:p>
         </p:txBody>
       </p:sp>
       <p:sp>
@@ -8314,7 +8018,7 @@
         </p:nvSpPr>
         <p:spPr>
           <a:xfrm>
-            <a:off x="457200" y="4526280"/>
+            <a:off x="457200" y="4457700"/>
             <a:ext cx="8229600" cy="365760"/>
           </a:xfrm>
           <a:prstGeom prst="rect">
@@ -8339,7 +8043,7 @@
         </p:nvSpPr>
         <p:spPr>
           <a:xfrm>
-            <a:off x="594360" y="4526280"/>
+            <a:off x="594360" y="4479010"/>
             <a:ext cx="7955280" cy="365760"/>
           </a:xfrm>
           <a:prstGeom prst="rect">
@@ -8352,7 +8056,7 @@
           <a:bodyPr wrap="square" lIns="0" tIns="0" rIns="0" bIns="0" rtlCol="0" anchor="ctr"/>
           <a:lstStyle/>
           <a:p>
-            <a:pPr indent="0" marL="0">
+            <a:pPr marL="0" indent="0">
               <a:buNone/>
             </a:pPr>
             <a:r>
@@ -8366,9 +8070,6 @@
               </a:rPr>
               <a:t>💡 </a:t>
             </a:r>
-            <a:pPr indent="0" marL="0">
-              <a:buNone/>
-            </a:pPr>
             <a:r>
               <a:rPr lang="en-US" sz="1100" dirty="0">
                 <a:solidFill>
@@ -8405,11 +8106,11 @@
           <a:bodyPr wrap="square" rtlCol="0" anchor="ctr"/>
           <a:lstStyle/>
           <a:p>
-            <a:pPr algn="r" indent="0" marL="0">
-              <a:buNone/>
-            </a:pPr>
-            <a:r>
-              <a:rPr lang="en-US" sz="1000" spc="100" kern="0" dirty="0">
+            <a:pPr marL="0" indent="0" algn="r">
+              <a:buNone/>
+            </a:pPr>
+            <a:r>
+              <a:rPr lang="en-US" sz="1000" kern="0" spc="100" dirty="0">
                 <a:solidFill>
                   <a:srgbClr val="64748B"/>
                 </a:solidFill>
@@ -8439,6 +8140,7 @@
         <a:solidFill>
           <a:srgbClr val="FFFFFF"/>
         </a:solidFill>
+        <a:effectLst/>
       </p:bgPr>
     </p:bg>
     <p:spTree>
@@ -8476,7 +8178,7 @@
           <a:bodyPr wrap="square" lIns="0" tIns="0" rIns="0" bIns="0" rtlCol="0" anchor="ctr"/>
           <a:lstStyle/>
           <a:p>
-            <a:pPr indent="0" marL="0">
+            <a:pPr marL="0" indent="0">
               <a:buNone/>
             </a:pPr>
             <a:r>
@@ -8540,7 +8242,7 @@
           <a:bodyPr wrap="square" lIns="0" tIns="0" rIns="0" bIns="0" rtlCol="0" anchor="ctr"/>
           <a:lstStyle/>
           <a:p>
-            <a:pPr indent="0" marL="0">
+            <a:pPr marL="0" indent="0">
               <a:buNone/>
             </a:pPr>
             <a:r>
@@ -8604,7 +8306,7 @@
           <a:bodyPr wrap="square" lIns="0" tIns="0" rIns="0" bIns="0" rtlCol="0" anchor="t"/>
           <a:lstStyle/>
           <a:p>
-            <a:pPr indent="0" marL="0">
+            <a:pPr marL="0" indent="0">
               <a:buNone/>
             </a:pPr>
             <a:r>
@@ -8621,7 +8323,7 @@
             <a:endParaRPr lang="en-US" sz="1000" dirty="0"/>
           </a:p>
           <a:p>
-            <a:pPr indent="0" marL="0">
+            <a:pPr marL="0" indent="0">
               <a:buNone/>
             </a:pPr>
             <a:r>
@@ -8638,7 +8340,7 @@
             <a:endParaRPr lang="en-US" sz="1000" dirty="0"/>
           </a:p>
           <a:p>
-            <a:pPr indent="0" marL="0">
+            <a:pPr marL="0" indent="0">
               <a:buNone/>
             </a:pPr>
             <a:r>
@@ -8655,7 +8357,7 @@
             <a:endParaRPr lang="en-US" sz="1000" dirty="0"/>
           </a:p>
           <a:p>
-            <a:pPr indent="0" marL="0">
+            <a:pPr marL="0" indent="0">
               <a:buNone/>
             </a:pPr>
             <a:r>
@@ -8672,7 +8374,7 @@
             <a:endParaRPr lang="en-US" sz="1000" dirty="0"/>
           </a:p>
           <a:p>
-            <a:pPr indent="0" marL="0">
+            <a:pPr marL="0" indent="0">
               <a:buNone/>
             </a:pPr>
             <a:r>
@@ -8689,7 +8391,7 @@
             <a:endParaRPr lang="en-US" sz="1000" dirty="0"/>
           </a:p>
           <a:p>
-            <a:pPr indent="0" marL="0">
+            <a:pPr marL="0" indent="0">
               <a:buNone/>
             </a:pPr>
             <a:r>
@@ -8706,7 +8408,7 @@
             <a:endParaRPr lang="en-US" sz="1000" dirty="0"/>
           </a:p>
           <a:p>
-            <a:pPr indent="0" marL="0">
+            <a:pPr marL="0" indent="0">
               <a:buNone/>
             </a:pPr>
             <a:r>
@@ -8723,7 +8425,7 @@
             <a:endParaRPr lang="en-US" sz="1000" dirty="0"/>
           </a:p>
           <a:p>
-            <a:pPr indent="0" marL="0">
+            <a:pPr marL="0" indent="0">
               <a:buNone/>
             </a:pPr>
             <a:r>
@@ -8762,7 +8464,7 @@
           <a:bodyPr wrap="square" lIns="0" tIns="0" rIns="0" bIns="0" rtlCol="0" anchor="ctr"/>
           <a:lstStyle/>
           <a:p>
-            <a:pPr indent="0" marL="0">
+            <a:pPr marL="0" indent="0">
               <a:buNone/>
             </a:pPr>
             <a:r>
@@ -8826,7 +8528,7 @@
           <a:bodyPr wrap="square" lIns="0" tIns="0" rIns="0" bIns="0" rtlCol="0" anchor="t"/>
           <a:lstStyle/>
           <a:p>
-            <a:pPr indent="0" marL="0">
+            <a:pPr marL="0" indent="0">
               <a:buNone/>
             </a:pPr>
             <a:r>
@@ -8843,7 +8545,7 @@
             <a:endParaRPr lang="en-US" sz="1000" dirty="0"/>
           </a:p>
           <a:p>
-            <a:pPr indent="0" marL="0">
+            <a:pPr marL="0" indent="0">
               <a:buNone/>
             </a:pPr>
             <a:r>
@@ -8860,7 +8562,7 @@
             <a:endParaRPr lang="en-US" sz="1000" dirty="0"/>
           </a:p>
           <a:p>
-            <a:pPr indent="0" marL="0">
+            <a:pPr marL="0" indent="0">
               <a:buNone/>
             </a:pPr>
             <a:r>
@@ -8877,7 +8579,7 @@
             <a:endParaRPr lang="en-US" sz="1000" dirty="0"/>
           </a:p>
           <a:p>
-            <a:pPr indent="0" marL="0">
+            <a:pPr marL="0" indent="0">
               <a:buNone/>
             </a:pPr>
             <a:r>
@@ -8894,7 +8596,7 @@
             <a:endParaRPr lang="en-US" sz="1000" dirty="0"/>
           </a:p>
           <a:p>
-            <a:pPr indent="0" marL="0">
+            <a:pPr marL="0" indent="0">
               <a:buNone/>
             </a:pPr>
             <a:r>
@@ -8911,7 +8613,7 @@
             <a:endParaRPr lang="en-US" sz="1000" dirty="0"/>
           </a:p>
           <a:p>
-            <a:pPr indent="0" marL="0">
+            <a:pPr marL="0" indent="0">
               <a:buNone/>
             </a:pPr>
             <a:r>
@@ -8928,7 +8630,7 @@
             <a:endParaRPr lang="en-US" sz="1000" dirty="0"/>
           </a:p>
           <a:p>
-            <a:pPr indent="0" marL="0">
+            <a:pPr marL="0" indent="0">
               <a:buNone/>
             </a:pPr>
             <a:r>
@@ -8945,7 +8647,7 @@
             <a:endParaRPr lang="en-US" sz="1000" dirty="0"/>
           </a:p>
           <a:p>
-            <a:pPr indent="0" marL="0">
+            <a:pPr marL="0" indent="0">
               <a:buNone/>
             </a:pPr>
             <a:r>
@@ -8962,7 +8664,7 @@
             <a:endParaRPr lang="en-US" sz="1000" dirty="0"/>
           </a:p>
           <a:p>
-            <a:pPr indent="0" marL="0">
+            <a:pPr marL="0" indent="0">
               <a:buNone/>
             </a:pPr>
             <a:r>
@@ -9001,7 +8703,7 @@
           <a:bodyPr wrap="square" lIns="0" tIns="0" rIns="0" bIns="0" rtlCol="0" anchor="ctr"/>
           <a:lstStyle/>
           <a:p>
-            <a:pPr indent="0" marL="0">
+            <a:pPr marL="0" indent="0">
               <a:buNone/>
             </a:pPr>
             <a:r>
@@ -9065,7 +8767,7 @@
           <a:bodyPr wrap="square" lIns="0" tIns="0" rIns="0" bIns="0" rtlCol="0" anchor="ctr"/>
           <a:lstStyle/>
           <a:p>
-            <a:pPr indent="0" marL="0">
+            <a:pPr marL="0" indent="0">
               <a:buNone/>
             </a:pPr>
             <a:r>
@@ -9079,9 +8781,6 @@
               </a:rPr>
               <a:t>🔴 重要: </a:t>
             </a:r>
-            <a:pPr indent="0" marL="0">
-              <a:buNone/>
-            </a:pPr>
             <a:r>
               <a:rPr lang="en-US" sz="1100" dirty="0">
                 <a:solidFill>
@@ -9093,9 +8792,6 @@
               </a:rPr>
               <a:t>sandbox.filesystem の設定は </a:t>
             </a:r>
-            <a:pPr indent="0" marL="0">
-              <a:buNone/>
-            </a:pPr>
             <a:r>
               <a:rPr lang="en-US" sz="1100" b="1" dirty="0">
                 <a:solidFill>
@@ -9107,9 +8803,6 @@
               </a:rPr>
               <a:t>Sandbox 有効 (enabled: true) でなければ一切機能しない</a:t>
             </a:r>
-            <a:pPr indent="0" marL="0">
-              <a:buNone/>
-            </a:pPr>
             <a:r>
               <a:rPr lang="en-US" sz="1100" dirty="0">
                 <a:solidFill>
@@ -9196,7 +8889,7 @@
           <a:bodyPr wrap="square" lIns="0" tIns="0" rIns="0" bIns="0" rtlCol="0" anchor="t"/>
           <a:lstStyle/>
           <a:p>
-            <a:pPr indent="0" marL="0">
+            <a:pPr marL="0" indent="0">
               <a:spcAft>
                 <a:spcPts val="200"/>
               </a:spcAft>
@@ -9216,7 +8909,7 @@
             <a:endParaRPr lang="en-US" sz="1200" dirty="0"/>
           </a:p>
           <a:p>
-            <a:pPr indent="0" marL="0">
+            <a:pPr marL="0" indent="0">
               <a:spcAft>
                 <a:spcPts val="200"/>
               </a:spcAft>
@@ -9236,7 +8929,7 @@
             <a:endParaRPr lang="en-US" sz="1200" dirty="0"/>
           </a:p>
           <a:p>
-            <a:pPr indent="0" marL="0">
+            <a:pPr marL="0" indent="0">
               <a:spcAft>
                 <a:spcPts val="200"/>
               </a:spcAft>
@@ -9253,12 +8946,6 @@
               </a:rPr>
               <a:t>対策: "failIfUnavailable": true </a:t>
             </a:r>
-            <a:pPr indent="0" marL="0">
-              <a:spcAft>
-                <a:spcPts val="200"/>
-              </a:spcAft>
-              <a:buNone/>
-            </a:pPr>
             <a:r>
               <a:rPr lang="en-US" sz="1000" dirty="0">
                 <a:solidFill>
@@ -9320,7 +9007,7 @@
           <a:bodyPr wrap="square" lIns="0" tIns="0" rIns="0" bIns="0" rtlCol="0" anchor="ctr"/>
           <a:lstStyle/>
           <a:p>
-            <a:pPr indent="0" marL="0">
+            <a:pPr marL="0" indent="0">
               <a:buNone/>
             </a:pPr>
             <a:r>
@@ -9334,9 +9021,6 @@
               </a:rPr>
               <a:t>💡 </a:t>
             </a:r>
-            <a:pPr indent="0" marL="0">
-              <a:buNone/>
-            </a:pPr>
             <a:r>
               <a:rPr lang="en-US" sz="1100" dirty="0">
                 <a:solidFill>
@@ -9348,9 +9032,6 @@
               </a:rPr>
               <a:t>Sandbox なしの Deny = お願いレベル / </a:t>
             </a:r>
-            <a:pPr indent="0" marL="0">
-              <a:buNone/>
-            </a:pPr>
             <a:r>
               <a:rPr lang="en-US" sz="1100" b="1" dirty="0">
                 <a:solidFill>
@@ -9387,11 +9068,11 @@
           <a:bodyPr wrap="square" rtlCol="0" anchor="ctr"/>
           <a:lstStyle/>
           <a:p>
-            <a:pPr algn="r" indent="0" marL="0">
-              <a:buNone/>
-            </a:pPr>
-            <a:r>
-              <a:rPr lang="en-US" sz="1000" spc="100" kern="0" dirty="0">
+            <a:pPr marL="0" indent="0" algn="r">
+              <a:buNone/>
+            </a:pPr>
+            <a:r>
+              <a:rPr lang="en-US" sz="1000" kern="0" spc="100" dirty="0">
                 <a:solidFill>
                   <a:srgbClr val="64748B"/>
                 </a:solidFill>
@@ -9421,6 +9102,7 @@
         <a:solidFill>
           <a:srgbClr val="FFFFFF"/>
         </a:solidFill>
+        <a:effectLst/>
       </p:bgPr>
     </p:bg>
     <p:spTree>
@@ -9458,7 +9140,7 @@
           <a:bodyPr wrap="square" lIns="0" tIns="0" rIns="0" bIns="0" rtlCol="0" anchor="ctr"/>
           <a:lstStyle/>
           <a:p>
-            <a:pPr indent="0" marL="0">
+            <a:pPr marL="0" indent="0">
               <a:buNone/>
             </a:pPr>
             <a:r>
@@ -9522,7 +9204,7 @@
           <a:bodyPr wrap="square" lIns="0" tIns="0" rIns="0" bIns="0" rtlCol="0" anchor="ctr"/>
           <a:lstStyle/>
           <a:p>
-            <a:pPr indent="0" marL="0">
+            <a:pPr marL="0" indent="0">
               <a:buNone/>
             </a:pPr>
             <a:r>
@@ -9586,7 +9268,7 @@
           <a:bodyPr wrap="square" lIns="0" tIns="0" rIns="0" bIns="0" rtlCol="0" anchor="ctr"/>
           <a:lstStyle/>
           <a:p>
-            <a:pPr algn="ctr" indent="0" marL="0">
+            <a:pPr marL="0" indent="0" algn="ctr">
               <a:buNone/>
             </a:pPr>
             <a:r>
@@ -9625,7 +9307,7 @@
           <a:bodyPr wrap="square" lIns="0" tIns="0" rIns="0" bIns="0" rtlCol="0" anchor="ctr"/>
           <a:lstStyle/>
           <a:p>
-            <a:pPr algn="ctr" indent="0" marL="0">
+            <a:pPr marL="0" indent="0" algn="ctr">
               <a:buNone/>
             </a:pPr>
             <a:r>
@@ -9689,7 +9371,7 @@
           <a:bodyPr wrap="square" lIns="0" tIns="0" rIns="0" bIns="0" rtlCol="0" anchor="ctr"/>
           <a:lstStyle/>
           <a:p>
-            <a:pPr algn="ctr" indent="0" marL="0">
+            <a:pPr marL="0" indent="0" algn="ctr">
               <a:buNone/>
             </a:pPr>
             <a:r>
@@ -9706,7 +9388,7 @@
             <a:endParaRPr lang="en-US" sz="900" dirty="0"/>
           </a:p>
           <a:p>
-            <a:pPr algn="ctr" indent="0" marL="0">
+            <a:pPr marL="0" indent="0" algn="ctr">
               <a:buNone/>
             </a:pPr>
             <a:r>
@@ -9745,7 +9427,7 @@
           <a:bodyPr wrap="square" lIns="0" tIns="0" rIns="0" bIns="0" rtlCol="0" anchor="ctr"/>
           <a:lstStyle/>
           <a:p>
-            <a:pPr algn="ctr" indent="0" marL="0">
+            <a:pPr marL="0" indent="0" algn="ctr">
               <a:buNone/>
             </a:pPr>
             <a:r>
@@ -9809,7 +9491,7 @@
           <a:bodyPr wrap="square" lIns="0" tIns="0" rIns="0" bIns="0" rtlCol="0" anchor="ctr"/>
           <a:lstStyle/>
           <a:p>
-            <a:pPr algn="ctr" indent="0" marL="0">
+            <a:pPr marL="0" indent="0" algn="ctr">
               <a:buNone/>
             </a:pPr>
             <a:r>
@@ -9848,7 +9530,7 @@
           <a:bodyPr wrap="square" lIns="0" tIns="0" rIns="0" bIns="0" rtlCol="0" anchor="ctr"/>
           <a:lstStyle/>
           <a:p>
-            <a:pPr algn="ctr" indent="0" marL="0">
+            <a:pPr marL="0" indent="0" algn="ctr">
               <a:buNone/>
             </a:pPr>
             <a:r>
@@ -9912,7 +9594,7 @@
           <a:bodyPr wrap="square" lIns="0" tIns="0" rIns="0" bIns="0" rtlCol="0" anchor="ctr"/>
           <a:lstStyle/>
           <a:p>
-            <a:pPr algn="ctr" indent="0" marL="0">
+            <a:pPr marL="0" indent="0" algn="ctr">
               <a:buNone/>
             </a:pPr>
             <a:r>
@@ -9951,7 +9633,7 @@
           <a:bodyPr wrap="square" lIns="0" tIns="0" rIns="0" bIns="0" rtlCol="0" anchor="ctr"/>
           <a:lstStyle/>
           <a:p>
-            <a:pPr algn="ctr" indent="0" marL="0">
+            <a:pPr marL="0" indent="0" algn="ctr">
               <a:buNone/>
             </a:pPr>
             <a:r>
@@ -10015,7 +9697,7 @@
           <a:bodyPr wrap="square" lIns="0" tIns="0" rIns="0" bIns="0" rtlCol="0" anchor="ctr"/>
           <a:lstStyle/>
           <a:p>
-            <a:pPr algn="ctr" indent="0" marL="0">
+            <a:pPr marL="0" indent="0" algn="ctr">
               <a:buNone/>
             </a:pPr>
             <a:r>
@@ -10054,7 +9736,7 @@
           <a:bodyPr wrap="square" lIns="0" tIns="0" rIns="0" bIns="0" rtlCol="0" anchor="ctr"/>
           <a:lstStyle/>
           <a:p>
-            <a:pPr algn="ctr" indent="0" marL="0">
+            <a:pPr marL="0" indent="0" algn="ctr">
               <a:buNone/>
             </a:pPr>
             <a:r>
@@ -10118,7 +9800,7 @@
           <a:bodyPr wrap="square" lIns="0" tIns="0" rIns="0" bIns="0" rtlCol="0" anchor="ctr"/>
           <a:lstStyle/>
           <a:p>
-            <a:pPr algn="ctr" indent="0" marL="0">
+            <a:pPr marL="0" indent="0" algn="ctr">
               <a:buNone/>
             </a:pPr>
             <a:r>
@@ -10207,7 +9889,7 @@
           <a:bodyPr wrap="square" lIns="0" tIns="0" rIns="0" bIns="0" rtlCol="0" anchor="ctr"/>
           <a:lstStyle/>
           <a:p>
-            <a:pPr indent="0" marL="0">
+            <a:pPr marL="0" indent="0">
               <a:buNone/>
             </a:pPr>
             <a:r>
@@ -10381,7 +10063,7 @@
           <a:bodyPr wrap="square" lIns="0" tIns="0" rIns="0" bIns="0" rtlCol="0" anchor="ctr"/>
           <a:lstStyle/>
           <a:p>
-            <a:pPr indent="0" marL="0">
+            <a:pPr marL="0" indent="0">
               <a:buNone/>
             </a:pPr>
             <a:r>
@@ -10555,7 +10237,7 @@
           <a:bodyPr wrap="square" lIns="0" tIns="0" rIns="0" bIns="0" rtlCol="0" anchor="ctr"/>
           <a:lstStyle/>
           <a:p>
-            <a:pPr indent="0" marL="0">
+            <a:pPr marL="0" indent="0">
               <a:buNone/>
             </a:pPr>
             <a:r>
@@ -10704,7 +10386,7 @@
           <a:bodyPr wrap="square" lIns="0" tIns="0" rIns="0" bIns="0" rtlCol="0" anchor="ctr"/>
           <a:lstStyle/>
           <a:p>
-            <a:pPr indent="0" marL="0">
+            <a:pPr marL="0" indent="0">
               <a:buNone/>
             </a:pPr>
             <a:r>
@@ -10718,9 +10400,6 @@
               </a:rPr>
               <a:t>💡 </a:t>
             </a:r>
-            <a:pPr indent="0" marL="0">
-              <a:buNone/>
-            </a:pPr>
             <a:r>
               <a:rPr lang="en-US" sz="1100" b="1" dirty="0">
                 <a:solidFill>
@@ -10732,9 +10411,6 @@
               </a:rPr>
               <a:t>Hooks は LLM の判断に依存しない。</a:t>
             </a:r>
-            <a:pPr indent="0" marL="0">
-              <a:buNone/>
-            </a:pPr>
             <a:r>
               <a:rPr lang="en-US" sz="1100" dirty="0">
                 <a:solidFill>
@@ -10771,11 +10447,11 @@
           <a:bodyPr wrap="square" rtlCol="0" anchor="ctr"/>
           <a:lstStyle/>
           <a:p>
-            <a:pPr algn="r" indent="0" marL="0">
-              <a:buNone/>
-            </a:pPr>
-            <a:r>
-              <a:rPr lang="en-US" sz="1000" spc="100" kern="0" dirty="0">
+            <a:pPr marL="0" indent="0" algn="r">
+              <a:buNone/>
+            </a:pPr>
+            <a:r>
+              <a:rPr lang="en-US" sz="1000" kern="0" spc="100" dirty="0">
                 <a:solidFill>
                   <a:srgbClr val="64748B"/>
                 </a:solidFill>
@@ -10805,6 +10481,7 @@
         <a:solidFill>
           <a:srgbClr val="FFFFFF"/>
         </a:solidFill>
+        <a:effectLst/>
       </p:bgPr>
     </p:bg>
     <p:spTree>
@@ -10842,7 +10519,7 @@
           <a:bodyPr wrap="square" lIns="0" tIns="0" rIns="0" bIns="0" rtlCol="0" anchor="ctr"/>
           <a:lstStyle/>
           <a:p>
-            <a:pPr indent="0" marL="0">
+            <a:pPr marL="0" indent="0">
               <a:buNone/>
             </a:pPr>
             <a:r>
@@ -10906,7 +10583,7 @@
           <a:bodyPr wrap="square" lIns="0" tIns="0" rIns="0" bIns="0" rtlCol="0" anchor="ctr"/>
           <a:lstStyle/>
           <a:p>
-            <a:pPr indent="0" marL="0">
+            <a:pPr marL="0" indent="0">
               <a:buNone/>
             </a:pPr>
             <a:r>
@@ -10970,7 +10647,7 @@
           <a:bodyPr wrap="square" lIns="0" tIns="0" rIns="0" bIns="0" rtlCol="0" anchor="b"/>
           <a:lstStyle/>
           <a:p>
-            <a:pPr indent="0" marL="0">
+            <a:pPr marL="0" indent="0">
               <a:buNone/>
             </a:pPr>
             <a:r>
@@ -11009,7 +10686,7 @@
           <a:bodyPr wrap="square" lIns="0" tIns="0" rIns="0" bIns="0" rtlCol="0" anchor="t"/>
           <a:lstStyle/>
           <a:p>
-            <a:pPr indent="0" marL="0">
+            <a:pPr marL="0" indent="0">
               <a:buNone/>
             </a:pPr>
             <a:r>
@@ -11073,7 +10750,7 @@
           <a:bodyPr wrap="square" lIns="0" tIns="0" rIns="0" bIns="0" rtlCol="0" anchor="b"/>
           <a:lstStyle/>
           <a:p>
-            <a:pPr indent="0" marL="0">
+            <a:pPr marL="0" indent="0">
               <a:buNone/>
             </a:pPr>
             <a:r>
@@ -11112,7 +10789,7 @@
           <a:bodyPr wrap="square" lIns="0" tIns="0" rIns="0" bIns="0" rtlCol="0" anchor="t"/>
           <a:lstStyle/>
           <a:p>
-            <a:pPr indent="0" marL="0">
+            <a:pPr marL="0" indent="0">
               <a:buNone/>
             </a:pPr>
             <a:r>
@@ -11176,7 +10853,7 @@
           <a:bodyPr wrap="square" lIns="0" tIns="0" rIns="0" bIns="0" rtlCol="0" anchor="b"/>
           <a:lstStyle/>
           <a:p>
-            <a:pPr indent="0" marL="0">
+            <a:pPr marL="0" indent="0">
               <a:buNone/>
             </a:pPr>
             <a:r>
@@ -11215,7 +10892,7 @@
           <a:bodyPr wrap="square" lIns="0" tIns="0" rIns="0" bIns="0" rtlCol="0" anchor="t"/>
           <a:lstStyle/>
           <a:p>
-            <a:pPr indent="0" marL="0">
+            <a:pPr marL="0" indent="0">
               <a:buNone/>
             </a:pPr>
             <a:r>
@@ -11279,7 +10956,7 @@
           <a:bodyPr wrap="square" lIns="0" tIns="0" rIns="0" bIns="0" rtlCol="0" anchor="b"/>
           <a:lstStyle/>
           <a:p>
-            <a:pPr indent="0" marL="0">
+            <a:pPr marL="0" indent="0">
               <a:buNone/>
             </a:pPr>
             <a:r>
@@ -11318,7 +10995,7 @@
           <a:bodyPr wrap="square" lIns="0" tIns="0" rIns="0" bIns="0" rtlCol="0" anchor="t"/>
           <a:lstStyle/>
           <a:p>
-            <a:pPr indent="0" marL="0">
+            <a:pPr marL="0" indent="0">
               <a:buNone/>
             </a:pPr>
             <a:r>
@@ -11382,7 +11059,7 @@
           <a:bodyPr wrap="square" lIns="0" tIns="0" rIns="0" bIns="0" rtlCol="0" anchor="ctr"/>
           <a:lstStyle/>
           <a:p>
-            <a:pPr indent="0" marL="0">
+            <a:pPr marL="0" indent="0">
               <a:buNone/>
             </a:pPr>
             <a:r>
@@ -11396,9 +11073,6 @@
               </a:rPr>
               <a:t>⚠ </a:t>
             </a:r>
-            <a:pPr indent="0" marL="0">
-              <a:buNone/>
-            </a:pPr>
             <a:r>
               <a:rPr lang="en-US" sz="1000" b="1" dirty="0">
                 <a:solidFill>
@@ -11460,7 +11134,7 @@
           <a:bodyPr wrap="square" lIns="0" tIns="0" rIns="0" bIns="0" rtlCol="0" anchor="ctr"/>
           <a:lstStyle/>
           <a:p>
-            <a:pPr indent="0" marL="0">
+            <a:pPr marL="0" indent="0">
               <a:buNone/>
             </a:pPr>
             <a:r>
@@ -11474,9 +11148,6 @@
               </a:rPr>
               <a:t>💡 </a:t>
             </a:r>
-            <a:pPr indent="0" marL="0">
-              <a:buNone/>
-            </a:pPr>
             <a:r>
               <a:rPr lang="en-US" sz="1100" dirty="0">
                 <a:solidFill>
@@ -11488,9 +11159,6 @@
               </a:rPr>
               <a:t>コーディング規約 → CLAUDE.md / ツール使い方 → Skills（第4回）/ </a:t>
             </a:r>
-            <a:pPr indent="0" marL="0">
-              <a:buNone/>
-            </a:pPr>
             <a:r>
               <a:rPr lang="en-US" sz="1100" b="1" dirty="0">
                 <a:solidFill>
@@ -11527,11 +11195,11 @@
           <a:bodyPr wrap="square" rtlCol="0" anchor="ctr"/>
           <a:lstStyle/>
           <a:p>
-            <a:pPr algn="r" indent="0" marL="0">
-              <a:buNone/>
-            </a:pPr>
-            <a:r>
-              <a:rPr lang="en-US" sz="1000" spc="100" kern="0" dirty="0">
+            <a:pPr marL="0" indent="0" algn="r">
+              <a:buNone/>
+            </a:pPr>
+            <a:r>
+              <a:rPr lang="en-US" sz="1000" kern="0" spc="100" dirty="0">
                 <a:solidFill>
                   <a:srgbClr val="64748B"/>
                 </a:solidFill>
@@ -11561,6 +11229,7 @@
         <a:solidFill>
           <a:srgbClr val="FFFFFF"/>
         </a:solidFill>
+        <a:effectLst/>
       </p:bgPr>
     </p:bg>
     <p:spTree>
@@ -11598,7 +11267,7 @@
           <a:bodyPr wrap="square" lIns="0" tIns="0" rIns="0" bIns="0" rtlCol="0" anchor="ctr"/>
           <a:lstStyle/>
           <a:p>
-            <a:pPr indent="0" marL="0">
+            <a:pPr marL="0" indent="0">
               <a:buNone/>
             </a:pPr>
             <a:r>
@@ -11662,7 +11331,7 @@
           <a:bodyPr wrap="square" lIns="0" tIns="0" rIns="0" bIns="0" rtlCol="0" anchor="ctr"/>
           <a:lstStyle/>
           <a:p>
-            <a:pPr indent="0" marL="0">
+            <a:pPr marL="0" indent="0">
               <a:buNone/>
             </a:pPr>
             <a:r>
@@ -11726,7 +11395,7 @@
           <a:bodyPr wrap="square" lIns="0" tIns="0" rIns="0" bIns="0" rtlCol="0" anchor="t"/>
           <a:lstStyle/>
           <a:p>
-            <a:pPr indent="0" marL="0">
+            <a:pPr marL="0" indent="0">
               <a:buNone/>
             </a:pPr>
             <a:r>
@@ -11743,7 +11412,7 @@
             <a:endParaRPr lang="en-US" sz="850" dirty="0"/>
           </a:p>
           <a:p>
-            <a:pPr indent="0" marL="0">
+            <a:pPr marL="0" indent="0">
               <a:buNone/>
             </a:pPr>
             <a:r>
@@ -11760,7 +11429,7 @@
             <a:endParaRPr lang="en-US" sz="850" dirty="0"/>
           </a:p>
           <a:p>
-            <a:pPr indent="0" marL="0">
+            <a:pPr marL="0" indent="0">
               <a:buNone/>
             </a:pPr>
             <a:r>
@@ -11777,7 +11446,7 @@
             <a:endParaRPr lang="en-US" sz="850" dirty="0"/>
           </a:p>
           <a:p>
-            <a:pPr indent="0" marL="0">
+            <a:pPr marL="0" indent="0">
               <a:buNone/>
             </a:pPr>
             <a:r>
@@ -11794,7 +11463,7 @@
             <a:endParaRPr lang="en-US" sz="850" dirty="0"/>
           </a:p>
           <a:p>
-            <a:pPr indent="0" marL="0">
+            <a:pPr marL="0" indent="0">
               <a:buNone/>
             </a:pPr>
             <a:r>
@@ -11811,7 +11480,7 @@
             <a:endParaRPr lang="en-US" sz="850" dirty="0"/>
           </a:p>
           <a:p>
-            <a:pPr indent="0" marL="0">
+            <a:pPr marL="0" indent="0">
               <a:buNone/>
             </a:pPr>
             <a:r>
@@ -11828,7 +11497,7 @@
             <a:endParaRPr lang="en-US" sz="850" dirty="0"/>
           </a:p>
           <a:p>
-            <a:pPr indent="0" marL="0">
+            <a:pPr marL="0" indent="0">
               <a:buNone/>
             </a:pPr>
             <a:r>
@@ -11845,7 +11514,7 @@
             <a:endParaRPr lang="en-US" sz="850" dirty="0"/>
           </a:p>
           <a:p>
-            <a:pPr indent="0" marL="0">
+            <a:pPr marL="0" indent="0">
               <a:buNone/>
             </a:pPr>
             <a:r>
@@ -11862,7 +11531,7 @@
             <a:endParaRPr lang="en-US" sz="850" dirty="0"/>
           </a:p>
           <a:p>
-            <a:pPr indent="0" marL="0">
+            <a:pPr marL="0" indent="0">
               <a:buNone/>
             </a:pPr>
             <a:r>
@@ -11879,7 +11548,7 @@
             <a:endParaRPr lang="en-US" sz="850" dirty="0"/>
           </a:p>
           <a:p>
-            <a:pPr indent="0" marL="0">
+            <a:pPr marL="0" indent="0">
               <a:buNone/>
             </a:pPr>
             <a:r>
@@ -11896,7 +11565,7 @@
             <a:endParaRPr lang="en-US" sz="850" dirty="0"/>
           </a:p>
           <a:p>
-            <a:pPr indent="0" marL="0">
+            <a:pPr marL="0" indent="0">
               <a:buNone/>
             </a:pPr>
             <a:r>
@@ -11913,7 +11582,7 @@
             <a:endParaRPr lang="en-US" sz="850" dirty="0"/>
           </a:p>
           <a:p>
-            <a:pPr indent="0" marL="0">
+            <a:pPr marL="0" indent="0">
               <a:buNone/>
             </a:pPr>
             <a:r>
@@ -11930,7 +11599,7 @@
             <a:endParaRPr lang="en-US" sz="850" dirty="0"/>
           </a:p>
           <a:p>
-            <a:pPr indent="0" marL="0">
+            <a:pPr marL="0" indent="0">
               <a:buNone/>
             </a:pPr>
             <a:r>
@@ -11947,7 +11616,7 @@
             <a:endParaRPr lang="en-US" sz="850" dirty="0"/>
           </a:p>
           <a:p>
-            <a:pPr indent="0" marL="0">
+            <a:pPr marL="0" indent="0">
               <a:buNone/>
             </a:pPr>
             <a:r>
@@ -11964,7 +11633,7 @@
             <a:endParaRPr lang="en-US" sz="850" dirty="0"/>
           </a:p>
           <a:p>
-            <a:pPr indent="0" marL="0">
+            <a:pPr marL="0" indent="0">
               <a:buNone/>
             </a:pPr>
             <a:r>
@@ -11981,7 +11650,7 @@
             <a:endParaRPr lang="en-US" sz="850" dirty="0"/>
           </a:p>
           <a:p>
-            <a:pPr indent="0" marL="0">
+            <a:pPr marL="0" indent="0">
               <a:buNone/>
             </a:pPr>
             <a:r>
@@ -11998,7 +11667,7 @@
             <a:endParaRPr lang="en-US" sz="850" dirty="0"/>
           </a:p>
           <a:p>
-            <a:pPr indent="0" marL="0">
+            <a:pPr marL="0" indent="0">
               <a:buNone/>
             </a:pPr>
             <a:r>
@@ -12015,7 +11684,7 @@
             <a:endParaRPr lang="en-US" sz="850" dirty="0"/>
           </a:p>
           <a:p>
-            <a:pPr indent="0" marL="0">
+            <a:pPr marL="0" indent="0">
               <a:buNone/>
             </a:pPr>
             <a:r>
@@ -12032,7 +11701,7 @@
             <a:endParaRPr lang="en-US" sz="850" dirty="0"/>
           </a:p>
           <a:p>
-            <a:pPr indent="0" marL="0">
+            <a:pPr marL="0" indent="0">
               <a:buNone/>
             </a:pPr>
             <a:r>
@@ -12049,7 +11718,7 @@
             <a:endParaRPr lang="en-US" sz="850" dirty="0"/>
           </a:p>
           <a:p>
-            <a:pPr indent="0" marL="0">
+            <a:pPr marL="0" indent="0">
               <a:buNone/>
             </a:pPr>
             <a:r>
@@ -12066,7 +11735,7 @@
             <a:endParaRPr lang="en-US" sz="850" dirty="0"/>
           </a:p>
           <a:p>
-            <a:pPr indent="0" marL="0">
+            <a:pPr marL="0" indent="0">
               <a:buNone/>
             </a:pPr>
             <a:r>
@@ -12083,7 +11752,7 @@
             <a:endParaRPr lang="en-US" sz="850" dirty="0"/>
           </a:p>
           <a:p>
-            <a:pPr indent="0" marL="0">
+            <a:pPr marL="0" indent="0">
               <a:buNone/>
             </a:pPr>
             <a:r>
@@ -12100,7 +11769,7 @@
             <a:endParaRPr lang="en-US" sz="850" dirty="0"/>
           </a:p>
           <a:p>
-            <a:pPr indent="0" marL="0">
+            <a:pPr marL="0" indent="0">
               <a:buNone/>
             </a:pPr>
             <a:r>
@@ -12117,7 +11786,7 @@
             <a:endParaRPr lang="en-US" sz="850" dirty="0"/>
           </a:p>
           <a:p>
-            <a:pPr indent="0" marL="0">
+            <a:pPr marL="0" indent="0">
               <a:buNone/>
             </a:pPr>
             <a:r>
@@ -12156,7 +11825,7 @@
           <a:bodyPr wrap="square" lIns="0" tIns="0" rIns="0" bIns="0" rtlCol="0" anchor="ctr"/>
           <a:lstStyle/>
           <a:p>
-            <a:pPr indent="0" marL="0">
+            <a:pPr marL="0" indent="0">
               <a:buNone/>
             </a:pPr>
             <a:r>
@@ -12220,7 +11889,7 @@
           <a:bodyPr wrap="square" lIns="0" tIns="0" rIns="0" bIns="0" rtlCol="0" anchor="ctr"/>
           <a:lstStyle/>
           <a:p>
-            <a:pPr indent="0" marL="0">
+            <a:pPr marL="0" indent="0">
               <a:buNone/>
             </a:pPr>
             <a:r>
@@ -12284,7 +11953,7 @@
           <a:bodyPr wrap="square" lIns="0" tIns="0" rIns="0" bIns="0" rtlCol="0" anchor="ctr"/>
           <a:lstStyle/>
           <a:p>
-            <a:pPr indent="0" marL="0">
+            <a:pPr marL="0" indent="0">
               <a:buNone/>
             </a:pPr>
             <a:r>
@@ -12348,7 +12017,7 @@
           <a:bodyPr wrap="square" lIns="0" tIns="0" rIns="0" bIns="0" rtlCol="0" anchor="ctr"/>
           <a:lstStyle/>
           <a:p>
-            <a:pPr indent="0" marL="0">
+            <a:pPr marL="0" indent="0">
               <a:buNone/>
             </a:pPr>
             <a:r>
@@ -12412,7 +12081,7 @@
           <a:bodyPr wrap="square" lIns="0" tIns="0" rIns="0" bIns="0" rtlCol="0" anchor="ctr"/>
           <a:lstStyle/>
           <a:p>
-            <a:pPr indent="0" marL="0">
+            <a:pPr marL="0" indent="0">
               <a:buNone/>
             </a:pPr>
             <a:r>
@@ -12451,7 +12120,7 @@
           <a:bodyPr wrap="square" lIns="0" tIns="0" rIns="0" bIns="0" rtlCol="0" anchor="ctr"/>
           <a:lstStyle/>
           <a:p>
-            <a:pPr indent="0" marL="0">
+            <a:pPr marL="0" indent="0">
               <a:buNone/>
             </a:pPr>
             <a:r>
@@ -12515,7 +12184,7 @@
           <a:bodyPr wrap="square" lIns="0" tIns="0" rIns="0" bIns="0" rtlCol="0" anchor="ctr"/>
           <a:lstStyle/>
           <a:p>
-            <a:pPr indent="0" marL="0">
+            <a:pPr marL="0" indent="0">
               <a:buNone/>
             </a:pPr>
             <a:r>
@@ -12529,9 +12198,6 @@
               </a:rPr>
               <a:t>🎯 </a:t>
             </a:r>
-            <a:pPr indent="0" marL="0">
-              <a:buNone/>
-            </a:pPr>
             <a:r>
               <a:rPr lang="en-US" sz="1100" dirty="0">
                 <a:solidFill>
@@ -12543,9 +12209,6 @@
               </a:rPr>
               <a:t>プロジェクトの </a:t>
             </a:r>
-            <a:pPr indent="0" marL="0">
-              <a:buNone/>
-            </a:pPr>
             <a:r>
               <a:rPr lang="en-US" sz="1100" b="1" dirty="0">
                 <a:solidFill>
@@ -12557,9 +12220,6 @@
               </a:rPr>
               <a:t>.claude/settings.json</a:t>
             </a:r>
-            <a:pPr indent="0" marL="0">
-              <a:buNone/>
-            </a:pPr>
             <a:r>
               <a:rPr lang="en-US" sz="1100" dirty="0">
                 <a:solidFill>
@@ -12876,4 +12536,319 @@
     </a:ext>
   </a:extLst>
 </a:theme>
+</file>
+
+<file path=ppt/theme/theme2.xml><?xml version="1.0" encoding="utf-8"?>
+<a:theme xmlns:a="http://schemas.openxmlformats.org/drawingml/2006/main" name="Office テーマ">
+  <a:themeElements>
+    <a:clrScheme name="Office">
+      <a:dk1>
+        <a:sysClr val="windowText" lastClr="000000"/>
+      </a:dk1>
+      <a:lt1>
+        <a:sysClr val="window" lastClr="FFFFFF"/>
+      </a:lt1>
+      <a:dk2>
+        <a:srgbClr val="0E2841"/>
+      </a:dk2>
+      <a:lt2>
+        <a:srgbClr val="E8E8E8"/>
+      </a:lt2>
+      <a:accent1>
+        <a:srgbClr val="156082"/>
+      </a:accent1>
+      <a:accent2>
+        <a:srgbClr val="E97132"/>
+      </a:accent2>
+      <a:accent3>
+        <a:srgbClr val="196B24"/>
+      </a:accent3>
+      <a:accent4>
+        <a:srgbClr val="0F9ED5"/>
+      </a:accent4>
+      <a:accent5>
+        <a:srgbClr val="A02B93"/>
+      </a:accent5>
+      <a:accent6>
+        <a:srgbClr val="4EA72E"/>
+      </a:accent6>
+      <a:hlink>
+        <a:srgbClr val="467886"/>
+      </a:hlink>
+      <a:folHlink>
+        <a:srgbClr val="96607D"/>
+      </a:folHlink>
+    </a:clrScheme>
+    <a:fontScheme name="Office">
+      <a:majorFont>
+        <a:latin typeface="游ゴシック Light" panose="02110004020202020204"/>
+        <a:ea typeface=""/>
+        <a:cs typeface=""/>
+        <a:font script="Jpan" typeface="游ゴシック Light"/>
+        <a:font script="Hang" typeface="맑은 고딕"/>
+        <a:font script="Hans" typeface="等线 Light"/>
+        <a:font script="Hant" typeface="新細明體"/>
+        <a:font script="Arab" typeface="Times New Roman"/>
+        <a:font script="Hebr" typeface="Times New Roman"/>
+        <a:font script="Thai" typeface="Angsana New"/>
+        <a:font script="Ethi" typeface="Nyala"/>
+        <a:font script="Beng" typeface="Vrinda"/>
+        <a:font script="Gujr" typeface="Shruti"/>
+        <a:font script="Khmr" typeface="MoolBoran"/>
+        <a:font script="Knda" typeface="Tunga"/>
+        <a:font script="Guru" typeface="Raavi"/>
+        <a:font script="Cans" typeface="Euphemia"/>
+        <a:font script="Cher" typeface="Plantagenet Cherokee"/>
+        <a:font script="Yiii" typeface="Microsoft Yi Baiti"/>
+        <a:font script="Tibt" typeface="Microsoft Himalaya"/>
+        <a:font script="Thaa" typeface="MV Boli"/>
+        <a:font script="Deva" typeface="Mangal"/>
+        <a:font script="Telu" typeface="Gautami"/>
+        <a:font script="Taml" typeface="Latha"/>
+        <a:font script="Syrc" typeface="Estrangelo Edessa"/>
+        <a:font script="Orya" typeface="Kalinga"/>
+        <a:font script="Mlym" typeface="Kartika"/>
+        <a:font script="Laoo" typeface="DokChampa"/>
+        <a:font script="Sinh" typeface="Iskoola Pota"/>
+        <a:font script="Mong" typeface="Mongolian Baiti"/>
+        <a:font script="Viet" typeface="Times New Roman"/>
+        <a:font script="Uigh" typeface="Microsoft Uighur"/>
+        <a:font script="Geor" typeface="Sylfaen"/>
+        <a:font script="Armn" typeface="Arial"/>
+        <a:font script="Bugi" typeface="Leelawadee UI"/>
+        <a:font script="Bopo" typeface="Microsoft JhengHei"/>
+        <a:font script="Java" typeface="Javanese Text"/>
+        <a:font script="Lisu" typeface="Segoe UI"/>
+        <a:font script="Mymr" typeface="Myanmar Text"/>
+        <a:font script="Nkoo" typeface="Ebrima"/>
+        <a:font script="Olck" typeface="Nirmala UI"/>
+        <a:font script="Osma" typeface="Ebrima"/>
+        <a:font script="Phag" typeface="Phagspa"/>
+        <a:font script="Syrn" typeface="Estrangelo Edessa"/>
+        <a:font script="Syrj" typeface="Estrangelo Edessa"/>
+        <a:font script="Syre" typeface="Estrangelo Edessa"/>
+        <a:font script="Sora" typeface="Nirmala UI"/>
+        <a:font script="Tale" typeface="Microsoft Tai Le"/>
+        <a:font script="Talu" typeface="Microsoft New Tai Lue"/>
+        <a:font script="Tfng" typeface="Ebrima"/>
+      </a:majorFont>
+      <a:minorFont>
+        <a:latin typeface="游ゴシック" panose="02110004020202020204"/>
+        <a:ea typeface=""/>
+        <a:cs typeface=""/>
+        <a:font script="Jpan" typeface="游ゴシック"/>
+        <a:font script="Hang" typeface="맑은 고딕"/>
+        <a:font script="Hans" typeface="等线"/>
+        <a:font script="Hant" typeface="新細明體"/>
+        <a:font script="Arab" typeface="Arial"/>
+        <a:font script="Hebr" typeface="Arial"/>
+        <a:font script="Thai" typeface="Cordia New"/>
+        <a:font script="Ethi" typeface="Nyala"/>
+        <a:font script="Beng" typeface="Vrinda"/>
+        <a:font script="Gujr" typeface="Shruti"/>
+        <a:font script="Khmr" typeface="DaunPenh"/>
+        <a:font script="Knda" typeface="Tunga"/>
+        <a:font script="Guru" typeface="Raavi"/>
+        <a:font script="Cans" typeface="Euphemia"/>
+        <a:font script="Cher" typeface="Plantagenet Cherokee"/>
+        <a:font script="Yiii" typeface="Microsoft Yi Baiti"/>
+        <a:font script="Tibt" typeface="Microsoft Himalaya"/>
+        <a:font script="Thaa" typeface="MV Boli"/>
+        <a:font script="Deva" typeface="Mangal"/>
+        <a:font script="Telu" typeface="Gautami"/>
+        <a:font script="Taml" typeface="Latha"/>
+        <a:font script="Syrc" typeface="Estrangelo Edessa"/>
+        <a:font script="Orya" typeface="Kalinga"/>
+        <a:font script="Mlym" typeface="Kartika"/>
+        <a:font script="Laoo" typeface="DokChampa"/>
+        <a:font script="Sinh" typeface="Iskoola Pota"/>
+        <a:font script="Mong" typeface="Mongolian Baiti"/>
+        <a:font script="Viet" typeface="Arial"/>
+        <a:font script="Uigh" typeface="Microsoft Uighur"/>
+        <a:font script="Geor" typeface="Sylfaen"/>
+        <a:font script="Armn" typeface="Arial"/>
+        <a:font script="Bugi" typeface="Leelawadee UI"/>
+        <a:font script="Bopo" typeface="Microsoft JhengHei"/>
+        <a:font script="Java" typeface="Javanese Text"/>
+        <a:font script="Lisu" typeface="Segoe UI"/>
+        <a:font script="Mymr" typeface="Myanmar Text"/>
+        <a:font script="Nkoo" typeface="Ebrima"/>
+        <a:font script="Olck" typeface="Nirmala UI"/>
+        <a:font script="Osma" typeface="Ebrima"/>
+        <a:font script="Phag" typeface="Phagspa"/>
+        <a:font script="Syrn" typeface="Estrangelo Edessa"/>
+        <a:font script="Syrj" typeface="Estrangelo Edessa"/>
+        <a:font script="Syre" typeface="Estrangelo Edessa"/>
+        <a:font script="Sora" typeface="Nirmala UI"/>
+        <a:font script="Tale" typeface="Microsoft Tai Le"/>
+        <a:font script="Talu" typeface="Microsoft New Tai Lue"/>
+        <a:font script="Tfng" typeface="Ebrima"/>
+      </a:minorFont>
+    </a:fontScheme>
+    <a:fmtScheme name="Office">
+      <a:fillStyleLst>
+        <a:solidFill>
+          <a:schemeClr val="phClr"/>
+        </a:solidFill>
+        <a:gradFill rotWithShape="1">
+          <a:gsLst>
+            <a:gs pos="0">
+              <a:schemeClr val="phClr">
+                <a:lumMod val="110000"/>
+                <a:satMod val="105000"/>
+                <a:tint val="67000"/>
+              </a:schemeClr>
+            </a:gs>
+            <a:gs pos="50000">
+              <a:schemeClr val="phClr">
+                <a:lumMod val="105000"/>
+                <a:satMod val="103000"/>
+                <a:tint val="73000"/>
+              </a:schemeClr>
+            </a:gs>
+            <a:gs pos="100000">
+              <a:schemeClr val="phClr">
+                <a:lumMod val="105000"/>
+                <a:satMod val="109000"/>
+                <a:tint val="81000"/>
+              </a:schemeClr>
+            </a:gs>
+          </a:gsLst>
+          <a:lin ang="5400000" scaled="0"/>
+        </a:gradFill>
+        <a:gradFill rotWithShape="1">
+          <a:gsLst>
+            <a:gs pos="0">
+              <a:schemeClr val="phClr">
+                <a:satMod val="103000"/>
+                <a:lumMod val="102000"/>
+                <a:tint val="94000"/>
+              </a:schemeClr>
+            </a:gs>
+            <a:gs pos="50000">
+              <a:schemeClr val="phClr">
+                <a:satMod val="110000"/>
+                <a:lumMod val="100000"/>
+                <a:shade val="100000"/>
+              </a:schemeClr>
+            </a:gs>
+            <a:gs pos="100000">
+              <a:schemeClr val="phClr">
+                <a:lumMod val="99000"/>
+                <a:satMod val="120000"/>
+                <a:shade val="78000"/>
+              </a:schemeClr>
+            </a:gs>
+          </a:gsLst>
+          <a:lin ang="5400000" scaled="0"/>
+        </a:gradFill>
+      </a:fillStyleLst>
+      <a:lnStyleLst>
+        <a:ln w="12700" cap="flat" cmpd="sng" algn="ctr">
+          <a:solidFill>
+            <a:schemeClr val="phClr"/>
+          </a:solidFill>
+          <a:prstDash val="solid"/>
+          <a:miter lim="800000"/>
+        </a:ln>
+        <a:ln w="19050" cap="flat" cmpd="sng" algn="ctr">
+          <a:solidFill>
+            <a:schemeClr val="phClr"/>
+          </a:solidFill>
+          <a:prstDash val="solid"/>
+          <a:miter lim="800000"/>
+        </a:ln>
+        <a:ln w="25400" cap="flat" cmpd="sng" algn="ctr">
+          <a:solidFill>
+            <a:schemeClr val="phClr"/>
+          </a:solidFill>
+          <a:prstDash val="solid"/>
+          <a:miter lim="800000"/>
+        </a:ln>
+      </a:lnStyleLst>
+      <a:effectStyleLst>
+        <a:effectStyle>
+          <a:effectLst/>
+        </a:effectStyle>
+        <a:effectStyle>
+          <a:effectLst/>
+        </a:effectStyle>
+        <a:effectStyle>
+          <a:effectLst>
+            <a:outerShdw blurRad="57150" dist="19050" dir="5400000" algn="ctr" rotWithShape="0">
+              <a:srgbClr val="000000">
+                <a:alpha val="63000"/>
+              </a:srgbClr>
+            </a:outerShdw>
+          </a:effectLst>
+        </a:effectStyle>
+      </a:effectStyleLst>
+      <a:bgFillStyleLst>
+        <a:solidFill>
+          <a:schemeClr val="phClr"/>
+        </a:solidFill>
+        <a:solidFill>
+          <a:schemeClr val="phClr">
+            <a:tint val="95000"/>
+            <a:satMod val="170000"/>
+          </a:schemeClr>
+        </a:solidFill>
+        <a:gradFill rotWithShape="1">
+          <a:gsLst>
+            <a:gs pos="0">
+              <a:schemeClr val="phClr">
+                <a:tint val="93000"/>
+                <a:satMod val="150000"/>
+                <a:shade val="98000"/>
+                <a:lumMod val="102000"/>
+              </a:schemeClr>
+            </a:gs>
+            <a:gs pos="50000">
+              <a:schemeClr val="phClr">
+                <a:tint val="98000"/>
+                <a:satMod val="130000"/>
+                <a:shade val="90000"/>
+                <a:lumMod val="103000"/>
+              </a:schemeClr>
+            </a:gs>
+            <a:gs pos="100000">
+              <a:schemeClr val="phClr">
+                <a:shade val="63000"/>
+                <a:satMod val="120000"/>
+              </a:schemeClr>
+            </a:gs>
+          </a:gsLst>
+          <a:lin ang="5400000" scaled="0"/>
+        </a:gradFill>
+      </a:bgFillStyleLst>
+    </a:fmtScheme>
+  </a:themeElements>
+  <a:objectDefaults>
+    <a:lnDef>
+      <a:spPr/>
+      <a:bodyPr/>
+      <a:lstStyle/>
+      <a:style>
+        <a:lnRef idx="2">
+          <a:schemeClr val="accent1"/>
+        </a:lnRef>
+        <a:fillRef idx="0">
+          <a:schemeClr val="accent1"/>
+        </a:fillRef>
+        <a:effectRef idx="1">
+          <a:schemeClr val="accent1"/>
+        </a:effectRef>
+        <a:fontRef idx="minor">
+          <a:schemeClr val="tx1"/>
+        </a:fontRef>
+      </a:style>
+    </a:lnDef>
+  </a:objectDefaults>
+  <a:extraClrSchemeLst/>
+  <a:extLst>
+    <a:ext uri="{05A4C25C-085E-4340-85A3-A5531E510DB2}">
+      <thm15:themeFamily xmlns:thm15="http://schemas.microsoft.com/office/thememl/2012/main" name="Office Theme" id="{2E142A2C-CD16-42D6-873A-C26D2A0506FA}" vid="{1BDDFF52-6CD6-40A5-AB3C-68EB2F1E4D0A}"/>
+    </a:ext>
+  </a:extLst>
+</a:theme>
 </file>
--- a/session3/session3_full.pptx
+++ b/session3/session3_full.pptx
@@ -9,13 +9,13 @@
   </p:notesMasterIdLst>
   <p:sldIdLst>
     <p:sldId id="256" r:id="rId2"/>
+    <p:sldId id="268" r:id="rId19"/>
     <p:sldId id="257" r:id="rId3"/>
-    <p:sldId id="258" r:id="rId4"/>
+    <p:sldId id="263" r:id="rId9"/>
     <p:sldId id="259" r:id="rId5"/>
     <p:sldId id="260" r:id="rId6"/>
     <p:sldId id="261" r:id="rId7"/>
     <p:sldId id="262" r:id="rId8"/>
-    <p:sldId id="263" r:id="rId9"/>
     <p:sldId id="264" r:id="rId10"/>
     <p:sldId id="265" r:id="rId11"/>
     <p:sldId id="266" r:id="rId12"/>
@@ -650,90 +650,6 @@
             <a:fld id="{F7021451-1387-4CA6-816F-3879F97B5CBC}" type="slidenum">
               <a:rPr lang="en-US"/>
               <a:t>2</a:t>
-            </a:fld>
-            <a:endParaRPr lang="en-US"/>
-          </a:p>
-        </p:txBody>
-      </p:sp>
-    </p:spTree>
-    <p:extLst>
-      <p:ext uri="{BB962C8B-B14F-4D97-AF65-F5344CB8AC3E}">
-        <p14:creationId xmlns:p14="http://schemas.microsoft.com/office/powerpoint/2010/main" val="1024086991"/>
-      </p:ext>
-    </p:extLst>
-  </p:cSld>
-  <p:clrMapOvr>
-    <a:masterClrMapping/>
-  </p:clrMapOvr>
-</p:notes>
-</file>
-
-<file path=ppt/notesSlides/notesSlide3.xml><?xml version="1.0" encoding="utf-8"?>
-<p:notes xmlns:a="http://schemas.openxmlformats.org/drawingml/2006/main" xmlns:r="http://schemas.openxmlformats.org/officeDocument/2006/relationships" xmlns:p="http://schemas.openxmlformats.org/presentationml/2006/main">
-  <p:cSld>
-    <p:spTree>
-      <p:nvGrpSpPr>
-        <p:cNvPr id="1" name=""/>
-        <p:cNvGrpSpPr/>
-        <p:nvPr/>
-      </p:nvGrpSpPr>
-      <p:grpSpPr>
-        <a:xfrm>
-          <a:off x="0" y="0"/>
-          <a:ext cx="0" cy="0"/>
-          <a:chOff x="0" y="0"/>
-          <a:chExt cx="0" cy="0"/>
-        </a:xfrm>
-      </p:grpSpPr>
-      <p:sp>
-        <p:nvSpPr>
-          <p:cNvPr id="2" name="Slide Image Placeholder 1"/>
-          <p:cNvSpPr>
-            <a:spLocks noGrp="1" noRot="1" noChangeAspect="1"/>
-          </p:cNvSpPr>
-          <p:nvPr>
-            <p:ph type="sldImg"/>
-          </p:nvPr>
-        </p:nvSpPr>
-        <p:spPr/>
-      </p:sp>
-      <p:sp>
-        <p:nvSpPr>
-          <p:cNvPr id="3" name="Notes Placeholder 2"/>
-          <p:cNvSpPr>
-            <a:spLocks noGrp="1"/>
-          </p:cNvSpPr>
-          <p:nvPr>
-            <p:ph type="body" idx="1"/>
-          </p:nvPr>
-        </p:nvSpPr>
-        <p:spPr/>
-        <p:txBody>
-          <a:bodyPr/>
-          <a:lstStyle/>
-          <a:p>
-            <a:endParaRPr lang="en-US" dirty="0"/>
-          </a:p>
-        </p:txBody>
-      </p:sp>
-      <p:sp>
-        <p:nvSpPr>
-          <p:cNvPr id="4" name="Slide Number Placeholder 3"/>
-          <p:cNvSpPr>
-            <a:spLocks noGrp="1"/>
-          </p:cNvSpPr>
-          <p:nvPr>
-            <p:ph type="sldNum" sz="quarter" idx="10"/>
-          </p:nvPr>
-        </p:nvSpPr>
-        <p:spPr/>
-        <p:txBody>
-          <a:bodyPr/>
-          <a:lstStyle/>
-          <a:p>
-            <a:fld id="{F7021451-1387-4CA6-816F-3879F97B5CBC}" type="slidenum">
-              <a:rPr lang="en-US"/>
-              <a:t>3</a:t>
             </a:fld>
             <a:endParaRPr lang="en-US"/>
           </a:p>
@@ -1760,6 +1676,10 @@
             <a:prstDash val="solid"/>
           </a:ln>
         </p:spPr>
+        <p:txBody>
+          <a:bodyPr/>
+          <a:p/>
+        </p:txBody>
       </p:sp>
       <p:sp>
         <p:nvSpPr>
@@ -1923,6 +1843,39 @@
               <a:t>　晃司</a:t>
             </a:r>
             <a:endParaRPr lang="en-US" sz="1100" dirty="0"/>
+          </a:p>
+        </p:txBody>
+      </p:sp>
+      <p:sp>
+        <p:nvSpPr>
+          <p:cNvPr id="11" name="TextBox 10"/>
+          <p:cNvSpPr txBox="1"/>
+          <p:nvPr/>
+        </p:nvSpPr>
+        <p:spPr>
+          <a:xfrm>
+            <a:off x="457200" y="4280000"/>
+            <a:ext cx="8229600" cy="290000"/>
+          </a:xfrm>
+          <a:prstGeom prst="rect">
+            <a:avLst/>
+          </a:prstGeom>
+          <a:noFill/>
+        </p:spPr>
+        <p:txBody>
+          <a:bodyPr wrap="square" lIns="0" rIns="0" tIns="0" bIns="0">
+            <a:spAutoFit/>
+          </a:bodyPr>
+          <a:lstStyle/>
+          <a:p>
+            <a:r>
+              <a:rPr sz="1500" b="1">
+                <a:solidFill>
+                  <a:srgbClr val="FFC800"/>
+                </a:solidFill>
+              </a:rPr>
+              <a:t>★ 覚えて帰る一言: 「settings.json 1ファイルをコピーする」</a:t>
+            </a:r>
           </a:p>
         </p:txBody>
       </p:sp>
@@ -2943,6 +2896,10 @@
             <a:prstDash val="solid"/>
           </a:ln>
         </p:spPr>
+        <p:txBody>
+          <a:bodyPr/>
+          <a:p/>
+        </p:txBody>
       </p:sp>
       <p:sp>
         <p:nvSpPr>
@@ -2964,6 +2921,21 @@
         <p:txBody>
           <a:bodyPr wrap="square" lIns="0" tIns="0" rIns="0" bIns="0" rtlCol="0" anchor="t"/>
           <a:lstStyle/>
+          <a:p>
+            <a:pPr algn="ctr"/>
+            <a:r>
+              <a:rPr lang="ja-JP" sz="2200" b="1">
+                <a:solidFill>
+                  <a:srgbClr val="FFC800"/>
+                </a:solidFill>
+                <a:latin typeface="+mj-lt"/>
+              </a:rPr>
+              <a:t>★ 「settings.json 1ファイルをコピーする」</a:t>
+            </a:r>
+          </a:p>
+          <a:p>
+            <a:endParaRPr lang="ja-JP" sz="800"/>
+          </a:p>
           <a:p>
             <a:pPr marL="0" indent="0">
               <a:spcAft>
@@ -3127,6 +3099,10 @@
             <a:prstDash val="solid"/>
           </a:ln>
         </p:spPr>
+        <p:txBody>
+          <a:bodyPr/>
+          <a:p/>
+        </p:txBody>
       </p:sp>
       <p:sp>
         <p:nvSpPr>
@@ -3191,6 +3167,10 @@
             <a:prstDash val="solid"/>
           </a:ln>
         </p:spPr>
+        <p:txBody>
+          <a:bodyPr/>
+          <a:p/>
+        </p:txBody>
       </p:sp>
       <p:sp>
         <p:nvSpPr>
@@ -3255,6 +3235,10 @@
             <a:prstDash val="solid"/>
           </a:ln>
         </p:spPr>
+        <p:txBody>
+          <a:bodyPr/>
+          <a:p/>
+        </p:txBody>
       </p:sp>
       <p:sp>
         <p:nvSpPr>
@@ -3319,6 +3303,10 @@
             <a:prstDash val="solid"/>
           </a:ln>
         </p:spPr>
+        <p:txBody>
+          <a:bodyPr/>
+          <a:p/>
+        </p:txBody>
       </p:sp>
       <p:sp>
         <p:nvSpPr>
@@ -3383,6 +3371,10 @@
             <a:prstDash val="solid"/>
           </a:ln>
         </p:spPr>
+        <p:txBody>
+          <a:bodyPr/>
+          <a:p/>
+        </p:txBody>
       </p:sp>
       <p:sp>
         <p:nvSpPr>
@@ -3420,6 +3412,39 @@
               <a:t>統合 settings.json をプロジェクトにコピーする準備ができた</a:t>
             </a:r>
             <a:endParaRPr lang="en-US" sz="1100" dirty="0"/>
+          </a:p>
+        </p:txBody>
+      </p:sp>
+      <p:sp>
+        <p:nvSpPr>
+          <p:cNvPr id="16" name="TextBox 15"/>
+          <p:cNvSpPr txBox="1"/>
+          <p:nvPr/>
+        </p:nvSpPr>
+        <p:spPr>
+          <a:xfrm>
+            <a:off x="457200" y="4900000"/>
+            <a:ext cx="8229600" cy="220000"/>
+          </a:xfrm>
+          <a:prstGeom prst="rect">
+            <a:avLst/>
+          </a:prstGeom>
+          <a:noFill/>
+        </p:spPr>
+        <p:txBody>
+          <a:bodyPr wrap="square" lIns="0" rIns="0" tIns="0" bIns="0">
+            <a:spAutoFit/>
+          </a:bodyPr>
+          <a:lstStyle/>
+          <a:p>
+            <a:r>
+              <a:rPr sz="1100" b="1">
+                <a:solidFill>
+                  <a:srgbClr val="FFC800"/>
+                </a:solidFill>
+              </a:rPr>
+              <a:t>3原則の現在地：  01 分ける ✅    02 防ぐ 🎯    03 残す ⏳</a:t>
+            </a:r>
           </a:p>
         </p:txBody>
       </p:sp>
@@ -4077,6 +4102,264 @@
 </file>
 
 <file path=ppt/slides/slide2.xml><?xml version="1.0" encoding="utf-8"?>
+<p:sld xmlns:a="http://schemas.openxmlformats.org/drawingml/2006/main" xmlns:p="http://schemas.openxmlformats.org/presentationml/2006/main" xmlns:r="http://schemas.openxmlformats.org/officeDocument/2006/relationships">
+  <p:cSld>
+    <p:bg>
+      <p:bgPr>
+        <a:solidFill>
+          <a:srgbClr val="FFFFFF"/>
+        </a:solidFill>
+        <a:effectLst/>
+      </p:bgPr>
+    </p:bg>
+    <p:spTree>
+      <p:nvGrpSpPr>
+        <p:cNvPr id="1" name=""/>
+        <p:cNvGrpSpPr/>
+        <p:nvPr/>
+      </p:nvGrpSpPr>
+      <p:grpSpPr/>
+      <p:sp>
+        <p:nvSpPr>
+          <p:cNvPr id="2" name="TextBox 1"/>
+          <p:cNvSpPr txBox="1"/>
+          <p:nvPr/>
+        </p:nvSpPr>
+        <p:spPr>
+          <a:xfrm>
+            <a:off x="457200" y="320040"/>
+            <a:ext cx="8229600" cy="548640"/>
+          </a:xfrm>
+          <a:prstGeom prst="rect">
+            <a:avLst/>
+          </a:prstGeom>
+          <a:noFill/>
+        </p:spPr>
+        <p:txBody>
+          <a:bodyPr wrap="square" lIns="0" rIns="0" tIns="0" bIns="0">
+            <a:spAutoFit/>
+          </a:bodyPr>
+          <a:lstStyle/>
+          <a:p>
+            <a:r>
+              <a:rPr sz="2600" b="1" i="0">
+                <a:solidFill>
+                  <a:srgbClr val="1E2761"/>
+                </a:solidFill>
+              </a:rPr>
+              <a:t>今日の用語ミニ辞典 ― 迷ったらここに戻る</a:t>
+            </a:r>
+          </a:p>
+        </p:txBody>
+      </p:sp>
+      <p:sp>
+        <p:nvSpPr>
+          <p:cNvPr id="3" name="TextBox 2"/>
+          <p:cNvSpPr txBox="1"/>
+          <p:nvPr/>
+        </p:nvSpPr>
+        <p:spPr>
+          <a:xfrm>
+            <a:off x="457200" y="960000"/>
+            <a:ext cx="8229600" cy="330000"/>
+          </a:xfrm>
+          <a:prstGeom prst="rect">
+            <a:avLst/>
+          </a:prstGeom>
+          <a:noFill/>
+        </p:spPr>
+        <p:txBody>
+          <a:bodyPr wrap="square" lIns="0" rIns="0" tIns="0" bIns="0">
+            <a:spAutoFit/>
+          </a:bodyPr>
+          <a:lstStyle/>
+          <a:p>
+            <a:r>
+              <a:rPr sz="1300" b="0" i="1">
+                <a:solidFill>
+                  <a:srgbClr val="64748B"/>
+                </a:solidFill>
+              </a:rPr>
+              <a:t>今日のスライドで初めて出てくるカタカナ語を1行で説明</a:t>
+            </a:r>
+          </a:p>
+        </p:txBody>
+      </p:sp>
+      <p:sp>
+        <p:nvSpPr>
+          <p:cNvPr id="4" name="TextBox 3"/>
+          <p:cNvSpPr txBox="1"/>
+          <p:nvPr/>
+        </p:nvSpPr>
+        <p:spPr>
+          <a:xfrm>
+            <a:off x="457200" y="1450000"/>
+            <a:ext cx="8229600" cy="3500000"/>
+          </a:xfrm>
+          <a:prstGeom prst="rect">
+            <a:avLst/>
+          </a:prstGeom>
+          <a:noFill/>
+        </p:spPr>
+        <p:txBody>
+          <a:bodyPr wrap="square" lIns="0" rIns="0" tIns="0" bIns="0">
+            <a:spAutoFit/>
+          </a:bodyPr>
+          <a:lstStyle/>
+          <a:p>
+            <a:r>
+              <a:rPr sz="1600" b="1">
+                <a:solidFill>
+                  <a:srgbClr val="1E2761"/>
+                </a:solidFill>
+              </a:rPr>
+              <a:t>●  CLAUDE.md</a:t>
+            </a:r>
+            <a:r>
+              <a:rPr sz="1400" b="0">
+                <a:solidFill>
+                  <a:srgbClr val="2D3748"/>
+                </a:solidFill>
+              </a:rPr>
+              <a:t>　＝　エージェントへの「行動指針」を書いた地図（助言的）</a:t>
+            </a:r>
+          </a:p>
+          <a:p>
+            <a:pPr>
+              <a:spcBef>
+                <a:spcPts val="800"/>
+              </a:spcBef>
+            </a:pPr>
+            <a:r>
+              <a:rPr sz="1600" b="1">
+                <a:solidFill>
+                  <a:srgbClr val="1E2761"/>
+                </a:solidFill>
+              </a:rPr>
+              <a:t>●  Permission</a:t>
+            </a:r>
+            <a:r>
+              <a:rPr sz="1400" b="0">
+                <a:solidFill>
+                  <a:srgbClr val="2D3748"/>
+                </a:solidFill>
+              </a:rPr>
+              <a:t>　＝　ツール実行を許す/禁じるルール（Claude Codeが解釈）</a:t>
+            </a:r>
+          </a:p>
+          <a:p>
+            <a:pPr>
+              <a:spcBef>
+                <a:spcPts val="800"/>
+              </a:spcBef>
+            </a:pPr>
+            <a:r>
+              <a:rPr sz="1600" b="1">
+                <a:solidFill>
+                  <a:srgbClr val="1E2761"/>
+                </a:solidFill>
+              </a:rPr>
+              <a:t>●  Sandbox</a:t>
+            </a:r>
+            <a:r>
+              <a:rPr sz="1400" b="0">
+                <a:solidFill>
+                  <a:srgbClr val="2D3748"/>
+                </a:solidFill>
+              </a:rPr>
+              <a:t>　＝　OSレベルで強制する壁（決定的）</a:t>
+            </a:r>
+          </a:p>
+          <a:p>
+            <a:pPr>
+              <a:spcBef>
+                <a:spcPts val="800"/>
+              </a:spcBef>
+            </a:pPr>
+            <a:r>
+              <a:rPr sz="1600" b="1">
+                <a:solidFill>
+                  <a:srgbClr val="1E2761"/>
+                </a:solidFill>
+              </a:rPr>
+              <a:t>●  Hooks</a:t>
+            </a:r>
+            <a:r>
+              <a:rPr sz="1400" b="0">
+                <a:solidFill>
+                  <a:srgbClr val="2D3748"/>
+                </a:solidFill>
+              </a:rPr>
+              <a:t>　＝　ツール実行前後に呼ばれる関数（決定的・100%ブロック）</a:t>
+            </a:r>
+          </a:p>
+          <a:p>
+            <a:pPr>
+              <a:spcBef>
+                <a:spcPts val="800"/>
+              </a:spcBef>
+            </a:pPr>
+            <a:r>
+              <a:rPr sz="1600" b="1">
+                <a:solidFill>
+                  <a:srgbClr val="1E2761"/>
+                </a:solidFill>
+              </a:rPr>
+              <a:t>●  Bypass</a:t>
+            </a:r>
+            <a:r>
+              <a:rPr sz="1400" b="0">
+                <a:solidFill>
+                  <a:srgbClr val="2D3748"/>
+                </a:solidFill>
+              </a:rPr>
+              <a:t>　＝　全確認を飛ばすモード（事故源・基本は避ける）</a:t>
+            </a:r>
+          </a:p>
+        </p:txBody>
+      </p:sp>
+      <p:sp>
+        <p:nvSpPr>
+          <p:cNvPr id="5" name="TextBox 4"/>
+          <p:cNvSpPr txBox="1"/>
+          <p:nvPr/>
+        </p:nvSpPr>
+        <p:spPr>
+          <a:xfrm>
+            <a:off x="457200" y="4828032"/>
+            <a:ext cx="8229600" cy="228600"/>
+          </a:xfrm>
+          <a:prstGeom prst="rect">
+            <a:avLst/>
+          </a:prstGeom>
+          <a:noFill/>
+        </p:spPr>
+        <p:txBody>
+          <a:bodyPr wrap="square" lIns="0" rIns="0" tIns="0" bIns="0">
+            <a:spAutoFit/>
+          </a:bodyPr>
+          <a:lstStyle/>
+          <a:p>
+            <a:r>
+              <a:rPr sz="1000" b="0" i="1">
+                <a:solidFill>
+                  <a:srgbClr val="64748B"/>
+                </a:solidFill>
+              </a:rPr>
+              <a:t>★ 用語が分からなくなったらここへ戻ってください</a:t>
+            </a:r>
+          </a:p>
+        </p:txBody>
+      </p:sp>
+    </p:spTree>
+  </p:cSld>
+  <p:clrMapOvr>
+    <a:masterClrMapping/>
+  </p:clrMapOvr>
+</p:sld>
+</file>
+
+<file path=ppt/slides/slide3.xml><?xml version="1.0" encoding="utf-8"?>
 <p:sld xmlns:a="http://schemas.openxmlformats.org/drawingml/2006/main" xmlns:r="http://schemas.openxmlformats.org/officeDocument/2006/relationships" xmlns:p="http://schemas.openxmlformats.org/presentationml/2006/main">
   <p:cSld name="Slide 2">
     <p:bg>
@@ -4808,9 +5091,9 @@
 </p:sld>
 </file>
 
-<file path=ppt/slides/slide3.xml><?xml version="1.0" encoding="utf-8"?>
+<file path=ppt/slides/slide4.xml><?xml version="1.0" encoding="utf-8"?>
 <p:sld xmlns:a="http://schemas.openxmlformats.org/drawingml/2006/main" xmlns:r="http://schemas.openxmlformats.org/officeDocument/2006/relationships" xmlns:p="http://schemas.openxmlformats.org/presentationml/2006/main">
-  <p:cSld name="Slide 3">
+  <p:cSld name="Slide 8">
     <p:bg>
       <p:bgPr>
         <a:solidFill>
@@ -4858,7 +5141,7 @@
               <a:buNone/>
             </a:pPr>
             <a:r>
-              <a:rPr lang="en-US" sz="2200" b="1" dirty="0">
+              <a:rPr lang="en-US" sz="2600" b="1" dirty="0">
                 <a:solidFill>
                   <a:srgbClr val="1E2761"/>
                 </a:solidFill>
@@ -4866,9 +5149,9 @@
                 <a:ea typeface="Arial Black" pitchFamily="34" charset="-122"/>
                 <a:cs typeface="Arial Black" pitchFamily="34" charset="-120"/>
               </a:rPr>
-              <a:t>settings.json で「防ぐ」― 4つの防御レイヤー</a:t>
-            </a:r>
-            <a:endParaRPr lang="en-US" sz="2200" dirty="0"/>
+              <a:t>指示の追従性 ― 4つの階段</a:t>
+            </a:r>
+            <a:endParaRPr lang="en-US" sz="2600" dirty="0"/>
           </a:p>
         </p:txBody>
       </p:sp>
@@ -4930,7 +5213,7 @@
                 <a:ea typeface="Meiryo" pitchFamily="34" charset="-122"/>
                 <a:cs typeface="Meiryo" pitchFamily="34" charset="-120"/>
               </a:rPr>
-              <a:t>Permission / Sandbox / Hooks / ネットワーク allowlist を1ファイルに統合</a:t>
+              <a:t>確実性が必要なルールほど、上の階段で実装する</a:t>
             </a:r>
             <a:endParaRPr lang="en-US" sz="1300" dirty="0"/>
           </a:p>
@@ -4944,8 +5227,214 @@
         </p:nvSpPr>
         <p:spPr>
           <a:xfrm>
-            <a:off x="457200" y="1417320"/>
-            <a:ext cx="2011680" cy="1463040"/>
+            <a:off x="457200" y="3749040"/>
+            <a:ext cx="8229600" cy="731520"/>
+          </a:xfrm>
+          <a:prstGeom prst="rect">
+            <a:avLst/>
+          </a:prstGeom>
+          <a:solidFill>
+            <a:srgbClr val="F8F9FC"/>
+          </a:solidFill>
+          <a:ln w="9525">
+            <a:solidFill>
+              <a:srgbClr val="E5E9F2"/>
+            </a:solidFill>
+            <a:prstDash val="solid"/>
+          </a:ln>
+        </p:spPr>
+      </p:sp>
+      <p:sp>
+        <p:nvSpPr>
+          <p:cNvPr id="6" name="Text 4"/>
+          <p:cNvSpPr/>
+          <p:nvPr/>
+        </p:nvSpPr>
+        <p:spPr>
+          <a:xfrm>
+            <a:off x="640080" y="3749040"/>
+            <a:ext cx="7863840" cy="365760"/>
+          </a:xfrm>
+          <a:prstGeom prst="rect">
+            <a:avLst/>
+          </a:prstGeom>
+          <a:noFill/>
+          <a:ln/>
+        </p:spPr>
+        <p:txBody>
+          <a:bodyPr wrap="square" lIns="0" tIns="0" rIns="0" bIns="0" rtlCol="0" anchor="b"/>
+          <a:lstStyle/>
+          <a:p>
+            <a:pPr marL="0" indent="0">
+              <a:buNone/>
+            </a:pPr>
+            <a:r>
+              <a:rPr lang="en-US" sz="1600" b="1" dirty="0">
+                <a:solidFill>
+                  <a:srgbClr val="64748B"/>
+                </a:solidFill>
+                <a:latin typeface="Arial Black" pitchFamily="34" charset="0"/>
+                <a:ea typeface="Arial Black" pitchFamily="34" charset="-122"/>
+                <a:cs typeface="Arial Black" pitchFamily="34" charset="-120"/>
+              </a:rPr>
+              <a:t>CLAUDE.md</a:t>
+            </a:r>
+            <a:endParaRPr lang="en-US" sz="1600" dirty="0"/>
+          </a:p>
+        </p:txBody>
+      </p:sp>
+      <p:sp>
+        <p:nvSpPr>
+          <p:cNvPr id="7" name="Text 5"/>
+          <p:cNvSpPr/>
+          <p:nvPr/>
+        </p:nvSpPr>
+        <p:spPr>
+          <a:xfrm>
+            <a:off x="640080" y="4114800"/>
+            <a:ext cx="7863840" cy="365760"/>
+          </a:xfrm>
+          <a:prstGeom prst="rect">
+            <a:avLst/>
+          </a:prstGeom>
+          <a:noFill/>
+          <a:ln/>
+        </p:spPr>
+        <p:txBody>
+          <a:bodyPr wrap="square" lIns="0" tIns="0" rIns="0" bIns="0" rtlCol="0" anchor="t"/>
+          <a:lstStyle/>
+          <a:p>
+            <a:pPr marL="0" indent="0">
+              <a:buNone/>
+            </a:pPr>
+            <a:r>
+              <a:rPr lang="en-US" sz="1000" dirty="0">
+                <a:solidFill>
+                  <a:srgbClr val="64748B"/>
+                </a:solidFill>
+                <a:latin typeface="Meiryo" pitchFamily="34" charset="0"/>
+                <a:ea typeface="Meiryo" pitchFamily="34" charset="-122"/>
+                <a:cs typeface="Meiryo" pitchFamily="34" charset="-120"/>
+              </a:rPr>
+              <a:t>助言的</a:t>
+            </a:r>
+            <a:endParaRPr lang="en-US" sz="1000" dirty="0"/>
+          </a:p>
+        </p:txBody>
+      </p:sp>
+      <p:sp>
+        <p:nvSpPr>
+          <p:cNvPr id="8" name="Shape 6"/>
+          <p:cNvSpPr/>
+          <p:nvPr/>
+        </p:nvSpPr>
+        <p:spPr>
+          <a:xfrm>
+            <a:off x="457200" y="2971800"/>
+            <a:ext cx="6400800" cy="731520"/>
+          </a:xfrm>
+          <a:prstGeom prst="rect">
+            <a:avLst/>
+          </a:prstGeom>
+          <a:solidFill>
+            <a:srgbClr val="CADCFC"/>
+          </a:solidFill>
+          <a:ln w="12700">
+            <a:solidFill>
+              <a:srgbClr val="CADCFC"/>
+            </a:solidFill>
+            <a:prstDash val="solid"/>
+          </a:ln>
+        </p:spPr>
+      </p:sp>
+      <p:sp>
+        <p:nvSpPr>
+          <p:cNvPr id="9" name="Text 7"/>
+          <p:cNvSpPr/>
+          <p:nvPr/>
+        </p:nvSpPr>
+        <p:spPr>
+          <a:xfrm>
+            <a:off x="640080" y="2971800"/>
+            <a:ext cx="6035040" cy="365760"/>
+          </a:xfrm>
+          <a:prstGeom prst="rect">
+            <a:avLst/>
+          </a:prstGeom>
+          <a:noFill/>
+          <a:ln/>
+        </p:spPr>
+        <p:txBody>
+          <a:bodyPr wrap="square" lIns="0" tIns="0" rIns="0" bIns="0" rtlCol="0" anchor="b"/>
+          <a:lstStyle/>
+          <a:p>
+            <a:pPr marL="0" indent="0">
+              <a:buNone/>
+            </a:pPr>
+            <a:r>
+              <a:rPr lang="en-US" sz="1600" b="1" dirty="0">
+                <a:solidFill>
+                  <a:srgbClr val="1E2761"/>
+                </a:solidFill>
+                <a:latin typeface="Arial Black" pitchFamily="34" charset="0"/>
+                <a:ea typeface="Arial Black" pitchFamily="34" charset="-122"/>
+                <a:cs typeface="Arial Black" pitchFamily="34" charset="-120"/>
+              </a:rPr>
+              <a:t>Permission Deny</a:t>
+            </a:r>
+            <a:endParaRPr lang="en-US" sz="1600" dirty="0"/>
+          </a:p>
+        </p:txBody>
+      </p:sp>
+      <p:sp>
+        <p:nvSpPr>
+          <p:cNvPr id="10" name="Text 8"/>
+          <p:cNvSpPr/>
+          <p:nvPr/>
+        </p:nvSpPr>
+        <p:spPr>
+          <a:xfrm>
+            <a:off x="640080" y="3337560"/>
+            <a:ext cx="6035040" cy="365760"/>
+          </a:xfrm>
+          <a:prstGeom prst="rect">
+            <a:avLst/>
+          </a:prstGeom>
+          <a:noFill/>
+          <a:ln/>
+        </p:spPr>
+        <p:txBody>
+          <a:bodyPr wrap="square" lIns="0" tIns="0" rIns="0" bIns="0" rtlCol="0" anchor="t"/>
+          <a:lstStyle/>
+          <a:p>
+            <a:pPr marL="0" indent="0">
+              <a:buNone/>
+            </a:pPr>
+            <a:r>
+              <a:rPr lang="en-US" sz="1000" dirty="0">
+                <a:solidFill>
+                  <a:srgbClr val="1E2761"/>
+                </a:solidFill>
+                <a:latin typeface="Meiryo" pitchFamily="34" charset="0"/>
+                <a:ea typeface="Meiryo" pitchFamily="34" charset="-122"/>
+                <a:cs typeface="Meiryo" pitchFamily="34" charset="-120"/>
+              </a:rPr>
+              <a:t>Claude Code が解釈</a:t>
+            </a:r>
+            <a:endParaRPr lang="en-US" sz="1000" dirty="0"/>
+          </a:p>
+        </p:txBody>
+      </p:sp>
+      <p:sp>
+        <p:nvSpPr>
+          <p:cNvPr id="11" name="Shape 9"/>
+          <p:cNvSpPr/>
+          <p:nvPr/>
+        </p:nvSpPr>
+        <p:spPr>
+          <a:xfrm>
+            <a:off x="457200" y="2194560"/>
+            <a:ext cx="4572000" cy="731520"/>
           </a:xfrm>
           <a:prstGeom prst="rect">
             <a:avLst/>
@@ -4963,30 +5452,30 @@
       </p:sp>
       <p:sp>
         <p:nvSpPr>
-          <p:cNvPr id="6" name="Text 4"/>
-          <p:cNvSpPr/>
-          <p:nvPr/>
-        </p:nvSpPr>
-        <p:spPr>
-          <a:xfrm>
-            <a:off x="457200" y="1508760"/>
-            <a:ext cx="2011680" cy="320040"/>
-          </a:xfrm>
-          <a:prstGeom prst="rect">
-            <a:avLst/>
-          </a:prstGeom>
-          <a:noFill/>
-          <a:ln/>
-        </p:spPr>
-        <p:txBody>
-          <a:bodyPr wrap="square" lIns="0" tIns="0" rIns="0" bIns="0" rtlCol="0" anchor="ctr"/>
-          <a:lstStyle/>
-          <a:p>
-            <a:pPr marL="0" indent="0" algn="ctr">
-              <a:buNone/>
-            </a:pPr>
-            <a:r>
-              <a:rPr lang="en-US" sz="1300" b="1" dirty="0">
+          <p:cNvPr id="12" name="Text 10"/>
+          <p:cNvSpPr/>
+          <p:nvPr/>
+        </p:nvSpPr>
+        <p:spPr>
+          <a:xfrm>
+            <a:off x="640080" y="2194560"/>
+            <a:ext cx="4206240" cy="365760"/>
+          </a:xfrm>
+          <a:prstGeom prst="rect">
+            <a:avLst/>
+          </a:prstGeom>
+          <a:noFill/>
+          <a:ln/>
+        </p:spPr>
+        <p:txBody>
+          <a:bodyPr wrap="square" lIns="0" tIns="0" rIns="0" bIns="0" rtlCol="0" anchor="b"/>
+          <a:lstStyle/>
+          <a:p>
+            <a:pPr marL="0" indent="0">
+              <a:buNone/>
+            </a:pPr>
+            <a:r>
+              <a:rPr lang="en-US" sz="1600" b="1" dirty="0">
                 <a:solidFill>
                   <a:srgbClr val="FFFFFF"/>
                 </a:solidFill>
@@ -4994,22 +5483,22 @@
                 <a:ea typeface="Arial Black" pitchFamily="34" charset="-122"/>
                 <a:cs typeface="Arial Black" pitchFamily="34" charset="-120"/>
               </a:rPr>
-              <a:t>Permission</a:t>
-            </a:r>
-            <a:endParaRPr lang="en-US" sz="1300" dirty="0"/>
-          </a:p>
-        </p:txBody>
-      </p:sp>
-      <p:sp>
-        <p:nvSpPr>
-          <p:cNvPr id="7" name="Text 5"/>
-          <p:cNvSpPr/>
-          <p:nvPr/>
-        </p:nvSpPr>
-        <p:spPr>
-          <a:xfrm>
-            <a:off x="594360" y="1874520"/>
-            <a:ext cx="1737360" cy="457200"/>
+              <a:t>Hooks</a:t>
+            </a:r>
+            <a:endParaRPr lang="en-US" sz="1600" dirty="0"/>
+          </a:p>
+        </p:txBody>
+      </p:sp>
+      <p:sp>
+        <p:nvSpPr>
+          <p:cNvPr id="13" name="Text 11"/>
+          <p:cNvSpPr/>
+          <p:nvPr/>
+        </p:nvSpPr>
+        <p:spPr>
+          <a:xfrm>
+            <a:off x="640080" y="2560320"/>
+            <a:ext cx="4206240" cy="365760"/>
           </a:xfrm>
           <a:prstGeom prst="rect">
             <a:avLst/>
@@ -5021,36 +5510,122 @@
           <a:bodyPr wrap="square" lIns="0" tIns="0" rIns="0" bIns="0" rtlCol="0" anchor="t"/>
           <a:lstStyle/>
           <a:p>
-            <a:pPr marL="0" indent="0" algn="ctr">
+            <a:pPr marL="0" indent="0">
               <a:buNone/>
             </a:pPr>
             <a:r>
               <a:rPr lang="en-US" sz="1000" dirty="0">
                 <a:solidFill>
-                  <a:srgbClr val="CADCFC"/>
-                </a:solidFill>
-                <a:latin typeface="Meiryo" pitchFamily="34" charset="0"/>
-                <a:ea typeface="Meiryo" pitchFamily="34" charset="-122"/>
-                <a:cs typeface="Meiryo" pitchFamily="34" charset="-120"/>
-              </a:rPr>
-              <a:t>Allow/Deny</a:t>
+                  <a:srgbClr val="FFFFFF"/>
+                </a:solidFill>
+                <a:latin typeface="Meiryo" pitchFamily="34" charset="0"/>
+                <a:ea typeface="Meiryo" pitchFamily="34" charset="-122"/>
+                <a:cs typeface="Meiryo" pitchFamily="34" charset="-120"/>
+              </a:rPr>
+              <a:t>決定的（exit 2 で100%ブロック）</a:t>
             </a:r>
             <a:endParaRPr lang="en-US" sz="1000" dirty="0"/>
           </a:p>
-          <a:p>
-            <a:pPr marL="0" indent="0" algn="ctr">
+        </p:txBody>
+      </p:sp>
+      <p:sp>
+        <p:nvSpPr>
+          <p:cNvPr id="14" name="Shape 12"/>
+          <p:cNvSpPr/>
+          <p:nvPr/>
+        </p:nvSpPr>
+        <p:spPr>
+          <a:xfrm>
+            <a:off x="457200" y="1417320"/>
+            <a:ext cx="3200400" cy="731520"/>
+          </a:xfrm>
+          <a:prstGeom prst="rect">
+            <a:avLst/>
+          </a:prstGeom>
+          <a:solidFill>
+            <a:srgbClr val="F96167"/>
+          </a:solidFill>
+          <a:ln w="12700">
+            <a:solidFill>
+              <a:srgbClr val="F96167"/>
+            </a:solidFill>
+            <a:prstDash val="solid"/>
+          </a:ln>
+        </p:spPr>
+      </p:sp>
+      <p:sp>
+        <p:nvSpPr>
+          <p:cNvPr id="15" name="Text 13"/>
+          <p:cNvSpPr/>
+          <p:nvPr/>
+        </p:nvSpPr>
+        <p:spPr>
+          <a:xfrm>
+            <a:off x="640080" y="1417320"/>
+            <a:ext cx="2834640" cy="365760"/>
+          </a:xfrm>
+          <a:prstGeom prst="rect">
+            <a:avLst/>
+          </a:prstGeom>
+          <a:noFill/>
+          <a:ln/>
+        </p:spPr>
+        <p:txBody>
+          <a:bodyPr wrap="square" lIns="0" tIns="0" rIns="0" bIns="0" rtlCol="0" anchor="b"/>
+          <a:lstStyle/>
+          <a:p>
+            <a:pPr marL="0" indent="0">
+              <a:buNone/>
+            </a:pPr>
+            <a:r>
+              <a:rPr lang="en-US" sz="1600" b="1" dirty="0">
+                <a:solidFill>
+                  <a:srgbClr val="FFFFFF"/>
+                </a:solidFill>
+                <a:latin typeface="Arial Black" pitchFamily="34" charset="0"/>
+                <a:ea typeface="Arial Black" pitchFamily="34" charset="-122"/>
+                <a:cs typeface="Arial Black" pitchFamily="34" charset="-120"/>
+              </a:rPr>
+              <a:t>Sandbox</a:t>
+            </a:r>
+            <a:endParaRPr lang="en-US" sz="1600" dirty="0"/>
+          </a:p>
+        </p:txBody>
+      </p:sp>
+      <p:sp>
+        <p:nvSpPr>
+          <p:cNvPr id="16" name="Text 14"/>
+          <p:cNvSpPr/>
+          <p:nvPr/>
+        </p:nvSpPr>
+        <p:spPr>
+          <a:xfrm>
+            <a:off x="640080" y="1783080"/>
+            <a:ext cx="2834640" cy="365760"/>
+          </a:xfrm>
+          <a:prstGeom prst="rect">
+            <a:avLst/>
+          </a:prstGeom>
+          <a:noFill/>
+          <a:ln/>
+        </p:spPr>
+        <p:txBody>
+          <a:bodyPr wrap="square" lIns="0" tIns="0" rIns="0" bIns="0" rtlCol="0" anchor="t"/>
+          <a:lstStyle/>
+          <a:p>
+            <a:pPr marL="0" indent="0">
               <a:buNone/>
             </a:pPr>
             <a:r>
               <a:rPr lang="en-US" sz="1000" dirty="0">
                 <a:solidFill>
-                  <a:srgbClr val="CADCFC"/>
-                </a:solidFill>
-                <a:latin typeface="Meiryo" pitchFamily="34" charset="0"/>
-                <a:ea typeface="Meiryo" pitchFamily="34" charset="-122"/>
-                <a:cs typeface="Meiryo" pitchFamily="34" charset="-120"/>
-              </a:rPr>
-              <a:t>で境界</a:t>
+                  <a:srgbClr val="FFFFFF"/>
+                </a:solidFill>
+                <a:latin typeface="Meiryo" pitchFamily="34" charset="0"/>
+                <a:ea typeface="Meiryo" pitchFamily="34" charset="-122"/>
+                <a:cs typeface="Meiryo" pitchFamily="34" charset="-120"/>
+              </a:rPr>
+              <a:t>OS/カーネルレベル強制</a:t>
             </a:r>
             <a:endParaRPr lang="en-US" sz="1000" dirty="0"/>
           </a:p>
@@ -5058,14 +5633,89 @@
       </p:sp>
       <p:sp>
         <p:nvSpPr>
-          <p:cNvPr id="8" name="Shape 6"/>
-          <p:cNvSpPr/>
-          <p:nvPr/>
-        </p:nvSpPr>
-        <p:spPr>
-          <a:xfrm>
-            <a:off x="594360" y="2377440"/>
-            <a:ext cx="1737360" cy="411480"/>
+          <p:cNvPr id="17" name="Shape 15"/>
+          <p:cNvSpPr/>
+          <p:nvPr/>
+        </p:nvSpPr>
+        <p:spPr>
+          <a:xfrm>
+            <a:off x="5029200" y="3108960"/>
+            <a:ext cx="3657600" cy="457200"/>
+          </a:xfrm>
+          <a:prstGeom prst="rect">
+            <a:avLst/>
+          </a:prstGeom>
+          <a:solidFill>
+            <a:srgbClr val="FDECEC"/>
+          </a:solidFill>
+          <a:ln w="9525">
+            <a:solidFill>
+              <a:srgbClr val="F96167"/>
+            </a:solidFill>
+            <a:prstDash val="solid"/>
+          </a:ln>
+        </p:spPr>
+      </p:sp>
+      <p:sp>
+        <p:nvSpPr>
+          <p:cNvPr id="18" name="Text 16"/>
+          <p:cNvSpPr/>
+          <p:nvPr/>
+        </p:nvSpPr>
+        <p:spPr>
+          <a:xfrm>
+            <a:off x="5120640" y="3108960"/>
+            <a:ext cx="3474720" cy="457200"/>
+          </a:xfrm>
+          <a:prstGeom prst="rect">
+            <a:avLst/>
+          </a:prstGeom>
+          <a:noFill/>
+          <a:ln/>
+        </p:spPr>
+        <p:txBody>
+          <a:bodyPr wrap="square" lIns="0" tIns="0" rIns="0" bIns="0" rtlCol="0" anchor="ctr"/>
+          <a:lstStyle/>
+          <a:p>
+            <a:pPr marL="0" indent="0">
+              <a:buNone/>
+            </a:pPr>
+            <a:r>
+              <a:rPr lang="en-US" dirty="0">
+                <a:solidFill>
+                  <a:srgbClr val="F96167"/>
+                </a:solidFill>
+                <a:latin typeface="Meiryo" pitchFamily="34" charset="0"/>
+                <a:ea typeface="Meiryo" pitchFamily="34" charset="-122"/>
+                <a:cs typeface="Meiryo" pitchFamily="34" charset="-120"/>
+              </a:rPr>
+              <a:t>⚠ </a:t>
+            </a:r>
+            <a:r>
+              <a:rPr lang="en-US" sz="1000" b="1" dirty="0">
+                <a:solidFill>
+                  <a:srgbClr val="F96167"/>
+                </a:solidFill>
+                <a:latin typeface="Meiryo" pitchFamily="34" charset="0"/>
+                <a:ea typeface="Meiryo" pitchFamily="34" charset="-122"/>
+                <a:cs typeface="Meiryo" pitchFamily="34" charset="-120"/>
+              </a:rPr>
+              <a:t>Sandbox なしだと Bash はここを突破する</a:t>
+            </a:r>
+            <a:endParaRPr lang="en-US" sz="1000" dirty="0"/>
+          </a:p>
+        </p:txBody>
+      </p:sp>
+      <p:sp>
+        <p:nvSpPr>
+          <p:cNvPr id="19" name="Shape 17"/>
+          <p:cNvSpPr/>
+          <p:nvPr/>
+        </p:nvSpPr>
+        <p:spPr>
+          <a:xfrm>
+            <a:off x="457200" y="4572000"/>
+            <a:ext cx="8229600" cy="365760"/>
           </a:xfrm>
           <a:prstGeom prst="rect">
             <a:avLst/>
@@ -5083,14 +5733,14 @@
       </p:sp>
       <p:sp>
         <p:nvSpPr>
-          <p:cNvPr id="9" name="Text 7"/>
-          <p:cNvSpPr/>
-          <p:nvPr/>
-        </p:nvSpPr>
-        <p:spPr>
-          <a:xfrm>
-            <a:off x="594360" y="2377440"/>
-            <a:ext cx="1737360" cy="411480"/>
+          <p:cNvPr id="20" name="Text 18"/>
+          <p:cNvSpPr/>
+          <p:nvPr/>
+        </p:nvSpPr>
+        <p:spPr>
+          <a:xfrm>
+            <a:off x="594360" y="4572000"/>
+            <a:ext cx="7955280" cy="365760"/>
           </a:xfrm>
           <a:prstGeom prst="rect">
             <a:avLst/>
@@ -5102,131 +5752,22 @@
           <a:bodyPr wrap="square" lIns="0" tIns="0" rIns="0" bIns="0" rtlCol="0" anchor="ctr"/>
           <a:lstStyle/>
           <a:p>
-            <a:pPr marL="0" indent="0" algn="ctr">
-              <a:buNone/>
-            </a:pPr>
-            <a:r>
-              <a:rPr lang="en-US" sz="1000" b="1" dirty="0">
-                <a:solidFill>
-                  <a:srgbClr val="F96167"/>
-                </a:solidFill>
-                <a:latin typeface="Meiryo" pitchFamily="34" charset="0"/>
-                <a:ea typeface="Meiryo" pitchFamily="34" charset="-122"/>
-                <a:cs typeface="Meiryo" pitchFamily="34" charset="-120"/>
-              </a:rPr>
-              <a:t>Claude Code</a:t>
-            </a:r>
-            <a:endParaRPr lang="en-US" sz="1000" dirty="0"/>
-          </a:p>
-          <a:p>
-            <a:pPr marL="0" indent="0" algn="ctr">
-              <a:buNone/>
-            </a:pPr>
-            <a:r>
-              <a:rPr lang="en-US" sz="1000" b="1" dirty="0">
-                <a:solidFill>
-                  <a:srgbClr val="F96167"/>
-                </a:solidFill>
-                <a:latin typeface="Meiryo" pitchFamily="34" charset="0"/>
-                <a:ea typeface="Meiryo" pitchFamily="34" charset="-122"/>
-                <a:cs typeface="Meiryo" pitchFamily="34" charset="-120"/>
-              </a:rPr>
-              <a:t>が解釈</a:t>
-            </a:r>
-            <a:endParaRPr lang="en-US" sz="1000" dirty="0"/>
-          </a:p>
-        </p:txBody>
-      </p:sp>
-      <p:sp>
-        <p:nvSpPr>
-          <p:cNvPr id="10" name="Shape 8"/>
-          <p:cNvSpPr/>
-          <p:nvPr/>
-        </p:nvSpPr>
-        <p:spPr>
-          <a:xfrm>
-            <a:off x="2560320" y="1417320"/>
-            <a:ext cx="2011680" cy="1463040"/>
-          </a:xfrm>
-          <a:prstGeom prst="rect">
-            <a:avLst/>
-          </a:prstGeom>
-          <a:solidFill>
-            <a:srgbClr val="1E2761"/>
-          </a:solidFill>
-          <a:ln w="12700">
-            <a:solidFill>
-              <a:srgbClr val="1E2761"/>
-            </a:solidFill>
-            <a:prstDash val="solid"/>
-          </a:ln>
-        </p:spPr>
-      </p:sp>
-      <p:sp>
-        <p:nvSpPr>
-          <p:cNvPr id="11" name="Text 9"/>
-          <p:cNvSpPr/>
-          <p:nvPr/>
-        </p:nvSpPr>
-        <p:spPr>
-          <a:xfrm>
-            <a:off x="2560320" y="1508760"/>
-            <a:ext cx="2011680" cy="320040"/>
-          </a:xfrm>
-          <a:prstGeom prst="rect">
-            <a:avLst/>
-          </a:prstGeom>
-          <a:noFill/>
-          <a:ln/>
-        </p:spPr>
-        <p:txBody>
-          <a:bodyPr wrap="square" lIns="0" tIns="0" rIns="0" bIns="0" rtlCol="0" anchor="ctr"/>
-          <a:lstStyle/>
-          <a:p>
-            <a:pPr marL="0" indent="0" algn="ctr">
-              <a:buNone/>
-            </a:pPr>
-            <a:r>
-              <a:rPr lang="en-US" sz="1300" b="1" dirty="0">
+            <a:pPr marL="0" indent="0">
+              <a:buNone/>
+            </a:pPr>
+            <a:r>
+              <a:rPr lang="en-US" sz="1200" dirty="0">
                 <a:solidFill>
                   <a:srgbClr val="FFFFFF"/>
                 </a:solidFill>
-                <a:latin typeface="Arial Black" pitchFamily="34" charset="0"/>
-                <a:ea typeface="Arial Black" pitchFamily="34" charset="-122"/>
-                <a:cs typeface="Arial Black" pitchFamily="34" charset="-120"/>
-              </a:rPr>
-              <a:t>Sandbox</a:t>
-            </a:r>
-            <a:endParaRPr lang="en-US" sz="1300" dirty="0"/>
-          </a:p>
-        </p:txBody>
-      </p:sp>
-      <p:sp>
-        <p:nvSpPr>
-          <p:cNvPr id="12" name="Text 10"/>
-          <p:cNvSpPr/>
-          <p:nvPr/>
-        </p:nvSpPr>
-        <p:spPr>
-          <a:xfrm>
-            <a:off x="2697480" y="1874520"/>
-            <a:ext cx="1737360" cy="457200"/>
-          </a:xfrm>
-          <a:prstGeom prst="rect">
-            <a:avLst/>
-          </a:prstGeom>
-          <a:noFill/>
-          <a:ln/>
-        </p:spPr>
-        <p:txBody>
-          <a:bodyPr wrap="square" lIns="0" tIns="0" rIns="0" bIns="0" rtlCol="0" anchor="t"/>
-          <a:lstStyle/>
-          <a:p>
-            <a:pPr marL="0" indent="0" algn="ctr">
-              <a:buNone/>
-            </a:pPr>
-            <a:r>
-              <a:rPr lang="en-US" sz="1000" dirty="0">
+                <a:latin typeface="Meiryo" pitchFamily="34" charset="0"/>
+                <a:ea typeface="Meiryo" pitchFamily="34" charset="-122"/>
+                <a:cs typeface="Meiryo" pitchFamily="34" charset="-120"/>
+              </a:rPr>
+              <a:t>💡 </a:t>
+            </a:r>
+            <a:r>
+              <a:rPr lang="en-US" sz="1100" dirty="0">
                 <a:solidFill>
                   <a:srgbClr val="CADCFC"/>
                 </a:solidFill>
@@ -5234,1113 +5775,26 @@
                 <a:ea typeface="Meiryo" pitchFamily="34" charset="-122"/>
                 <a:cs typeface="Meiryo" pitchFamily="34" charset="-120"/>
               </a:rPr>
-              <a:t>ファイル+NW</a:t>
-            </a:r>
-            <a:endParaRPr lang="en-US" sz="1000" dirty="0"/>
-          </a:p>
-          <a:p>
-            <a:pPr marL="0" indent="0" algn="ctr">
-              <a:buNone/>
-            </a:pPr>
-            <a:r>
-              <a:rPr lang="en-US" sz="1000" dirty="0">
-                <a:solidFill>
-                  <a:srgbClr val="CADCFC"/>
-                </a:solidFill>
-                <a:latin typeface="Meiryo" pitchFamily="34" charset="0"/>
-                <a:ea typeface="Meiryo" pitchFamily="34" charset="-122"/>
-                <a:cs typeface="Meiryo" pitchFamily="34" charset="-120"/>
-              </a:rPr>
-              <a:t>分離</a:t>
-            </a:r>
-            <a:endParaRPr lang="en-US" sz="1000" dirty="0"/>
-          </a:p>
-        </p:txBody>
-      </p:sp>
-      <p:sp>
-        <p:nvSpPr>
-          <p:cNvPr id="13" name="Shape 11"/>
-          <p:cNvSpPr/>
-          <p:nvPr/>
-        </p:nvSpPr>
-        <p:spPr>
-          <a:xfrm>
-            <a:off x="2697480" y="2377440"/>
-            <a:ext cx="1737360" cy="411480"/>
-          </a:xfrm>
-          <a:prstGeom prst="rect">
-            <a:avLst/>
-          </a:prstGeom>
-          <a:solidFill>
-            <a:srgbClr val="151B47"/>
-          </a:solidFill>
-          <a:ln w="12700">
-            <a:solidFill>
-              <a:srgbClr val="151B47"/>
-            </a:solidFill>
-            <a:prstDash val="solid"/>
-          </a:ln>
-        </p:spPr>
-      </p:sp>
-      <p:sp>
-        <p:nvSpPr>
-          <p:cNvPr id="14" name="Text 12"/>
-          <p:cNvSpPr/>
-          <p:nvPr/>
-        </p:nvSpPr>
-        <p:spPr>
-          <a:xfrm>
-            <a:off x="2697480" y="2377440"/>
-            <a:ext cx="1737360" cy="411480"/>
-          </a:xfrm>
-          <a:prstGeom prst="rect">
-            <a:avLst/>
-          </a:prstGeom>
-          <a:noFill/>
-          <a:ln/>
-        </p:spPr>
-        <p:txBody>
-          <a:bodyPr wrap="square" lIns="0" tIns="0" rIns="0" bIns="0" rtlCol="0" anchor="ctr"/>
-          <a:lstStyle/>
-          <a:p>
-            <a:pPr marL="0" indent="0" algn="ctr">
-              <a:buNone/>
-            </a:pPr>
-            <a:r>
-              <a:rPr lang="en-US" sz="1000" b="1" dirty="0">
-                <a:solidFill>
-                  <a:srgbClr val="F96167"/>
-                </a:solidFill>
-                <a:latin typeface="Meiryo" pitchFamily="34" charset="0"/>
-                <a:ea typeface="Meiryo" pitchFamily="34" charset="-122"/>
-                <a:cs typeface="Meiryo" pitchFamily="34" charset="-120"/>
-              </a:rPr>
-              <a:t>OS レベル</a:t>
-            </a:r>
-            <a:endParaRPr lang="en-US" sz="1000" dirty="0"/>
-          </a:p>
-          <a:p>
-            <a:pPr marL="0" indent="0" algn="ctr">
-              <a:buNone/>
-            </a:pPr>
-            <a:r>
-              <a:rPr lang="en-US" sz="1000" b="1" dirty="0">
-                <a:solidFill>
-                  <a:srgbClr val="F96167"/>
-                </a:solidFill>
-                <a:latin typeface="Meiryo" pitchFamily="34" charset="0"/>
-                <a:ea typeface="Meiryo" pitchFamily="34" charset="-122"/>
-                <a:cs typeface="Meiryo" pitchFamily="34" charset="-120"/>
-              </a:rPr>
-              <a:t>強制</a:t>
-            </a:r>
-            <a:endParaRPr lang="en-US" sz="1000" dirty="0"/>
-          </a:p>
-        </p:txBody>
-      </p:sp>
-      <p:sp>
-        <p:nvSpPr>
-          <p:cNvPr id="15" name="Shape 13"/>
-          <p:cNvSpPr/>
-          <p:nvPr/>
-        </p:nvSpPr>
-        <p:spPr>
-          <a:xfrm>
-            <a:off x="4663440" y="1417320"/>
-            <a:ext cx="2011680" cy="1463040"/>
-          </a:xfrm>
-          <a:prstGeom prst="rect">
-            <a:avLst/>
-          </a:prstGeom>
-          <a:solidFill>
-            <a:srgbClr val="1E2761"/>
-          </a:solidFill>
-          <a:ln w="12700">
-            <a:solidFill>
-              <a:srgbClr val="1E2761"/>
-            </a:solidFill>
-            <a:prstDash val="solid"/>
-          </a:ln>
-        </p:spPr>
-      </p:sp>
-      <p:sp>
-        <p:nvSpPr>
-          <p:cNvPr id="16" name="Text 14"/>
-          <p:cNvSpPr/>
-          <p:nvPr/>
-        </p:nvSpPr>
-        <p:spPr>
-          <a:xfrm>
-            <a:off x="4663440" y="1508760"/>
-            <a:ext cx="2011680" cy="320040"/>
-          </a:xfrm>
-          <a:prstGeom prst="rect">
-            <a:avLst/>
-          </a:prstGeom>
-          <a:noFill/>
-          <a:ln/>
-        </p:spPr>
-        <p:txBody>
-          <a:bodyPr wrap="square" lIns="0" tIns="0" rIns="0" bIns="0" rtlCol="0" anchor="ctr"/>
-          <a:lstStyle/>
-          <a:p>
-            <a:pPr marL="0" indent="0" algn="ctr">
-              <a:buNone/>
-            </a:pPr>
-            <a:r>
-              <a:rPr lang="en-US" sz="1300" b="1" dirty="0">
+              <a:t>コーディング規約 → CLAUDE.md / ツール使い方 → Skills（第4回）/ </a:t>
+            </a:r>
+            <a:r>
+              <a:rPr lang="en-US" sz="1100" b="1" dirty="0">
                 <a:solidFill>
                   <a:srgbClr val="FFFFFF"/>
                 </a:solidFill>
-                <a:latin typeface="Arial Black" pitchFamily="34" charset="0"/>
-                <a:ea typeface="Arial Black" pitchFamily="34" charset="-122"/>
-                <a:cs typeface="Arial Black" pitchFamily="34" charset="-120"/>
-              </a:rPr>
-              <a:t>Hooks</a:t>
-            </a:r>
-            <a:endParaRPr lang="en-US" sz="1300" dirty="0"/>
-          </a:p>
-        </p:txBody>
-      </p:sp>
-      <p:sp>
-        <p:nvSpPr>
-          <p:cNvPr id="17" name="Text 15"/>
-          <p:cNvSpPr/>
-          <p:nvPr/>
-        </p:nvSpPr>
-        <p:spPr>
-          <a:xfrm>
-            <a:off x="4800600" y="1874520"/>
-            <a:ext cx="1737360" cy="457200"/>
-          </a:xfrm>
-          <a:prstGeom prst="rect">
-            <a:avLst/>
-          </a:prstGeom>
-          <a:noFill/>
-          <a:ln/>
-        </p:spPr>
-        <p:txBody>
-          <a:bodyPr wrap="square" lIns="0" tIns="0" rIns="0" bIns="0" rtlCol="0" anchor="t"/>
-          <a:lstStyle/>
-          <a:p>
-            <a:pPr marL="0" indent="0" algn="ctr">
-              <a:buNone/>
-            </a:pPr>
-            <a:r>
-              <a:rPr lang="en-US" sz="1000" dirty="0">
-                <a:solidFill>
-                  <a:srgbClr val="CADCFC"/>
-                </a:solidFill>
-                <a:latin typeface="Meiryo" pitchFamily="34" charset="0"/>
-                <a:ea typeface="Meiryo" pitchFamily="34" charset="-122"/>
-                <a:cs typeface="Meiryo" pitchFamily="34" charset="-120"/>
-              </a:rPr>
-              <a:t>ライフサイクル</a:t>
-            </a:r>
-            <a:endParaRPr lang="en-US" sz="1000" dirty="0"/>
-          </a:p>
-          <a:p>
-            <a:pPr marL="0" indent="0" algn="ctr">
-              <a:buNone/>
-            </a:pPr>
-            <a:r>
-              <a:rPr lang="en-US" sz="1000" dirty="0">
-                <a:solidFill>
-                  <a:srgbClr val="CADCFC"/>
-                </a:solidFill>
-                <a:latin typeface="Meiryo" pitchFamily="34" charset="0"/>
-                <a:ea typeface="Meiryo" pitchFamily="34" charset="-122"/>
-                <a:cs typeface="Meiryo" pitchFamily="34" charset="-120"/>
-              </a:rPr>
-              <a:t>で強制</a:t>
-            </a:r>
-            <a:endParaRPr lang="en-US" sz="1000" dirty="0"/>
-          </a:p>
-        </p:txBody>
-      </p:sp>
-      <p:sp>
-        <p:nvSpPr>
-          <p:cNvPr id="18" name="Shape 16"/>
-          <p:cNvSpPr/>
-          <p:nvPr/>
-        </p:nvSpPr>
-        <p:spPr>
-          <a:xfrm>
-            <a:off x="4800600" y="2377440"/>
-            <a:ext cx="1737360" cy="411480"/>
-          </a:xfrm>
-          <a:prstGeom prst="rect">
-            <a:avLst/>
-          </a:prstGeom>
-          <a:solidFill>
-            <a:srgbClr val="151B47"/>
-          </a:solidFill>
-          <a:ln w="12700">
-            <a:solidFill>
-              <a:srgbClr val="151B47"/>
-            </a:solidFill>
-            <a:prstDash val="solid"/>
-          </a:ln>
-        </p:spPr>
-      </p:sp>
-      <p:sp>
-        <p:nvSpPr>
-          <p:cNvPr id="19" name="Text 17"/>
-          <p:cNvSpPr/>
-          <p:nvPr/>
-        </p:nvSpPr>
-        <p:spPr>
-          <a:xfrm>
-            <a:off x="4800600" y="2377440"/>
-            <a:ext cx="1737360" cy="411480"/>
-          </a:xfrm>
-          <a:prstGeom prst="rect">
-            <a:avLst/>
-          </a:prstGeom>
-          <a:noFill/>
-          <a:ln/>
-        </p:spPr>
-        <p:txBody>
-          <a:bodyPr wrap="square" lIns="0" tIns="0" rIns="0" bIns="0" rtlCol="0" anchor="ctr"/>
-          <a:lstStyle/>
-          <a:p>
-            <a:pPr marL="0" indent="0" algn="ctr">
-              <a:buNone/>
-            </a:pPr>
-            <a:r>
-              <a:rPr lang="en-US" sz="1000" b="1" dirty="0">
-                <a:solidFill>
-                  <a:srgbClr val="F96167"/>
-                </a:solidFill>
-                <a:latin typeface="Meiryo" pitchFamily="34" charset="0"/>
-                <a:ea typeface="Meiryo" pitchFamily="34" charset="-122"/>
-                <a:cs typeface="Meiryo" pitchFamily="34" charset="-120"/>
-              </a:rPr>
-              <a:t>決定的</a:t>
-            </a:r>
-            <a:endParaRPr lang="en-US" sz="1000" dirty="0"/>
-          </a:p>
-          <a:p>
-            <a:pPr marL="0" indent="0" algn="ctr">
-              <a:buNone/>
-            </a:pPr>
-            <a:r>
-              <a:rPr lang="en-US" sz="1000" b="1" dirty="0">
-                <a:solidFill>
-                  <a:srgbClr val="F96167"/>
-                </a:solidFill>
-                <a:latin typeface="Meiryo" pitchFamily="34" charset="0"/>
-                <a:ea typeface="Meiryo" pitchFamily="34" charset="-122"/>
-                <a:cs typeface="Meiryo" pitchFamily="34" charset="-120"/>
-              </a:rPr>
-              <a:t>(100%)</a:t>
-            </a:r>
-            <a:endParaRPr lang="en-US" sz="1000" dirty="0"/>
-          </a:p>
-        </p:txBody>
-      </p:sp>
-      <p:sp>
-        <p:nvSpPr>
-          <p:cNvPr id="20" name="Shape 18"/>
-          <p:cNvSpPr/>
-          <p:nvPr/>
-        </p:nvSpPr>
-        <p:spPr>
-          <a:xfrm>
-            <a:off x="6766560" y="1417320"/>
-            <a:ext cx="2011680" cy="1463040"/>
-          </a:xfrm>
-          <a:prstGeom prst="rect">
-            <a:avLst/>
-          </a:prstGeom>
-          <a:solidFill>
-            <a:srgbClr val="1E2761"/>
-          </a:solidFill>
-          <a:ln w="12700">
-            <a:solidFill>
-              <a:srgbClr val="1E2761"/>
-            </a:solidFill>
-            <a:prstDash val="solid"/>
-          </a:ln>
-        </p:spPr>
+                <a:latin typeface="Meiryo" pitchFamily="34" charset="0"/>
+                <a:ea typeface="Meiryo" pitchFamily="34" charset="-122"/>
+                <a:cs typeface="Meiryo" pitchFamily="34" charset="-120"/>
+              </a:rPr>
+              <a:t>セキュリティ → Hooks + Sandbox</a:t>
+            </a:r>
+            <a:endParaRPr lang="en-US" sz="1100" dirty="0"/>
+          </a:p>
+        </p:txBody>
       </p:sp>
       <p:sp>
         <p:nvSpPr>
           <p:cNvPr id="21" name="Text 19"/>
-          <p:cNvSpPr/>
-          <p:nvPr/>
-        </p:nvSpPr>
-        <p:spPr>
-          <a:xfrm>
-            <a:off x="6766560" y="1508760"/>
-            <a:ext cx="2011680" cy="320040"/>
-          </a:xfrm>
-          <a:prstGeom prst="rect">
-            <a:avLst/>
-          </a:prstGeom>
-          <a:noFill/>
-          <a:ln/>
-        </p:spPr>
-        <p:txBody>
-          <a:bodyPr wrap="square" lIns="0" tIns="0" rIns="0" bIns="0" rtlCol="0" anchor="ctr"/>
-          <a:lstStyle/>
-          <a:p>
-            <a:pPr marL="0" indent="0" algn="ctr">
-              <a:buNone/>
-            </a:pPr>
-            <a:r>
-              <a:rPr lang="en-US" sz="1300" b="1" dirty="0">
-                <a:solidFill>
-                  <a:srgbClr val="FFFFFF"/>
-                </a:solidFill>
-                <a:latin typeface="Arial Black" pitchFamily="34" charset="0"/>
-                <a:ea typeface="Arial Black" pitchFamily="34" charset="-122"/>
-                <a:cs typeface="Arial Black" pitchFamily="34" charset="-120"/>
-              </a:rPr>
-              <a:t>NW allowlist</a:t>
-            </a:r>
-            <a:endParaRPr lang="en-US" sz="1300" dirty="0"/>
-          </a:p>
-        </p:txBody>
-      </p:sp>
-      <p:sp>
-        <p:nvSpPr>
-          <p:cNvPr id="22" name="Text 20"/>
-          <p:cNvSpPr/>
-          <p:nvPr/>
-        </p:nvSpPr>
-        <p:spPr>
-          <a:xfrm>
-            <a:off x="6903720" y="1874520"/>
-            <a:ext cx="1737360" cy="457200"/>
-          </a:xfrm>
-          <a:prstGeom prst="rect">
-            <a:avLst/>
-          </a:prstGeom>
-          <a:noFill/>
-          <a:ln/>
-        </p:spPr>
-        <p:txBody>
-          <a:bodyPr wrap="square" lIns="0" tIns="0" rIns="0" bIns="0" rtlCol="0" anchor="t"/>
-          <a:lstStyle/>
-          <a:p>
-            <a:pPr marL="0" indent="0" algn="ctr">
-              <a:buNone/>
-            </a:pPr>
-            <a:r>
-              <a:rPr lang="en-US" sz="1000" dirty="0">
-                <a:solidFill>
-                  <a:srgbClr val="CADCFC"/>
-                </a:solidFill>
-                <a:latin typeface="Meiryo" pitchFamily="34" charset="0"/>
-                <a:ea typeface="Meiryo" pitchFamily="34" charset="-122"/>
-                <a:cs typeface="Meiryo" pitchFamily="34" charset="-120"/>
-              </a:rPr>
-              <a:t>接続先を</a:t>
-            </a:r>
-            <a:endParaRPr lang="en-US" sz="1000" dirty="0"/>
-          </a:p>
-          <a:p>
-            <a:pPr marL="0" indent="0" algn="ctr">
-              <a:buNone/>
-            </a:pPr>
-            <a:r>
-              <a:rPr lang="en-US" sz="1000" dirty="0">
-                <a:solidFill>
-                  <a:srgbClr val="CADCFC"/>
-                </a:solidFill>
-                <a:latin typeface="Meiryo" pitchFamily="34" charset="0"/>
-                <a:ea typeface="Meiryo" pitchFamily="34" charset="-122"/>
-                <a:cs typeface="Meiryo" pitchFamily="34" charset="-120"/>
-              </a:rPr>
-              <a:t>限定</a:t>
-            </a:r>
-            <a:endParaRPr lang="en-US" sz="1000" dirty="0"/>
-          </a:p>
-        </p:txBody>
-      </p:sp>
-      <p:sp>
-        <p:nvSpPr>
-          <p:cNvPr id="23" name="Shape 21"/>
-          <p:cNvSpPr/>
-          <p:nvPr/>
-        </p:nvSpPr>
-        <p:spPr>
-          <a:xfrm>
-            <a:off x="6903720" y="2377440"/>
-            <a:ext cx="1737360" cy="411480"/>
-          </a:xfrm>
-          <a:prstGeom prst="rect">
-            <a:avLst/>
-          </a:prstGeom>
-          <a:solidFill>
-            <a:srgbClr val="151B47"/>
-          </a:solidFill>
-          <a:ln w="12700">
-            <a:solidFill>
-              <a:srgbClr val="151B47"/>
-            </a:solidFill>
-            <a:prstDash val="solid"/>
-          </a:ln>
-        </p:spPr>
-      </p:sp>
-      <p:sp>
-        <p:nvSpPr>
-          <p:cNvPr id="24" name="Text 22"/>
-          <p:cNvSpPr/>
-          <p:nvPr/>
-        </p:nvSpPr>
-        <p:spPr>
-          <a:xfrm>
-            <a:off x="6903720" y="2377440"/>
-            <a:ext cx="1737360" cy="411480"/>
-          </a:xfrm>
-          <a:prstGeom prst="rect">
-            <a:avLst/>
-          </a:prstGeom>
-          <a:noFill/>
-          <a:ln/>
-        </p:spPr>
-        <p:txBody>
-          <a:bodyPr wrap="square" lIns="0" tIns="0" rIns="0" bIns="0" rtlCol="0" anchor="ctr"/>
-          <a:lstStyle/>
-          <a:p>
-            <a:pPr marL="0" indent="0" algn="ctr">
-              <a:buNone/>
-            </a:pPr>
-            <a:r>
-              <a:rPr lang="en-US" sz="1000" b="1" dirty="0">
-                <a:solidFill>
-                  <a:srgbClr val="F96167"/>
-                </a:solidFill>
-                <a:latin typeface="Meiryo" pitchFamily="34" charset="0"/>
-                <a:ea typeface="Meiryo" pitchFamily="34" charset="-122"/>
-                <a:cs typeface="Meiryo" pitchFamily="34" charset="-120"/>
-              </a:rPr>
-              <a:t>OS レベル</a:t>
-            </a:r>
-            <a:endParaRPr lang="en-US" sz="1000" dirty="0"/>
-          </a:p>
-          <a:p>
-            <a:pPr marL="0" indent="0" algn="ctr">
-              <a:buNone/>
-            </a:pPr>
-            <a:r>
-              <a:rPr lang="en-US" sz="1000" b="1" dirty="0">
-                <a:solidFill>
-                  <a:srgbClr val="F96167"/>
-                </a:solidFill>
-                <a:latin typeface="Meiryo" pitchFamily="34" charset="0"/>
-                <a:ea typeface="Meiryo" pitchFamily="34" charset="-122"/>
-                <a:cs typeface="Meiryo" pitchFamily="34" charset="-120"/>
-              </a:rPr>
-              <a:t>強制</a:t>
-            </a:r>
-            <a:endParaRPr lang="en-US" sz="1000" dirty="0"/>
-          </a:p>
-        </p:txBody>
-      </p:sp>
-      <p:sp>
-        <p:nvSpPr>
-          <p:cNvPr id="25" name="Shape 23"/>
-          <p:cNvSpPr/>
-          <p:nvPr/>
-        </p:nvSpPr>
-        <p:spPr>
-          <a:xfrm>
-            <a:off x="457200" y="3063240"/>
-            <a:ext cx="2743200" cy="365760"/>
-          </a:xfrm>
-          <a:prstGeom prst="rect">
-            <a:avLst/>
-          </a:prstGeom>
-          <a:solidFill>
-            <a:srgbClr val="1E2761"/>
-          </a:solidFill>
-          <a:ln w="12700">
-            <a:solidFill>
-              <a:srgbClr val="1E2761"/>
-            </a:solidFill>
-            <a:prstDash val="solid"/>
-          </a:ln>
-        </p:spPr>
-      </p:sp>
-      <p:sp>
-        <p:nvSpPr>
-          <p:cNvPr id="26" name="Text 24"/>
-          <p:cNvSpPr/>
-          <p:nvPr/>
-        </p:nvSpPr>
-        <p:spPr>
-          <a:xfrm>
-            <a:off x="457200" y="3063240"/>
-            <a:ext cx="2743200" cy="365760"/>
-          </a:xfrm>
-          <a:prstGeom prst="rect">
-            <a:avLst/>
-          </a:prstGeom>
-          <a:noFill/>
-          <a:ln/>
-        </p:spPr>
-        <p:txBody>
-          <a:bodyPr wrap="square" lIns="0" tIns="0" rIns="0" bIns="0" rtlCol="0" anchor="ctr"/>
-          <a:lstStyle/>
-          <a:p>
-            <a:pPr marL="0" indent="0" algn="ctr">
-              <a:buNone/>
-            </a:pPr>
-            <a:r>
-              <a:rPr lang="en-US" sz="1100" b="1" dirty="0">
-                <a:solidFill>
-                  <a:srgbClr val="FFFFFF"/>
-                </a:solidFill>
-                <a:latin typeface="Meiryo" pitchFamily="34" charset="0"/>
-                <a:ea typeface="Meiryo" pitchFamily="34" charset="-122"/>
-                <a:cs typeface="Meiryo" pitchFamily="34" charset="-120"/>
-              </a:rPr>
-              <a:t>脅威カテゴリ</a:t>
-            </a:r>
-            <a:endParaRPr lang="en-US" sz="1100" dirty="0"/>
-          </a:p>
-        </p:txBody>
-      </p:sp>
-      <p:sp>
-        <p:nvSpPr>
-          <p:cNvPr id="27" name="Shape 25"/>
-          <p:cNvSpPr/>
-          <p:nvPr/>
-        </p:nvSpPr>
-        <p:spPr>
-          <a:xfrm>
-            <a:off x="3200400" y="3063240"/>
-            <a:ext cx="5486400" cy="365760"/>
-          </a:xfrm>
-          <a:prstGeom prst="rect">
-            <a:avLst/>
-          </a:prstGeom>
-          <a:solidFill>
-            <a:srgbClr val="1E2761"/>
-          </a:solidFill>
-          <a:ln w="12700">
-            <a:solidFill>
-              <a:srgbClr val="1E2761"/>
-            </a:solidFill>
-            <a:prstDash val="solid"/>
-          </a:ln>
-        </p:spPr>
-      </p:sp>
-      <p:sp>
-        <p:nvSpPr>
-          <p:cNvPr id="28" name="Text 26"/>
-          <p:cNvSpPr/>
-          <p:nvPr/>
-        </p:nvSpPr>
-        <p:spPr>
-          <a:xfrm>
-            <a:off x="3200400" y="3063240"/>
-            <a:ext cx="5486400" cy="365760"/>
-          </a:xfrm>
-          <a:prstGeom prst="rect">
-            <a:avLst/>
-          </a:prstGeom>
-          <a:noFill/>
-          <a:ln/>
-        </p:spPr>
-        <p:txBody>
-          <a:bodyPr wrap="square" lIns="0" tIns="0" rIns="0" bIns="0" rtlCol="0" anchor="ctr"/>
-          <a:lstStyle/>
-          <a:p>
-            <a:pPr marL="0" indent="0" algn="ctr">
-              <a:buNone/>
-            </a:pPr>
-            <a:r>
-              <a:rPr lang="en-US" sz="1100" b="1" dirty="0">
-                <a:solidFill>
-                  <a:srgbClr val="FFFFFF"/>
-                </a:solidFill>
-                <a:latin typeface="Meiryo" pitchFamily="34" charset="0"/>
-                <a:ea typeface="Meiryo" pitchFamily="34" charset="-122"/>
-                <a:cs typeface="Meiryo" pitchFamily="34" charset="-120"/>
-              </a:rPr>
-              <a:t>対応レイヤー</a:t>
-            </a:r>
-            <a:endParaRPr lang="en-US" sz="1100" dirty="0"/>
-          </a:p>
-        </p:txBody>
-      </p:sp>
-      <p:sp>
-        <p:nvSpPr>
-          <p:cNvPr id="29" name="Shape 27"/>
-          <p:cNvSpPr/>
-          <p:nvPr/>
-        </p:nvSpPr>
-        <p:spPr>
-          <a:xfrm>
-            <a:off x="457200" y="3429000"/>
-            <a:ext cx="2743200" cy="384048"/>
-          </a:xfrm>
-          <a:prstGeom prst="rect">
-            <a:avLst/>
-          </a:prstGeom>
-          <a:solidFill>
-            <a:srgbClr val="F8F9FC"/>
-          </a:solidFill>
-          <a:ln w="6350">
-            <a:solidFill>
-              <a:srgbClr val="E5E9F2"/>
-            </a:solidFill>
-            <a:prstDash val="solid"/>
-          </a:ln>
-        </p:spPr>
-      </p:sp>
-      <p:sp>
-        <p:nvSpPr>
-          <p:cNvPr id="30" name="Text 28"/>
-          <p:cNvSpPr/>
-          <p:nvPr/>
-        </p:nvSpPr>
-        <p:spPr>
-          <a:xfrm>
-            <a:off x="548640" y="3429000"/>
-            <a:ext cx="2560320" cy="384048"/>
-          </a:xfrm>
-          <a:prstGeom prst="rect">
-            <a:avLst/>
-          </a:prstGeom>
-          <a:noFill/>
-          <a:ln/>
-        </p:spPr>
-        <p:txBody>
-          <a:bodyPr wrap="square" lIns="0" tIns="0" rIns="0" bIns="0" rtlCol="0" anchor="ctr"/>
-          <a:lstStyle/>
-          <a:p>
-            <a:pPr marL="0" indent="0">
-              <a:buNone/>
-            </a:pPr>
-            <a:r>
-              <a:rPr lang="en-US" sz="1100" b="1" dirty="0">
-                <a:solidFill>
-                  <a:srgbClr val="2D3748"/>
-                </a:solidFill>
-                <a:latin typeface="Meiryo" pitchFamily="34" charset="0"/>
-                <a:ea typeface="Meiryo" pitchFamily="34" charset="-122"/>
-                <a:cs typeface="Meiryo" pitchFamily="34" charset="-120"/>
-              </a:rPr>
-              <a:t>入口（汚染を入れない）</a:t>
-            </a:r>
-            <a:endParaRPr lang="en-US" sz="1100" dirty="0"/>
-          </a:p>
-        </p:txBody>
-      </p:sp>
-      <p:sp>
-        <p:nvSpPr>
-          <p:cNvPr id="31" name="Shape 29"/>
-          <p:cNvSpPr/>
-          <p:nvPr/>
-        </p:nvSpPr>
-        <p:spPr>
-          <a:xfrm>
-            <a:off x="3200400" y="3429000"/>
-            <a:ext cx="5486400" cy="384048"/>
-          </a:xfrm>
-          <a:prstGeom prst="rect">
-            <a:avLst/>
-          </a:prstGeom>
-          <a:solidFill>
-            <a:srgbClr val="F8F9FC"/>
-          </a:solidFill>
-          <a:ln w="6350">
-            <a:solidFill>
-              <a:srgbClr val="E5E9F2"/>
-            </a:solidFill>
-            <a:prstDash val="solid"/>
-          </a:ln>
-        </p:spPr>
-      </p:sp>
-      <p:sp>
-        <p:nvSpPr>
-          <p:cNvPr id="32" name="Text 30"/>
-          <p:cNvSpPr/>
-          <p:nvPr/>
-        </p:nvSpPr>
-        <p:spPr>
-          <a:xfrm>
-            <a:off x="3291840" y="3429000"/>
-            <a:ext cx="5303520" cy="384048"/>
-          </a:xfrm>
-          <a:prstGeom prst="rect">
-            <a:avLst/>
-          </a:prstGeom>
-          <a:noFill/>
-          <a:ln/>
-        </p:spPr>
-        <p:txBody>
-          <a:bodyPr wrap="square" lIns="0" tIns="0" rIns="0" bIns="0" rtlCol="0" anchor="ctr"/>
-          <a:lstStyle/>
-          <a:p>
-            <a:pPr marL="0" indent="0">
-              <a:buNone/>
-            </a:pPr>
-            <a:r>
-              <a:rPr lang="en-US" sz="1100" dirty="0">
-                <a:solidFill>
-                  <a:srgbClr val="2D3748"/>
-                </a:solidFill>
-                <a:latin typeface="Meiryo" pitchFamily="34" charset="0"/>
-                <a:ea typeface="Meiryo" pitchFamily="34" charset="-122"/>
-                <a:cs typeface="Meiryo" pitchFamily="34" charset="-120"/>
-              </a:rPr>
-              <a:t>Permission Deny + Hooks PreToolUse</a:t>
-            </a:r>
-            <a:endParaRPr lang="en-US" sz="1100" dirty="0"/>
-          </a:p>
-        </p:txBody>
-      </p:sp>
-      <p:sp>
-        <p:nvSpPr>
-          <p:cNvPr id="33" name="Shape 31"/>
-          <p:cNvSpPr/>
-          <p:nvPr/>
-        </p:nvSpPr>
-        <p:spPr>
-          <a:xfrm>
-            <a:off x="457200" y="3813048"/>
-            <a:ext cx="2743200" cy="384048"/>
-          </a:xfrm>
-          <a:prstGeom prst="rect">
-            <a:avLst/>
-          </a:prstGeom>
-          <a:solidFill>
-            <a:srgbClr val="FFFFFF"/>
-          </a:solidFill>
-          <a:ln w="6350">
-            <a:solidFill>
-              <a:srgbClr val="E5E9F2"/>
-            </a:solidFill>
-            <a:prstDash val="solid"/>
-          </a:ln>
-        </p:spPr>
-      </p:sp>
-      <p:sp>
-        <p:nvSpPr>
-          <p:cNvPr id="34" name="Text 32"/>
-          <p:cNvSpPr/>
-          <p:nvPr/>
-        </p:nvSpPr>
-        <p:spPr>
-          <a:xfrm>
-            <a:off x="548640" y="3813048"/>
-            <a:ext cx="2560320" cy="384048"/>
-          </a:xfrm>
-          <a:prstGeom prst="rect">
-            <a:avLst/>
-          </a:prstGeom>
-          <a:noFill/>
-          <a:ln/>
-        </p:spPr>
-        <p:txBody>
-          <a:bodyPr wrap="square" lIns="0" tIns="0" rIns="0" bIns="0" rtlCol="0" anchor="ctr"/>
-          <a:lstStyle/>
-          <a:p>
-            <a:pPr marL="0" indent="0">
-              <a:buNone/>
-            </a:pPr>
-            <a:r>
-              <a:rPr lang="en-US" sz="1100" b="1" dirty="0">
-                <a:solidFill>
-                  <a:srgbClr val="2D3748"/>
-                </a:solidFill>
-                <a:latin typeface="Meiryo" pitchFamily="34" charset="0"/>
-                <a:ea typeface="Meiryo" pitchFamily="34" charset="-122"/>
-                <a:cs typeface="Meiryo" pitchFamily="34" charset="-120"/>
-              </a:rPr>
-              <a:t>出口（意図しない操作）</a:t>
-            </a:r>
-            <a:endParaRPr lang="en-US" sz="1100" dirty="0"/>
-          </a:p>
-        </p:txBody>
-      </p:sp>
-      <p:sp>
-        <p:nvSpPr>
-          <p:cNvPr id="35" name="Shape 33"/>
-          <p:cNvSpPr/>
-          <p:nvPr/>
-        </p:nvSpPr>
-        <p:spPr>
-          <a:xfrm>
-            <a:off x="3200400" y="3813048"/>
-            <a:ext cx="5486400" cy="384048"/>
-          </a:xfrm>
-          <a:prstGeom prst="rect">
-            <a:avLst/>
-          </a:prstGeom>
-          <a:solidFill>
-            <a:srgbClr val="FFFFFF"/>
-          </a:solidFill>
-          <a:ln w="6350">
-            <a:solidFill>
-              <a:srgbClr val="E5E9F2"/>
-            </a:solidFill>
-            <a:prstDash val="solid"/>
-          </a:ln>
-        </p:spPr>
-      </p:sp>
-      <p:sp>
-        <p:nvSpPr>
-          <p:cNvPr id="36" name="Text 34"/>
-          <p:cNvSpPr/>
-          <p:nvPr/>
-        </p:nvSpPr>
-        <p:spPr>
-          <a:xfrm>
-            <a:off x="3291840" y="3813048"/>
-            <a:ext cx="5303520" cy="384048"/>
-          </a:xfrm>
-          <a:prstGeom prst="rect">
-            <a:avLst/>
-          </a:prstGeom>
-          <a:noFill/>
-          <a:ln/>
-        </p:spPr>
-        <p:txBody>
-          <a:bodyPr wrap="square" lIns="0" tIns="0" rIns="0" bIns="0" rtlCol="0" anchor="ctr"/>
-          <a:lstStyle/>
-          <a:p>
-            <a:pPr marL="0" indent="0">
-              <a:buNone/>
-            </a:pPr>
-            <a:r>
-              <a:rPr lang="en-US" sz="1100" dirty="0">
-                <a:solidFill>
-                  <a:srgbClr val="2D3748"/>
-                </a:solidFill>
-                <a:latin typeface="Meiryo" pitchFamily="34" charset="0"/>
-                <a:ea typeface="Meiryo" pitchFamily="34" charset="-122"/>
-                <a:cs typeface="Meiryo" pitchFamily="34" charset="-120"/>
-              </a:rPr>
-              <a:t>Sandbox filesystem + Permission Deny</a:t>
-            </a:r>
-            <a:endParaRPr lang="en-US" sz="1100" dirty="0"/>
-          </a:p>
-        </p:txBody>
-      </p:sp>
-      <p:sp>
-        <p:nvSpPr>
-          <p:cNvPr id="37" name="Shape 35"/>
-          <p:cNvSpPr/>
-          <p:nvPr/>
-        </p:nvSpPr>
-        <p:spPr>
-          <a:xfrm>
-            <a:off x="457200" y="4197096"/>
-            <a:ext cx="2743200" cy="384048"/>
-          </a:xfrm>
-          <a:prstGeom prst="rect">
-            <a:avLst/>
-          </a:prstGeom>
-          <a:solidFill>
-            <a:srgbClr val="F8F9FC"/>
-          </a:solidFill>
-          <a:ln w="6350">
-            <a:solidFill>
-              <a:srgbClr val="E5E9F2"/>
-            </a:solidFill>
-            <a:prstDash val="solid"/>
-          </a:ln>
-        </p:spPr>
-      </p:sp>
-      <p:sp>
-        <p:nvSpPr>
-          <p:cNvPr id="38" name="Text 36"/>
-          <p:cNvSpPr/>
-          <p:nvPr/>
-        </p:nvSpPr>
-        <p:spPr>
-          <a:xfrm>
-            <a:off x="548640" y="4197096"/>
-            <a:ext cx="2560320" cy="384048"/>
-          </a:xfrm>
-          <a:prstGeom prst="rect">
-            <a:avLst/>
-          </a:prstGeom>
-          <a:noFill/>
-          <a:ln/>
-        </p:spPr>
-        <p:txBody>
-          <a:bodyPr wrap="square" lIns="0" tIns="0" rIns="0" bIns="0" rtlCol="0" anchor="ctr"/>
-          <a:lstStyle/>
-          <a:p>
-            <a:pPr marL="0" indent="0">
-              <a:buNone/>
-            </a:pPr>
-            <a:r>
-              <a:rPr lang="en-US" sz="1100" b="1" dirty="0">
-                <a:solidFill>
-                  <a:srgbClr val="2D3748"/>
-                </a:solidFill>
-                <a:latin typeface="Meiryo" pitchFamily="34" charset="0"/>
-                <a:ea typeface="Meiryo" pitchFamily="34" charset="-122"/>
-                <a:cs typeface="Meiryo" pitchFamily="34" charset="-120"/>
-              </a:rPr>
-              <a:t>境界（外に拡がらない）</a:t>
-            </a:r>
-            <a:endParaRPr lang="en-US" sz="1100" dirty="0"/>
-          </a:p>
-        </p:txBody>
-      </p:sp>
-      <p:sp>
-        <p:nvSpPr>
-          <p:cNvPr id="39" name="Shape 37"/>
-          <p:cNvSpPr/>
-          <p:nvPr/>
-        </p:nvSpPr>
-        <p:spPr>
-          <a:xfrm>
-            <a:off x="3200400" y="4197096"/>
-            <a:ext cx="5486400" cy="384048"/>
-          </a:xfrm>
-          <a:prstGeom prst="rect">
-            <a:avLst/>
-          </a:prstGeom>
-          <a:solidFill>
-            <a:srgbClr val="F8F9FC"/>
-          </a:solidFill>
-          <a:ln w="6350">
-            <a:solidFill>
-              <a:srgbClr val="E5E9F2"/>
-            </a:solidFill>
-            <a:prstDash val="solid"/>
-          </a:ln>
-        </p:spPr>
-      </p:sp>
-      <p:sp>
-        <p:nvSpPr>
-          <p:cNvPr id="40" name="Text 38"/>
-          <p:cNvSpPr/>
-          <p:nvPr/>
-        </p:nvSpPr>
-        <p:spPr>
-          <a:xfrm>
-            <a:off x="3291840" y="4197096"/>
-            <a:ext cx="5303520" cy="384048"/>
-          </a:xfrm>
-          <a:prstGeom prst="rect">
-            <a:avLst/>
-          </a:prstGeom>
-          <a:noFill/>
-          <a:ln/>
-        </p:spPr>
-        <p:txBody>
-          <a:bodyPr wrap="square" lIns="0" tIns="0" rIns="0" bIns="0" rtlCol="0" anchor="ctr"/>
-          <a:lstStyle/>
-          <a:p>
-            <a:pPr marL="0" indent="0">
-              <a:buNone/>
-            </a:pPr>
-            <a:r>
-              <a:rPr lang="en-US" sz="1100" dirty="0">
-                <a:solidFill>
-                  <a:srgbClr val="2D3748"/>
-                </a:solidFill>
-                <a:latin typeface="Meiryo" pitchFamily="34" charset="0"/>
-                <a:ea typeface="Meiryo" pitchFamily="34" charset="-122"/>
-                <a:cs typeface="Meiryo" pitchFamily="34" charset="-120"/>
-              </a:rPr>
-              <a:t>ネットワーク allowlist + Sandbox</a:t>
-            </a:r>
-            <a:endParaRPr lang="en-US" sz="1100" dirty="0"/>
-          </a:p>
-        </p:txBody>
-      </p:sp>
-      <p:sp>
-        <p:nvSpPr>
-          <p:cNvPr id="41" name="Shape 39"/>
-          <p:cNvSpPr/>
-          <p:nvPr/>
-        </p:nvSpPr>
-        <p:spPr>
-          <a:xfrm>
-            <a:off x="457200" y="4526280"/>
-            <a:ext cx="8229600" cy="365760"/>
-          </a:xfrm>
-          <a:prstGeom prst="rect">
-            <a:avLst/>
-          </a:prstGeom>
-          <a:solidFill>
-            <a:srgbClr val="151B47"/>
-          </a:solidFill>
-          <a:ln w="12700">
-            <a:solidFill>
-              <a:srgbClr val="151B47"/>
-            </a:solidFill>
-            <a:prstDash val="solid"/>
-          </a:ln>
-        </p:spPr>
-      </p:sp>
-      <p:sp>
-        <p:nvSpPr>
-          <p:cNvPr id="42" name="Text 40"/>
-          <p:cNvSpPr/>
-          <p:nvPr/>
-        </p:nvSpPr>
-        <p:spPr>
-          <a:xfrm>
-            <a:off x="594360" y="4526280"/>
-            <a:ext cx="7955280" cy="365760"/>
-          </a:xfrm>
-          <a:prstGeom prst="rect">
-            <a:avLst/>
-          </a:prstGeom>
-          <a:noFill/>
-          <a:ln/>
-        </p:spPr>
-        <p:txBody>
-          <a:bodyPr wrap="square" lIns="0" tIns="0" rIns="0" bIns="0" rtlCol="0" anchor="ctr"/>
-          <a:lstStyle/>
-          <a:p>
-            <a:pPr marL="0" indent="0">
-              <a:buNone/>
-            </a:pPr>
-            <a:r>
-              <a:rPr lang="en-US" sz="1200" dirty="0">
-                <a:solidFill>
-                  <a:srgbClr val="FFFFFF"/>
-                </a:solidFill>
-                <a:latin typeface="Meiryo" pitchFamily="34" charset="0"/>
-                <a:ea typeface="Meiryo" pitchFamily="34" charset="-122"/>
-                <a:cs typeface="Meiryo" pitchFamily="34" charset="-120"/>
-              </a:rPr>
-              <a:t>💡 </a:t>
-            </a:r>
-            <a:r>
-              <a:rPr lang="en-US" sz="1100" dirty="0">
-                <a:solidFill>
-                  <a:srgbClr val="CADCFC"/>
-                </a:solidFill>
-                <a:latin typeface="Meiryo" pitchFamily="34" charset="0"/>
-                <a:ea typeface="Meiryo" pitchFamily="34" charset="-122"/>
-                <a:cs typeface="Meiryo" pitchFamily="34" charset="-120"/>
-              </a:rPr>
-              <a:t>CLAUDE.md はこれらの「読み込み指針」。</a:t>
-            </a:r>
-            <a:r>
-              <a:rPr lang="en-US" sz="1100" b="1" dirty="0">
-                <a:solidFill>
-                  <a:srgbClr val="FFFFFF"/>
-                </a:solidFill>
-                <a:latin typeface="Meiryo" pitchFamily="34" charset="0"/>
-                <a:ea typeface="Meiryo" pitchFamily="34" charset="-122"/>
-                <a:cs typeface="Meiryo" pitchFamily="34" charset="-120"/>
-              </a:rPr>
-              <a:t>settings.json が実際の「壁」。</a:t>
-            </a:r>
-            <a:endParaRPr lang="en-US" sz="1100" dirty="0"/>
-          </a:p>
-        </p:txBody>
-      </p:sp>
-      <p:sp>
-        <p:nvSpPr>
-          <p:cNvPr id="43" name="Text 41"/>
           <p:cNvSpPr/>
           <p:nvPr/>
         </p:nvSpPr>
@@ -6385,7 +5839,7 @@
 </p:sld>
 </file>
 
-<file path=ppt/slides/slide4.xml><?xml version="1.0" encoding="utf-8"?>
+<file path=ppt/slides/slide5.xml><?xml version="1.0" encoding="utf-8"?>
 <p:sld xmlns:a="http://schemas.openxmlformats.org/drawingml/2006/main" xmlns:r="http://schemas.openxmlformats.org/officeDocument/2006/relationships" xmlns:p="http://schemas.openxmlformats.org/presentationml/2006/main">
   <p:cSld name="Slide 4">
     <p:bg>
@@ -6473,6 +5927,10 @@
             <a:prstDash val="solid"/>
           </a:ln>
         </p:spPr>
+        <p:txBody>
+          <a:bodyPr/>
+          <a:p/>
+        </p:txBody>
       </p:sp>
       <p:sp>
         <p:nvSpPr>
@@ -6537,6 +5995,10 @@
             <a:prstDash val="solid"/>
           </a:ln>
         </p:spPr>
+        <p:txBody>
+          <a:bodyPr/>
+          <a:p/>
+        </p:txBody>
       </p:sp>
       <p:sp>
         <p:nvSpPr>
@@ -6839,6 +6301,10 @@
             <a:prstDash val="solid"/>
           </a:ln>
         </p:spPr>
+        <p:txBody>
+          <a:bodyPr/>
+          <a:p/>
+        </p:txBody>
       </p:sp>
       <p:sp>
         <p:nvSpPr>
@@ -6864,6 +6330,10 @@
             <a:prstDash val="solid"/>
           </a:ln>
         </p:spPr>
+        <p:txBody>
+          <a:bodyPr/>
+          <a:p/>
+        </p:txBody>
       </p:sp>
       <p:sp>
         <p:nvSpPr>
@@ -6967,6 +6437,10 @@
             <a:prstDash val="solid"/>
           </a:ln>
         </p:spPr>
+        <p:txBody>
+          <a:bodyPr/>
+          <a:p/>
+        </p:txBody>
       </p:sp>
       <p:sp>
         <p:nvSpPr>
@@ -6992,6 +6466,10 @@
             <a:prstDash val="solid"/>
           </a:ln>
         </p:spPr>
+        <p:txBody>
+          <a:bodyPr/>
+          <a:p/>
+        </p:txBody>
       </p:sp>
       <p:sp>
         <p:nvSpPr>
@@ -7095,6 +6573,10 @@
             <a:prstDash val="solid"/>
           </a:ln>
         </p:spPr>
+        <p:txBody>
+          <a:bodyPr/>
+          <a:p/>
+        </p:txBody>
       </p:sp>
       <p:sp>
         <p:nvSpPr>
@@ -7120,6 +6602,10 @@
             <a:prstDash val="solid"/>
           </a:ln>
         </p:spPr>
+        <p:txBody>
+          <a:bodyPr/>
+          <a:p/>
+        </p:txBody>
       </p:sp>
       <p:sp>
         <p:nvSpPr>
@@ -7223,6 +6709,10 @@
             <a:prstDash val="solid"/>
           </a:ln>
         </p:spPr>
+        <p:txBody>
+          <a:bodyPr/>
+          <a:p/>
+        </p:txBody>
       </p:sp>
       <p:sp>
         <p:nvSpPr>
@@ -7248,6 +6738,10 @@
             <a:prstDash val="solid"/>
           </a:ln>
         </p:spPr>
+        <p:txBody>
+          <a:bodyPr/>
+          <a:p/>
+        </p:txBody>
       </p:sp>
       <p:sp>
         <p:nvSpPr>
@@ -7351,6 +6845,10 @@
             <a:prstDash val="solid"/>
           </a:ln>
         </p:spPr>
+        <p:txBody>
+          <a:bodyPr/>
+          <a:p/>
+        </p:txBody>
       </p:sp>
       <p:sp>
         <p:nvSpPr>
@@ -7385,7 +6883,7 @@
                 <a:ea typeface="Meiryo" pitchFamily="34" charset="-122"/>
                 <a:cs typeface="Meiryo" pitchFamily="34" charset="-120"/>
               </a:rPr>
-              <a:t>💡 </a:t>
+              <a:t>→ CLAUDE.md の運用上限は FAQ Q1-1 / 守らせ方の階層整理は FAQ Q1-3</a:t>
             </a:r>
             <a:r>
               <a:rPr lang="en-US" sz="1100" dirty="0">
@@ -7396,7 +6894,7 @@
                 <a:ea typeface="Meiryo" pitchFamily="34" charset="-122"/>
                 <a:cs typeface="Meiryo" pitchFamily="34" charset="-120"/>
               </a:rPr>
-              <a:t>100〜200行を超えると遵守率が低下。</a:t>
+              <a:t/>
             </a:r>
             <a:r>
               <a:rPr lang="en-US" sz="1100" b="1" dirty="0">
@@ -7407,7 +6905,7 @@
                 <a:ea typeface="Meiryo" pitchFamily="34" charset="-122"/>
                 <a:cs typeface="Meiryo" pitchFamily="34" charset="-120"/>
               </a:rPr>
-              <a:t> 確実に守らせたいルールは settings.json に書く</a:t>
+              <a:t/>
             </a:r>
             <a:endParaRPr lang="en-US" sz="1100" dirty="0"/>
           </a:p>
@@ -7460,7 +6958,7 @@
 </p:sld>
 </file>
 
-<file path=ppt/slides/slide5.xml><?xml version="1.0" encoding="utf-8"?>
+<file path=ppt/slides/slide6.xml><?xml version="1.0" encoding="utf-8"?>
 <p:sld xmlns:a="http://schemas.openxmlformats.org/drawingml/2006/main" xmlns:r="http://schemas.openxmlformats.org/officeDocument/2006/relationships" xmlns:p="http://schemas.openxmlformats.org/presentationml/2006/main">
   <p:cSld name="Slide 5">
     <p:bg>
@@ -7548,6 +7046,10 @@
             <a:prstDash val="solid"/>
           </a:ln>
         </p:spPr>
+        <p:txBody>
+          <a:bodyPr/>
+          <a:p/>
+        </p:txBody>
       </p:sp>
       <p:sp>
         <p:nvSpPr>
@@ -7612,6 +7114,10 @@
             <a:prstDash val="solid"/>
           </a:ln>
         </p:spPr>
+        <p:txBody>
+          <a:bodyPr/>
+          <a:p/>
+        </p:txBody>
       </p:sp>
       <p:sp>
         <p:nvSpPr>
@@ -7795,6 +7301,10 @@
             <a:prstDash val="solid"/>
           </a:ln>
         </p:spPr>
+        <p:txBody>
+          <a:bodyPr/>
+          <a:p/>
+        </p:txBody>
       </p:sp>
       <p:sp>
         <p:nvSpPr>
@@ -7820,6 +7330,10 @@
             <a:prstDash val="solid"/>
           </a:ln>
         </p:spPr>
+        <p:txBody>
+          <a:bodyPr/>
+          <a:p/>
+        </p:txBody>
       </p:sp>
       <p:sp>
         <p:nvSpPr>
@@ -8034,6 +7548,10 @@
             <a:prstDash val="solid"/>
           </a:ln>
         </p:spPr>
+        <p:txBody>
+          <a:bodyPr/>
+          <a:p/>
+        </p:txBody>
       </p:sp>
       <p:sp>
         <p:nvSpPr>
@@ -8068,7 +7586,7 @@
                 <a:ea typeface="Meiryo" pitchFamily="34" charset="-122"/>
                 <a:cs typeface="Meiryo" pitchFamily="34" charset="-120"/>
               </a:rPr>
-              <a:t>💡 </a:t>
+              <a:t>→ 優先順位とBypassモードの危険性は FAQ Q2-6</a:t>
             </a:r>
             <a:r>
               <a:rPr lang="en-US" sz="1100" dirty="0">
@@ -8079,7 +7597,7 @@
                 <a:ea typeface="Meiryo" pitchFamily="34" charset="-122"/>
                 <a:cs typeface="Meiryo" pitchFamily="34" charset="-120"/>
               </a:rPr>
-              <a:t>優先順位: Enterprise &gt; Project &gt; User / Bypass でも Deny は有効（ただし Sandbox は無効化 → 次スライド）</a:t>
+              <a:t/>
             </a:r>
             <a:endParaRPr lang="en-US" sz="1100" dirty="0"/>
           </a:p>
@@ -8132,7 +7650,7 @@
 </p:sld>
 </file>
 
-<file path=ppt/slides/slide6.xml><?xml version="1.0" encoding="utf-8"?>
+<file path=ppt/slides/slide7.xml><?xml version="1.0" encoding="utf-8"?>
 <p:sld xmlns:a="http://schemas.openxmlformats.org/drawingml/2006/main" xmlns:r="http://schemas.openxmlformats.org/officeDocument/2006/relationships" xmlns:p="http://schemas.openxmlformats.org/presentationml/2006/main">
   <p:cSld name="Slide 6">
     <p:bg>
@@ -9094,7 +8612,7 @@
 </p:sld>
 </file>
 
-<file path=ppt/slides/slide7.xml><?xml version="1.0" encoding="utf-8"?>
+<file path=ppt/slides/slide8.xml><?xml version="1.0" encoding="utf-8"?>
 <p:sld xmlns:a="http://schemas.openxmlformats.org/drawingml/2006/main" xmlns:r="http://schemas.openxmlformats.org/officeDocument/2006/relationships" xmlns:p="http://schemas.openxmlformats.org/presentationml/2006/main">
   <p:cSld name="Slide 7">
     <p:bg>
@@ -10429,754 +9947,6 @@
       <p:sp>
         <p:nvSpPr>
           <p:cNvPr id="36" name="Text 34"/>
-          <p:cNvSpPr/>
-          <p:nvPr/>
-        </p:nvSpPr>
-        <p:spPr>
-          <a:xfrm>
-            <a:off x="5486400" y="4828032"/>
-            <a:ext cx="3474720" cy="228600"/>
-          </a:xfrm>
-          <a:prstGeom prst="rect">
-            <a:avLst/>
-          </a:prstGeom>
-          <a:noFill/>
-          <a:ln/>
-        </p:spPr>
-        <p:txBody>
-          <a:bodyPr wrap="square" rtlCol="0" anchor="ctr"/>
-          <a:lstStyle/>
-          <a:p>
-            <a:pPr marL="0" indent="0" algn="r">
-              <a:buNone/>
-            </a:pPr>
-            <a:r>
-              <a:rPr lang="en-US" sz="1000" kern="0" spc="100" dirty="0">
-                <a:solidFill>
-                  <a:srgbClr val="64748B"/>
-                </a:solidFill>
-                <a:latin typeface="Arial" pitchFamily="34" charset="0"/>
-                <a:ea typeface="Arial" pitchFamily="34" charset="-122"/>
-                <a:cs typeface="Arial" pitchFamily="34" charset="-120"/>
-              </a:rPr>
-              <a:t>○ ○ ● ○ ○ ○ ○ ○ ○ ○</a:t>
-            </a:r>
-            <a:endParaRPr lang="en-US" sz="1000" dirty="0"/>
-          </a:p>
-        </p:txBody>
-      </p:sp>
-    </p:spTree>
-  </p:cSld>
-  <p:clrMapOvr>
-    <a:masterClrMapping/>
-  </p:clrMapOvr>
-</p:sld>
-</file>
-
-<file path=ppt/slides/slide8.xml><?xml version="1.0" encoding="utf-8"?>
-<p:sld xmlns:a="http://schemas.openxmlformats.org/drawingml/2006/main" xmlns:r="http://schemas.openxmlformats.org/officeDocument/2006/relationships" xmlns:p="http://schemas.openxmlformats.org/presentationml/2006/main">
-  <p:cSld name="Slide 8">
-    <p:bg>
-      <p:bgPr>
-        <a:solidFill>
-          <a:srgbClr val="FFFFFF"/>
-        </a:solidFill>
-        <a:effectLst/>
-      </p:bgPr>
-    </p:bg>
-    <p:spTree>
-      <p:nvGrpSpPr>
-        <p:cNvPr id="1" name=""/>
-        <p:cNvGrpSpPr/>
-        <p:nvPr/>
-      </p:nvGrpSpPr>
-      <p:grpSpPr>
-        <a:xfrm>
-          <a:off x="0" y="0"/>
-          <a:ext cx="0" cy="0"/>
-          <a:chOff x="0" y="0"/>
-          <a:chExt cx="0" cy="0"/>
-        </a:xfrm>
-      </p:grpSpPr>
-      <p:sp>
-        <p:nvSpPr>
-          <p:cNvPr id="2" name="Text 0"/>
-          <p:cNvSpPr/>
-          <p:nvPr/>
-        </p:nvSpPr>
-        <p:spPr>
-          <a:xfrm>
-            <a:off x="457200" y="320040"/>
-            <a:ext cx="8229600" cy="548640"/>
-          </a:xfrm>
-          <a:prstGeom prst="rect">
-            <a:avLst/>
-          </a:prstGeom>
-          <a:noFill/>
-          <a:ln/>
-        </p:spPr>
-        <p:txBody>
-          <a:bodyPr wrap="square" lIns="0" tIns="0" rIns="0" bIns="0" rtlCol="0" anchor="ctr"/>
-          <a:lstStyle/>
-          <a:p>
-            <a:pPr marL="0" indent="0">
-              <a:buNone/>
-            </a:pPr>
-            <a:r>
-              <a:rPr lang="en-US" sz="2600" b="1" dirty="0">
-                <a:solidFill>
-                  <a:srgbClr val="1E2761"/>
-                </a:solidFill>
-                <a:latin typeface="Arial Black" pitchFamily="34" charset="0"/>
-                <a:ea typeface="Arial Black" pitchFamily="34" charset="-122"/>
-                <a:cs typeface="Arial Black" pitchFamily="34" charset="-120"/>
-              </a:rPr>
-              <a:t>指示の追従性 ― 4つの階段</a:t>
-            </a:r>
-            <a:endParaRPr lang="en-US" sz="2600" dirty="0"/>
-          </a:p>
-        </p:txBody>
-      </p:sp>
-      <p:sp>
-        <p:nvSpPr>
-          <p:cNvPr id="3" name="Shape 1"/>
-          <p:cNvSpPr/>
-          <p:nvPr/>
-        </p:nvSpPr>
-        <p:spPr>
-          <a:xfrm>
-            <a:off x="457200" y="932688"/>
-            <a:ext cx="548640" cy="45720"/>
-          </a:xfrm>
-          <a:prstGeom prst="rect">
-            <a:avLst/>
-          </a:prstGeom>
-          <a:solidFill>
-            <a:srgbClr val="F96167"/>
-          </a:solidFill>
-          <a:ln w="12700">
-            <a:solidFill>
-              <a:srgbClr val="F96167"/>
-            </a:solidFill>
-            <a:prstDash val="solid"/>
-          </a:ln>
-        </p:spPr>
-      </p:sp>
-      <p:sp>
-        <p:nvSpPr>
-          <p:cNvPr id="4" name="Text 2"/>
-          <p:cNvSpPr/>
-          <p:nvPr/>
-        </p:nvSpPr>
-        <p:spPr>
-          <a:xfrm>
-            <a:off x="457200" y="1051560"/>
-            <a:ext cx="8229600" cy="274320"/>
-          </a:xfrm>
-          <a:prstGeom prst="rect">
-            <a:avLst/>
-          </a:prstGeom>
-          <a:noFill/>
-          <a:ln/>
-        </p:spPr>
-        <p:txBody>
-          <a:bodyPr wrap="square" lIns="0" tIns="0" rIns="0" bIns="0" rtlCol="0" anchor="ctr"/>
-          <a:lstStyle/>
-          <a:p>
-            <a:pPr marL="0" indent="0">
-              <a:buNone/>
-            </a:pPr>
-            <a:r>
-              <a:rPr lang="en-US" sz="1300" i="1" dirty="0">
-                <a:solidFill>
-                  <a:srgbClr val="64748B"/>
-                </a:solidFill>
-                <a:latin typeface="Meiryo" pitchFamily="34" charset="0"/>
-                <a:ea typeface="Meiryo" pitchFamily="34" charset="-122"/>
-                <a:cs typeface="Meiryo" pitchFamily="34" charset="-120"/>
-              </a:rPr>
-              <a:t>確実性が必要なルールほど、上の階段で実装する</a:t>
-            </a:r>
-            <a:endParaRPr lang="en-US" sz="1300" dirty="0"/>
-          </a:p>
-        </p:txBody>
-      </p:sp>
-      <p:sp>
-        <p:nvSpPr>
-          <p:cNvPr id="5" name="Shape 3"/>
-          <p:cNvSpPr/>
-          <p:nvPr/>
-        </p:nvSpPr>
-        <p:spPr>
-          <a:xfrm>
-            <a:off x="457200" y="3749040"/>
-            <a:ext cx="8229600" cy="731520"/>
-          </a:xfrm>
-          <a:prstGeom prst="rect">
-            <a:avLst/>
-          </a:prstGeom>
-          <a:solidFill>
-            <a:srgbClr val="F8F9FC"/>
-          </a:solidFill>
-          <a:ln w="9525">
-            <a:solidFill>
-              <a:srgbClr val="E5E9F2"/>
-            </a:solidFill>
-            <a:prstDash val="solid"/>
-          </a:ln>
-        </p:spPr>
-      </p:sp>
-      <p:sp>
-        <p:nvSpPr>
-          <p:cNvPr id="6" name="Text 4"/>
-          <p:cNvSpPr/>
-          <p:nvPr/>
-        </p:nvSpPr>
-        <p:spPr>
-          <a:xfrm>
-            <a:off x="640080" y="3749040"/>
-            <a:ext cx="7863840" cy="365760"/>
-          </a:xfrm>
-          <a:prstGeom prst="rect">
-            <a:avLst/>
-          </a:prstGeom>
-          <a:noFill/>
-          <a:ln/>
-        </p:spPr>
-        <p:txBody>
-          <a:bodyPr wrap="square" lIns="0" tIns="0" rIns="0" bIns="0" rtlCol="0" anchor="b"/>
-          <a:lstStyle/>
-          <a:p>
-            <a:pPr marL="0" indent="0">
-              <a:buNone/>
-            </a:pPr>
-            <a:r>
-              <a:rPr lang="en-US" sz="1600" b="1" dirty="0">
-                <a:solidFill>
-                  <a:srgbClr val="64748B"/>
-                </a:solidFill>
-                <a:latin typeface="Arial Black" pitchFamily="34" charset="0"/>
-                <a:ea typeface="Arial Black" pitchFamily="34" charset="-122"/>
-                <a:cs typeface="Arial Black" pitchFamily="34" charset="-120"/>
-              </a:rPr>
-              <a:t>CLAUDE.md</a:t>
-            </a:r>
-            <a:endParaRPr lang="en-US" sz="1600" dirty="0"/>
-          </a:p>
-        </p:txBody>
-      </p:sp>
-      <p:sp>
-        <p:nvSpPr>
-          <p:cNvPr id="7" name="Text 5"/>
-          <p:cNvSpPr/>
-          <p:nvPr/>
-        </p:nvSpPr>
-        <p:spPr>
-          <a:xfrm>
-            <a:off x="640080" y="4114800"/>
-            <a:ext cx="7863840" cy="365760"/>
-          </a:xfrm>
-          <a:prstGeom prst="rect">
-            <a:avLst/>
-          </a:prstGeom>
-          <a:noFill/>
-          <a:ln/>
-        </p:spPr>
-        <p:txBody>
-          <a:bodyPr wrap="square" lIns="0" tIns="0" rIns="0" bIns="0" rtlCol="0" anchor="t"/>
-          <a:lstStyle/>
-          <a:p>
-            <a:pPr marL="0" indent="0">
-              <a:buNone/>
-            </a:pPr>
-            <a:r>
-              <a:rPr lang="en-US" sz="1000" dirty="0">
-                <a:solidFill>
-                  <a:srgbClr val="64748B"/>
-                </a:solidFill>
-                <a:latin typeface="Meiryo" pitchFamily="34" charset="0"/>
-                <a:ea typeface="Meiryo" pitchFamily="34" charset="-122"/>
-                <a:cs typeface="Meiryo" pitchFamily="34" charset="-120"/>
-              </a:rPr>
-              <a:t>助言的</a:t>
-            </a:r>
-            <a:endParaRPr lang="en-US" sz="1000" dirty="0"/>
-          </a:p>
-        </p:txBody>
-      </p:sp>
-      <p:sp>
-        <p:nvSpPr>
-          <p:cNvPr id="8" name="Shape 6"/>
-          <p:cNvSpPr/>
-          <p:nvPr/>
-        </p:nvSpPr>
-        <p:spPr>
-          <a:xfrm>
-            <a:off x="457200" y="2971800"/>
-            <a:ext cx="6400800" cy="731520"/>
-          </a:xfrm>
-          <a:prstGeom prst="rect">
-            <a:avLst/>
-          </a:prstGeom>
-          <a:solidFill>
-            <a:srgbClr val="CADCFC"/>
-          </a:solidFill>
-          <a:ln w="12700">
-            <a:solidFill>
-              <a:srgbClr val="CADCFC"/>
-            </a:solidFill>
-            <a:prstDash val="solid"/>
-          </a:ln>
-        </p:spPr>
-      </p:sp>
-      <p:sp>
-        <p:nvSpPr>
-          <p:cNvPr id="9" name="Text 7"/>
-          <p:cNvSpPr/>
-          <p:nvPr/>
-        </p:nvSpPr>
-        <p:spPr>
-          <a:xfrm>
-            <a:off x="640080" y="2971800"/>
-            <a:ext cx="6035040" cy="365760"/>
-          </a:xfrm>
-          <a:prstGeom prst="rect">
-            <a:avLst/>
-          </a:prstGeom>
-          <a:noFill/>
-          <a:ln/>
-        </p:spPr>
-        <p:txBody>
-          <a:bodyPr wrap="square" lIns="0" tIns="0" rIns="0" bIns="0" rtlCol="0" anchor="b"/>
-          <a:lstStyle/>
-          <a:p>
-            <a:pPr marL="0" indent="0">
-              <a:buNone/>
-            </a:pPr>
-            <a:r>
-              <a:rPr lang="en-US" sz="1600" b="1" dirty="0">
-                <a:solidFill>
-                  <a:srgbClr val="1E2761"/>
-                </a:solidFill>
-                <a:latin typeface="Arial Black" pitchFamily="34" charset="0"/>
-                <a:ea typeface="Arial Black" pitchFamily="34" charset="-122"/>
-                <a:cs typeface="Arial Black" pitchFamily="34" charset="-120"/>
-              </a:rPr>
-              <a:t>Permission Deny</a:t>
-            </a:r>
-            <a:endParaRPr lang="en-US" sz="1600" dirty="0"/>
-          </a:p>
-        </p:txBody>
-      </p:sp>
-      <p:sp>
-        <p:nvSpPr>
-          <p:cNvPr id="10" name="Text 8"/>
-          <p:cNvSpPr/>
-          <p:nvPr/>
-        </p:nvSpPr>
-        <p:spPr>
-          <a:xfrm>
-            <a:off x="640080" y="3337560"/>
-            <a:ext cx="6035040" cy="365760"/>
-          </a:xfrm>
-          <a:prstGeom prst="rect">
-            <a:avLst/>
-          </a:prstGeom>
-          <a:noFill/>
-          <a:ln/>
-        </p:spPr>
-        <p:txBody>
-          <a:bodyPr wrap="square" lIns="0" tIns="0" rIns="0" bIns="0" rtlCol="0" anchor="t"/>
-          <a:lstStyle/>
-          <a:p>
-            <a:pPr marL="0" indent="0">
-              <a:buNone/>
-            </a:pPr>
-            <a:r>
-              <a:rPr lang="en-US" sz="1000" dirty="0">
-                <a:solidFill>
-                  <a:srgbClr val="1E2761"/>
-                </a:solidFill>
-                <a:latin typeface="Meiryo" pitchFamily="34" charset="0"/>
-                <a:ea typeface="Meiryo" pitchFamily="34" charset="-122"/>
-                <a:cs typeface="Meiryo" pitchFamily="34" charset="-120"/>
-              </a:rPr>
-              <a:t>Claude Code が解釈</a:t>
-            </a:r>
-            <a:endParaRPr lang="en-US" sz="1000" dirty="0"/>
-          </a:p>
-        </p:txBody>
-      </p:sp>
-      <p:sp>
-        <p:nvSpPr>
-          <p:cNvPr id="11" name="Shape 9"/>
-          <p:cNvSpPr/>
-          <p:nvPr/>
-        </p:nvSpPr>
-        <p:spPr>
-          <a:xfrm>
-            <a:off x="457200" y="2194560"/>
-            <a:ext cx="4572000" cy="731520"/>
-          </a:xfrm>
-          <a:prstGeom prst="rect">
-            <a:avLst/>
-          </a:prstGeom>
-          <a:solidFill>
-            <a:srgbClr val="1E2761"/>
-          </a:solidFill>
-          <a:ln w="12700">
-            <a:solidFill>
-              <a:srgbClr val="1E2761"/>
-            </a:solidFill>
-            <a:prstDash val="solid"/>
-          </a:ln>
-        </p:spPr>
-      </p:sp>
-      <p:sp>
-        <p:nvSpPr>
-          <p:cNvPr id="12" name="Text 10"/>
-          <p:cNvSpPr/>
-          <p:nvPr/>
-        </p:nvSpPr>
-        <p:spPr>
-          <a:xfrm>
-            <a:off x="640080" y="2194560"/>
-            <a:ext cx="4206240" cy="365760"/>
-          </a:xfrm>
-          <a:prstGeom prst="rect">
-            <a:avLst/>
-          </a:prstGeom>
-          <a:noFill/>
-          <a:ln/>
-        </p:spPr>
-        <p:txBody>
-          <a:bodyPr wrap="square" lIns="0" tIns="0" rIns="0" bIns="0" rtlCol="0" anchor="b"/>
-          <a:lstStyle/>
-          <a:p>
-            <a:pPr marL="0" indent="0">
-              <a:buNone/>
-            </a:pPr>
-            <a:r>
-              <a:rPr lang="en-US" sz="1600" b="1" dirty="0">
-                <a:solidFill>
-                  <a:srgbClr val="FFFFFF"/>
-                </a:solidFill>
-                <a:latin typeface="Arial Black" pitchFamily="34" charset="0"/>
-                <a:ea typeface="Arial Black" pitchFamily="34" charset="-122"/>
-                <a:cs typeface="Arial Black" pitchFamily="34" charset="-120"/>
-              </a:rPr>
-              <a:t>Hooks</a:t>
-            </a:r>
-            <a:endParaRPr lang="en-US" sz="1600" dirty="0"/>
-          </a:p>
-        </p:txBody>
-      </p:sp>
-      <p:sp>
-        <p:nvSpPr>
-          <p:cNvPr id="13" name="Text 11"/>
-          <p:cNvSpPr/>
-          <p:nvPr/>
-        </p:nvSpPr>
-        <p:spPr>
-          <a:xfrm>
-            <a:off x="640080" y="2560320"/>
-            <a:ext cx="4206240" cy="365760"/>
-          </a:xfrm>
-          <a:prstGeom prst="rect">
-            <a:avLst/>
-          </a:prstGeom>
-          <a:noFill/>
-          <a:ln/>
-        </p:spPr>
-        <p:txBody>
-          <a:bodyPr wrap="square" lIns="0" tIns="0" rIns="0" bIns="0" rtlCol="0" anchor="t"/>
-          <a:lstStyle/>
-          <a:p>
-            <a:pPr marL="0" indent="0">
-              <a:buNone/>
-            </a:pPr>
-            <a:r>
-              <a:rPr lang="en-US" sz="1000" dirty="0">
-                <a:solidFill>
-                  <a:srgbClr val="FFFFFF"/>
-                </a:solidFill>
-                <a:latin typeface="Meiryo" pitchFamily="34" charset="0"/>
-                <a:ea typeface="Meiryo" pitchFamily="34" charset="-122"/>
-                <a:cs typeface="Meiryo" pitchFamily="34" charset="-120"/>
-              </a:rPr>
-              <a:t>決定的（exit 2 で100%ブロック）</a:t>
-            </a:r>
-            <a:endParaRPr lang="en-US" sz="1000" dirty="0"/>
-          </a:p>
-        </p:txBody>
-      </p:sp>
-      <p:sp>
-        <p:nvSpPr>
-          <p:cNvPr id="14" name="Shape 12"/>
-          <p:cNvSpPr/>
-          <p:nvPr/>
-        </p:nvSpPr>
-        <p:spPr>
-          <a:xfrm>
-            <a:off x="457200" y="1417320"/>
-            <a:ext cx="3200400" cy="731520"/>
-          </a:xfrm>
-          <a:prstGeom prst="rect">
-            <a:avLst/>
-          </a:prstGeom>
-          <a:solidFill>
-            <a:srgbClr val="F96167"/>
-          </a:solidFill>
-          <a:ln w="12700">
-            <a:solidFill>
-              <a:srgbClr val="F96167"/>
-            </a:solidFill>
-            <a:prstDash val="solid"/>
-          </a:ln>
-        </p:spPr>
-      </p:sp>
-      <p:sp>
-        <p:nvSpPr>
-          <p:cNvPr id="15" name="Text 13"/>
-          <p:cNvSpPr/>
-          <p:nvPr/>
-        </p:nvSpPr>
-        <p:spPr>
-          <a:xfrm>
-            <a:off x="640080" y="1417320"/>
-            <a:ext cx="2834640" cy="365760"/>
-          </a:xfrm>
-          <a:prstGeom prst="rect">
-            <a:avLst/>
-          </a:prstGeom>
-          <a:noFill/>
-          <a:ln/>
-        </p:spPr>
-        <p:txBody>
-          <a:bodyPr wrap="square" lIns="0" tIns="0" rIns="0" bIns="0" rtlCol="0" anchor="b"/>
-          <a:lstStyle/>
-          <a:p>
-            <a:pPr marL="0" indent="0">
-              <a:buNone/>
-            </a:pPr>
-            <a:r>
-              <a:rPr lang="en-US" sz="1600" b="1" dirty="0">
-                <a:solidFill>
-                  <a:srgbClr val="FFFFFF"/>
-                </a:solidFill>
-                <a:latin typeface="Arial Black" pitchFamily="34" charset="0"/>
-                <a:ea typeface="Arial Black" pitchFamily="34" charset="-122"/>
-                <a:cs typeface="Arial Black" pitchFamily="34" charset="-120"/>
-              </a:rPr>
-              <a:t>Sandbox</a:t>
-            </a:r>
-            <a:endParaRPr lang="en-US" sz="1600" dirty="0"/>
-          </a:p>
-        </p:txBody>
-      </p:sp>
-      <p:sp>
-        <p:nvSpPr>
-          <p:cNvPr id="16" name="Text 14"/>
-          <p:cNvSpPr/>
-          <p:nvPr/>
-        </p:nvSpPr>
-        <p:spPr>
-          <a:xfrm>
-            <a:off x="640080" y="1783080"/>
-            <a:ext cx="2834640" cy="365760"/>
-          </a:xfrm>
-          <a:prstGeom prst="rect">
-            <a:avLst/>
-          </a:prstGeom>
-          <a:noFill/>
-          <a:ln/>
-        </p:spPr>
-        <p:txBody>
-          <a:bodyPr wrap="square" lIns="0" tIns="0" rIns="0" bIns="0" rtlCol="0" anchor="t"/>
-          <a:lstStyle/>
-          <a:p>
-            <a:pPr marL="0" indent="0">
-              <a:buNone/>
-            </a:pPr>
-            <a:r>
-              <a:rPr lang="en-US" sz="1000" dirty="0">
-                <a:solidFill>
-                  <a:srgbClr val="FFFFFF"/>
-                </a:solidFill>
-                <a:latin typeface="Meiryo" pitchFamily="34" charset="0"/>
-                <a:ea typeface="Meiryo" pitchFamily="34" charset="-122"/>
-                <a:cs typeface="Meiryo" pitchFamily="34" charset="-120"/>
-              </a:rPr>
-              <a:t>OS/カーネルレベル強制</a:t>
-            </a:r>
-            <a:endParaRPr lang="en-US" sz="1000" dirty="0"/>
-          </a:p>
-        </p:txBody>
-      </p:sp>
-      <p:sp>
-        <p:nvSpPr>
-          <p:cNvPr id="17" name="Shape 15"/>
-          <p:cNvSpPr/>
-          <p:nvPr/>
-        </p:nvSpPr>
-        <p:spPr>
-          <a:xfrm>
-            <a:off x="5029200" y="3108960"/>
-            <a:ext cx="3657600" cy="457200"/>
-          </a:xfrm>
-          <a:prstGeom prst="rect">
-            <a:avLst/>
-          </a:prstGeom>
-          <a:solidFill>
-            <a:srgbClr val="FDECEC"/>
-          </a:solidFill>
-          <a:ln w="9525">
-            <a:solidFill>
-              <a:srgbClr val="F96167"/>
-            </a:solidFill>
-            <a:prstDash val="solid"/>
-          </a:ln>
-        </p:spPr>
-      </p:sp>
-      <p:sp>
-        <p:nvSpPr>
-          <p:cNvPr id="18" name="Text 16"/>
-          <p:cNvSpPr/>
-          <p:nvPr/>
-        </p:nvSpPr>
-        <p:spPr>
-          <a:xfrm>
-            <a:off x="5120640" y="3108960"/>
-            <a:ext cx="3474720" cy="457200"/>
-          </a:xfrm>
-          <a:prstGeom prst="rect">
-            <a:avLst/>
-          </a:prstGeom>
-          <a:noFill/>
-          <a:ln/>
-        </p:spPr>
-        <p:txBody>
-          <a:bodyPr wrap="square" lIns="0" tIns="0" rIns="0" bIns="0" rtlCol="0" anchor="ctr"/>
-          <a:lstStyle/>
-          <a:p>
-            <a:pPr marL="0" indent="0">
-              <a:buNone/>
-            </a:pPr>
-            <a:r>
-              <a:rPr lang="en-US" dirty="0">
-                <a:solidFill>
-                  <a:srgbClr val="F96167"/>
-                </a:solidFill>
-                <a:latin typeface="Meiryo" pitchFamily="34" charset="0"/>
-                <a:ea typeface="Meiryo" pitchFamily="34" charset="-122"/>
-                <a:cs typeface="Meiryo" pitchFamily="34" charset="-120"/>
-              </a:rPr>
-              <a:t>⚠ </a:t>
-            </a:r>
-            <a:r>
-              <a:rPr lang="en-US" sz="1000" b="1" dirty="0">
-                <a:solidFill>
-                  <a:srgbClr val="F96167"/>
-                </a:solidFill>
-                <a:latin typeface="Meiryo" pitchFamily="34" charset="0"/>
-                <a:ea typeface="Meiryo" pitchFamily="34" charset="-122"/>
-                <a:cs typeface="Meiryo" pitchFamily="34" charset="-120"/>
-              </a:rPr>
-              <a:t>Sandbox なしだと Bash はここを突破する</a:t>
-            </a:r>
-            <a:endParaRPr lang="en-US" sz="1000" dirty="0"/>
-          </a:p>
-        </p:txBody>
-      </p:sp>
-      <p:sp>
-        <p:nvSpPr>
-          <p:cNvPr id="19" name="Shape 17"/>
-          <p:cNvSpPr/>
-          <p:nvPr/>
-        </p:nvSpPr>
-        <p:spPr>
-          <a:xfrm>
-            <a:off x="457200" y="4572000"/>
-            <a:ext cx="8229600" cy="365760"/>
-          </a:xfrm>
-          <a:prstGeom prst="rect">
-            <a:avLst/>
-          </a:prstGeom>
-          <a:solidFill>
-            <a:srgbClr val="151B47"/>
-          </a:solidFill>
-          <a:ln w="12700">
-            <a:solidFill>
-              <a:srgbClr val="151B47"/>
-            </a:solidFill>
-            <a:prstDash val="solid"/>
-          </a:ln>
-        </p:spPr>
-      </p:sp>
-      <p:sp>
-        <p:nvSpPr>
-          <p:cNvPr id="20" name="Text 18"/>
-          <p:cNvSpPr/>
-          <p:nvPr/>
-        </p:nvSpPr>
-        <p:spPr>
-          <a:xfrm>
-            <a:off x="594360" y="4572000"/>
-            <a:ext cx="7955280" cy="365760"/>
-          </a:xfrm>
-          <a:prstGeom prst="rect">
-            <a:avLst/>
-          </a:prstGeom>
-          <a:noFill/>
-          <a:ln/>
-        </p:spPr>
-        <p:txBody>
-          <a:bodyPr wrap="square" lIns="0" tIns="0" rIns="0" bIns="0" rtlCol="0" anchor="ctr"/>
-          <a:lstStyle/>
-          <a:p>
-            <a:pPr marL="0" indent="0">
-              <a:buNone/>
-            </a:pPr>
-            <a:r>
-              <a:rPr lang="en-US" sz="1200" dirty="0">
-                <a:solidFill>
-                  <a:srgbClr val="FFFFFF"/>
-                </a:solidFill>
-                <a:latin typeface="Meiryo" pitchFamily="34" charset="0"/>
-                <a:ea typeface="Meiryo" pitchFamily="34" charset="-122"/>
-                <a:cs typeface="Meiryo" pitchFamily="34" charset="-120"/>
-              </a:rPr>
-              <a:t>💡 </a:t>
-            </a:r>
-            <a:r>
-              <a:rPr lang="en-US" sz="1100" dirty="0">
-                <a:solidFill>
-                  <a:srgbClr val="CADCFC"/>
-                </a:solidFill>
-                <a:latin typeface="Meiryo" pitchFamily="34" charset="0"/>
-                <a:ea typeface="Meiryo" pitchFamily="34" charset="-122"/>
-                <a:cs typeface="Meiryo" pitchFamily="34" charset="-120"/>
-              </a:rPr>
-              <a:t>コーディング規約 → CLAUDE.md / ツール使い方 → Skills（第4回）/ </a:t>
-            </a:r>
-            <a:r>
-              <a:rPr lang="en-US" sz="1100" b="1" dirty="0">
-                <a:solidFill>
-                  <a:srgbClr val="FFFFFF"/>
-                </a:solidFill>
-                <a:latin typeface="Meiryo" pitchFamily="34" charset="0"/>
-                <a:ea typeface="Meiryo" pitchFamily="34" charset="-122"/>
-                <a:cs typeface="Meiryo" pitchFamily="34" charset="-120"/>
-              </a:rPr>
-              <a:t>セキュリティ → Hooks + Sandbox</a:t>
-            </a:r>
-            <a:endParaRPr lang="en-US" sz="1100" dirty="0"/>
-          </a:p>
-        </p:txBody>
-      </p:sp>
-      <p:sp>
-        <p:nvSpPr>
-          <p:cNvPr id="21" name="Text 19"/>
           <p:cNvSpPr/>
           <p:nvPr/>
         </p:nvSpPr>
